--- a/Rainbow_Conference_2026_Media_Mix.pptx
+++ b/Rainbow_Conference_2026_Media_Mix.pptx
@@ -6321,8 +6321,8 @@
         </p:nvSpPr>
         <p:spPr>
           <a:xfrm>
-            <a:off x="731520" y="4663440"/>
-            <a:ext cx="10515600" cy="640080"/>
+            <a:off x="1097280" y="4663440"/>
+            <a:ext cx="10241280" cy="640080"/>
           </a:xfrm>
           <a:prstGeom prst="rect">
             <a:avLst/>
@@ -6364,7 +6364,7 @@
         </p:nvSpPr>
         <p:spPr>
           <a:xfrm>
-            <a:off x="731520" y="4663440"/>
+            <a:off x="1097280" y="4663440"/>
             <a:ext cx="63500" cy="640080"/>
           </a:xfrm>
           <a:prstGeom prst="rect">
@@ -6407,8 +6407,8 @@
         </p:nvSpPr>
         <p:spPr>
           <a:xfrm>
-            <a:off x="960120" y="4736592"/>
-            <a:ext cx="10195560" cy="493776"/>
+            <a:off x="1325880" y="4736592"/>
+            <a:ext cx="10012680" cy="493776"/>
           </a:xfrm>
           <a:prstGeom prst="rect">
             <a:avLst/>

--- a/Rainbow_Conference_2026_Media_Mix.pptx
+++ b/Rainbow_Conference_2026_Media_Mix.pptx
@@ -3118,8 +3118,8 @@
         </p:nvSpPr>
         <p:spPr>
           <a:xfrm>
-            <a:off x="914400" y="1645920"/>
-            <a:ext cx="10332720" cy="1828800"/>
+            <a:off x="914400" y="1371600"/>
+            <a:ext cx="10362895" cy="2286000"/>
           </a:xfrm>
           <a:prstGeom prst="rect">
             <a:avLst/>
@@ -3127,27 +3127,43 @@
           <a:noFill/>
         </p:spPr>
         <p:txBody>
-          <a:bodyPr wrap="square">
-            <a:spAutoFit/>
-          </a:bodyPr>
+          <a:bodyPr wrap="square" anchor="ctr"/>
           <a:lstStyle/>
           <a:p>
             <a:pPr algn="ctr">
-              <a:lnSpc>
-                <a:spcPts val="5600"/>
-              </a:lnSpc>
-              <a:defRPr sz="4800" b="1">
+              <a:spcBef>
+                <a:spcPts val="0"/>
+              </a:spcBef>
+              <a:spcAft>
+                <a:spcPts val="200"/>
+              </a:spcAft>
+            </a:pPr>
+            <a:r>
+              <a:rPr sz="3600" b="1">
                 <a:solidFill>
                   <a:srgbClr val="FFFFFF"/>
                 </a:solidFill>
                 <a:latin typeface="Segoe UI"/>
-              </a:defRPr>
+              </a:rPr>
+              <a:t>The 2026 Restoration</a:t>
+            </a:r>
+          </a:p>
+          <a:p>
+            <a:pPr algn="ctr">
+              <a:spcBef>
+                <a:spcPts val="0"/>
+              </a:spcBef>
+              <a:spcAft>
+                <a:spcPts val="200"/>
+              </a:spcAft>
             </a:pPr>
             <a:r>
-              <a:t>The 2026 Restoration</a:t>
-            </a:r>
-            <a:br/>
-            <a:r>
+              <a:rPr sz="3600" b="1">
+                <a:solidFill>
+                  <a:srgbClr val="FFFFFF"/>
+                </a:solidFill>
+                <a:latin typeface="Segoe UI"/>
+              </a:rPr>
               <a:t>Marketing Reality</a:t>
             </a:r>
           </a:p>
@@ -3161,8 +3177,8 @@
         </p:nvSpPr>
         <p:spPr>
           <a:xfrm>
-            <a:off x="914400" y="3566160"/>
-            <a:ext cx="10332720" cy="731520"/>
+            <a:off x="914400" y="3657600"/>
+            <a:ext cx="10362895" cy="457200"/>
           </a:xfrm>
           <a:prstGeom prst="rect">
             <a:avLst/>
@@ -3170,20 +3186,17 @@
           <a:noFill/>
         </p:spPr>
         <p:txBody>
-          <a:bodyPr wrap="square">
-            <a:spAutoFit/>
-          </a:bodyPr>
-          <a:lstStyle/>
-          <a:p>
-            <a:pPr algn="ctr">
-              <a:defRPr sz="2400" b="0">
+          <a:bodyPr wrap="square" anchor="t"/>
+          <a:lstStyle/>
+          <a:p>
+            <a:pPr algn="ctr"/>
+            <a:r>
+              <a:rPr sz="1800" b="0">
                 <a:solidFill>
                   <a:srgbClr val="C8102E"/>
                 </a:solidFill>
                 <a:latin typeface="Segoe UI"/>
-              </a:defRPr>
-            </a:pPr>
-            <a:r>
+              </a:rPr>
               <a:t>Winning with the Right Media Mix</a:t>
             </a:r>
           </a:p>
@@ -3197,8 +3210,8 @@
         </p:nvSpPr>
         <p:spPr>
           <a:xfrm>
-            <a:off x="914400" y="4754880"/>
-            <a:ext cx="10332720" cy="457200"/>
+            <a:off x="914400" y="5669280"/>
+            <a:ext cx="10362895" cy="320040"/>
           </a:xfrm>
           <a:prstGeom prst="rect">
             <a:avLst/>
@@ -3206,20 +3219,17 @@
           <a:noFill/>
         </p:spPr>
         <p:txBody>
-          <a:bodyPr wrap="square">
-            <a:spAutoFit/>
-          </a:bodyPr>
-          <a:lstStyle/>
-          <a:p>
-            <a:pPr algn="ctr">
-              <a:defRPr sz="1400" b="0">
-                <a:solidFill>
-                  <a:srgbClr val="808090"/>
-                </a:solidFill>
-                <a:latin typeface="Segoe UI"/>
-              </a:defRPr>
-            </a:pPr>
-            <a:r>
+          <a:bodyPr wrap="square" anchor="t"/>
+          <a:lstStyle/>
+          <a:p>
+            <a:pPr algn="ctr"/>
+            <a:r>
+              <a:rPr sz="1100" b="0">
+                <a:solidFill>
+                  <a:srgbClr val="666666"/>
+                </a:solidFill>
+                <a:latin typeface="Segoe UI"/>
+              </a:rPr>
               <a:t>Rainbow Restoration National Conference 2026</a:t>
             </a:r>
           </a:p>
@@ -3241,8 +3251,8 @@
         </p:blipFill>
         <p:spPr>
           <a:xfrm>
-            <a:off x="365760" y="6126480"/>
-            <a:ext cx="345758" cy="502920"/>
+            <a:off x="365760" y="6309360"/>
+            <a:ext cx="282892" cy="411480"/>
           </a:xfrm>
           <a:prstGeom prst="rect">
             <a:avLst/>
@@ -3265,8 +3275,8 @@
         </p:blipFill>
         <p:spPr>
           <a:xfrm>
-            <a:off x="10515600" y="6263640"/>
-            <a:ext cx="539741" cy="320040"/>
+            <a:off x="11231575" y="6400800"/>
+            <a:ext cx="462635" cy="274320"/>
           </a:xfrm>
           <a:prstGeom prst="rect">
             <a:avLst/>
@@ -3299,8 +3309,8 @@
         </p:nvSpPr>
         <p:spPr>
           <a:xfrm>
-            <a:off x="457200" y="365760"/>
-            <a:ext cx="11247120" cy="548640"/>
+            <a:off x="914400" y="457200"/>
+            <a:ext cx="10362895" cy="457200"/>
           </a:xfrm>
           <a:prstGeom prst="rect">
             <a:avLst/>
@@ -3308,20 +3318,17 @@
           <a:noFill/>
         </p:spPr>
         <p:txBody>
-          <a:bodyPr wrap="square">
-            <a:spAutoFit/>
-          </a:bodyPr>
-          <a:lstStyle/>
-          <a:p>
-            <a:pPr algn="ctr">
-              <a:defRPr sz="3000" b="1">
+          <a:bodyPr wrap="square" anchor="t"/>
+          <a:lstStyle/>
+          <a:p>
+            <a:pPr algn="ctr"/>
+            <a:r>
+              <a:rPr sz="2200" b="1">
                 <a:solidFill>
                   <a:srgbClr val="1B3057"/>
                 </a:solidFill>
                 <a:latin typeface="Segoe UI"/>
-              </a:defRPr>
-            </a:pPr>
-            <a:r>
+              </a:rPr>
               <a:t>Where Does Your Marketing Fit?</a:t>
             </a:r>
           </a:p>
@@ -3335,8 +3342,8 @@
         </p:nvSpPr>
         <p:spPr>
           <a:xfrm>
-            <a:off x="457200" y="868680"/>
-            <a:ext cx="11247120" cy="365760"/>
+            <a:off x="914400" y="914400"/>
+            <a:ext cx="10362895" cy="320040"/>
           </a:xfrm>
           <a:prstGeom prst="rect">
             <a:avLst/>
@@ -3344,20 +3351,17 @@
           <a:noFill/>
         </p:spPr>
         <p:txBody>
-          <a:bodyPr wrap="square">
-            <a:spAutoFit/>
-          </a:bodyPr>
-          <a:lstStyle/>
-          <a:p>
-            <a:pPr algn="ctr">
-              <a:defRPr sz="1600" b="0">
+          <a:bodyPr wrap="square" anchor="t"/>
+          <a:lstStyle/>
+          <a:p>
+            <a:pPr algn="ctr"/>
+            <a:r>
+              <a:rPr sz="1200" b="0">
                 <a:solidFill>
                   <a:srgbClr val="58595B"/>
                 </a:solidFill>
                 <a:latin typeface="Segoe UI"/>
-              </a:defRPr>
-            </a:pPr>
-            <a:r>
+              </a:rPr>
               <a:t>Map each activity to one of these four stages.</a:t>
             </a:r>
           </a:p>
@@ -3371,8 +3375,8 @@
         </p:nvSpPr>
         <p:spPr>
           <a:xfrm>
-            <a:off x="3352190" y="1463040"/>
-            <a:ext cx="5486400" cy="1101852"/>
+            <a:off x="3809848" y="1463040"/>
+            <a:ext cx="4572000" cy="1051560"/>
           </a:xfrm>
           <a:custGeom>
             <a:avLst/>
@@ -3381,18 +3385,18 @@
             <a:cxnLst/>
             <a:rect l="l" t="t" r="r" b="b"/>
             <a:pathLst>
-              <a:path w="5486400" h="1101852">
+              <a:path w="4572000" h="1051560">
                 <a:moveTo>
                   <a:pt x="0" y="0"/>
                 </a:moveTo>
                 <a:lnTo>
-                  <a:pt x="5486400" y="0"/>
+                  <a:pt x="4572000" y="0"/>
                 </a:lnTo>
                 <a:lnTo>
-                  <a:pt x="4718304" y="1101852"/>
+                  <a:pt x="4160520" y="1051560"/>
                 </a:lnTo>
                 <a:lnTo>
-                  <a:pt x="768096" y="1101852"/>
+                  <a:pt x="411480" y="1051560"/>
                 </a:lnTo>
                 <a:lnTo>
                   <a:pt x="0" y="0"/>
@@ -3402,7 +3406,9 @@
             </a:pathLst>
           </a:custGeom>
           <a:solidFill>
-            <a:srgbClr val="C8102E"/>
+            <a:srgbClr val="C8102E">
+              <a:alpha val="92000"/>
+            </a:srgbClr>
           </a:solidFill>
           <a:ln>
             <a:noFill/>
@@ -3438,8 +3444,8 @@
         </p:nvSpPr>
         <p:spPr>
           <a:xfrm>
-            <a:off x="3352190" y="1738503"/>
-            <a:ext cx="5486400" cy="550926"/>
+            <a:off x="4015587" y="1879092"/>
+            <a:ext cx="4160520" cy="274320"/>
           </a:xfrm>
           <a:prstGeom prst="rect">
             <a:avLst/>
@@ -3447,20 +3453,17 @@
           <a:noFill/>
         </p:spPr>
         <p:txBody>
-          <a:bodyPr wrap="square">
-            <a:spAutoFit/>
-          </a:bodyPr>
-          <a:lstStyle/>
-          <a:p>
-            <a:pPr algn="ctr">
-              <a:defRPr sz="1600" b="1">
+          <a:bodyPr wrap="square" anchor="t"/>
+          <a:lstStyle/>
+          <a:p>
+            <a:pPr algn="ctr"/>
+            <a:r>
+              <a:rPr sz="1600" b="1">
                 <a:solidFill>
                   <a:srgbClr val="FFFFFF"/>
                 </a:solidFill>
                 <a:latin typeface="Segoe UI"/>
-              </a:defRPr>
-            </a:pPr>
-            <a:r>
+              </a:rPr>
               <a:t>AWARENESS</a:t>
             </a:r>
           </a:p>
@@ -3474,8 +3477,8 @@
         </p:nvSpPr>
         <p:spPr>
           <a:xfrm>
-            <a:off x="4120286" y="2619756"/>
-            <a:ext cx="3950208" cy="1101852"/>
+            <a:off x="4221328" y="2587752"/>
+            <a:ext cx="3749040" cy="1051560"/>
           </a:xfrm>
           <a:custGeom>
             <a:avLst/>
@@ -3484,18 +3487,18 @@
             <a:cxnLst/>
             <a:rect l="l" t="t" r="r" b="b"/>
             <a:pathLst>
-              <a:path w="3950208" h="1101852">
+              <a:path w="3749040" h="1051560">
                 <a:moveTo>
                   <a:pt x="0" y="0"/>
                 </a:moveTo>
                 <a:lnTo>
-                  <a:pt x="3950208" y="0"/>
+                  <a:pt x="3749040" y="0"/>
                 </a:lnTo>
                 <a:lnTo>
-                  <a:pt x="3291840" y="1101852"/>
+                  <a:pt x="3246120" y="1051560"/>
                 </a:lnTo>
                 <a:lnTo>
-                  <a:pt x="658368" y="1101852"/>
+                  <a:pt x="502920" y="1051560"/>
                 </a:lnTo>
                 <a:lnTo>
                   <a:pt x="0" y="0"/>
@@ -3505,7 +3508,9 @@
             </a:pathLst>
           </a:custGeom>
           <a:solidFill>
-            <a:srgbClr val="9B1B30"/>
+            <a:srgbClr val="9B1B30">
+              <a:alpha val="88000"/>
+            </a:srgbClr>
           </a:solidFill>
           <a:ln>
             <a:noFill/>
@@ -3541,8 +3546,8 @@
         </p:nvSpPr>
         <p:spPr>
           <a:xfrm>
-            <a:off x="4120286" y="2895219"/>
-            <a:ext cx="3950208" cy="550926"/>
+            <a:off x="4472787" y="3003804"/>
+            <a:ext cx="3246120" cy="274320"/>
           </a:xfrm>
           <a:prstGeom prst="rect">
             <a:avLst/>
@@ -3550,20 +3555,17 @@
           <a:noFill/>
         </p:spPr>
         <p:txBody>
-          <a:bodyPr wrap="square">
-            <a:spAutoFit/>
-          </a:bodyPr>
-          <a:lstStyle/>
-          <a:p>
-            <a:pPr algn="ctr">
-              <a:defRPr sz="1400" b="1">
+          <a:bodyPr wrap="square" anchor="t"/>
+          <a:lstStyle/>
+          <a:p>
+            <a:pPr algn="ctr"/>
+            <a:r>
+              <a:rPr sz="1600" b="1">
                 <a:solidFill>
                   <a:srgbClr val="FFFFFF"/>
                 </a:solidFill>
                 <a:latin typeface="Segoe UI"/>
-              </a:defRPr>
-            </a:pPr>
-            <a:r>
+              </a:rPr>
               <a:t>CONSIDERATION</a:t>
             </a:r>
           </a:p>
@@ -3577,8 +3579,8 @@
         </p:nvSpPr>
         <p:spPr>
           <a:xfrm>
-            <a:off x="4778654" y="3776472"/>
-            <a:ext cx="2633472" cy="1101852"/>
+            <a:off x="4724248" y="3712464"/>
+            <a:ext cx="2743200" cy="1051560"/>
           </a:xfrm>
           <a:custGeom>
             <a:avLst/>
@@ -3587,18 +3589,18 @@
             <a:cxnLst/>
             <a:rect l="l" t="t" r="r" b="b"/>
             <a:pathLst>
-              <a:path w="2633472" h="1101852">
+              <a:path w="2743200" h="1051560">
                 <a:moveTo>
                   <a:pt x="0" y="0"/>
                 </a:moveTo>
                 <a:lnTo>
-                  <a:pt x="2633472" y="0"/>
+                  <a:pt x="2743200" y="0"/>
                 </a:lnTo>
                 <a:lnTo>
-                  <a:pt x="2084832" y="1101852"/>
+                  <a:pt x="2240280" y="1051560"/>
                 </a:lnTo>
                 <a:lnTo>
-                  <a:pt x="548640" y="1101852"/>
+                  <a:pt x="502920" y="1051560"/>
                 </a:lnTo>
                 <a:lnTo>
                   <a:pt x="0" y="0"/>
@@ -3608,7 +3610,9 @@
             </a:pathLst>
           </a:custGeom>
           <a:solidFill>
-            <a:srgbClr val="1B3057"/>
+            <a:srgbClr val="1B3057">
+              <a:alpha val="92000"/>
+            </a:srgbClr>
           </a:solidFill>
           <a:ln>
             <a:noFill/>
@@ -3644,8 +3648,8 @@
         </p:nvSpPr>
         <p:spPr>
           <a:xfrm>
-            <a:off x="4778654" y="4051935"/>
-            <a:ext cx="2633472" cy="550926"/>
+            <a:off x="4975707" y="4128516"/>
+            <a:ext cx="2240280" cy="274320"/>
           </a:xfrm>
           <a:prstGeom prst="rect">
             <a:avLst/>
@@ -3653,20 +3657,17 @@
           <a:noFill/>
         </p:spPr>
         <p:txBody>
-          <a:bodyPr wrap="square">
-            <a:spAutoFit/>
-          </a:bodyPr>
-          <a:lstStyle/>
-          <a:p>
-            <a:pPr algn="ctr">
-              <a:defRPr sz="1600" b="1">
+          <a:bodyPr wrap="square" anchor="t"/>
+          <a:lstStyle/>
+          <a:p>
+            <a:pPr algn="ctr"/>
+            <a:r>
+              <a:rPr sz="1600" b="1">
                 <a:solidFill>
                   <a:srgbClr val="FFFFFF"/>
                 </a:solidFill>
                 <a:latin typeface="Segoe UI"/>
-              </a:defRPr>
-            </a:pPr>
-            <a:r>
+              </a:rPr>
               <a:t>DECISION</a:t>
             </a:r>
           </a:p>
@@ -3680,8 +3681,8 @@
         </p:nvSpPr>
         <p:spPr>
           <a:xfrm>
-            <a:off x="5327294" y="4933188"/>
-            <a:ext cx="1536192" cy="1101852"/>
+            <a:off x="5227168" y="4837176"/>
+            <a:ext cx="1737360" cy="1051560"/>
           </a:xfrm>
           <a:custGeom>
             <a:avLst/>
@@ -3690,18 +3691,18 @@
             <a:cxnLst/>
             <a:rect l="l" t="t" r="r" b="b"/>
             <a:pathLst>
-              <a:path w="1536192" h="1101852">
+              <a:path w="1737360" h="1051560">
                 <a:moveTo>
                   <a:pt x="0" y="0"/>
                 </a:moveTo>
                 <a:lnTo>
-                  <a:pt x="1536192" y="0"/>
+                  <a:pt x="1737360" y="0"/>
                 </a:lnTo>
                 <a:lnTo>
-                  <a:pt x="1261872" y="1101852"/>
+                  <a:pt x="1325880" y="1051560"/>
                 </a:lnTo>
                 <a:lnTo>
-                  <a:pt x="274320" y="1101852"/>
+                  <a:pt x="411480" y="1051560"/>
                 </a:lnTo>
                 <a:lnTo>
                   <a:pt x="0" y="0"/>
@@ -3711,7 +3712,9 @@
             </a:pathLst>
           </a:custGeom>
           <a:solidFill>
-            <a:srgbClr val="58595B"/>
+            <a:srgbClr val="58595B">
+              <a:alpha val="88000"/>
+            </a:srgbClr>
           </a:solidFill>
           <a:ln>
             <a:noFill/>
@@ -3747,8 +3750,8 @@
         </p:nvSpPr>
         <p:spPr>
           <a:xfrm>
-            <a:off x="5327294" y="5208651"/>
-            <a:ext cx="1536192" cy="550926"/>
+            <a:off x="5432907" y="5253228"/>
+            <a:ext cx="1325880" cy="274320"/>
           </a:xfrm>
           <a:prstGeom prst="rect">
             <a:avLst/>
@@ -3756,20 +3759,17 @@
           <a:noFill/>
         </p:spPr>
         <p:txBody>
-          <a:bodyPr wrap="square">
-            <a:spAutoFit/>
-          </a:bodyPr>
-          <a:lstStyle/>
-          <a:p>
-            <a:pPr algn="ctr">
-              <a:defRPr sz="1200" b="1">
+          <a:bodyPr wrap="square" anchor="t"/>
+          <a:lstStyle/>
+          <a:p>
+            <a:pPr algn="ctr"/>
+            <a:r>
+              <a:rPr sz="1600" b="1">
                 <a:solidFill>
                   <a:srgbClr val="FFFFFF"/>
                 </a:solidFill>
                 <a:latin typeface="Segoe UI"/>
-              </a:defRPr>
-            </a:pPr>
-            <a:r>
+              </a:rPr>
               <a:t>CONVERSION</a:t>
             </a:r>
           </a:p>
@@ -3791,8 +3791,8 @@
         </p:blipFill>
         <p:spPr>
           <a:xfrm>
-            <a:off x="365760" y="6126480"/>
-            <a:ext cx="345758" cy="502920"/>
+            <a:off x="365760" y="6309360"/>
+            <a:ext cx="282892" cy="411480"/>
           </a:xfrm>
           <a:prstGeom prst="rect">
             <a:avLst/>
@@ -3815,8 +3815,8 @@
         </p:blipFill>
         <p:spPr>
           <a:xfrm>
-            <a:off x="10515600" y="6263640"/>
-            <a:ext cx="526948" cy="320040"/>
+            <a:off x="11231575" y="6400800"/>
+            <a:ext cx="451669" cy="274320"/>
           </a:xfrm>
           <a:prstGeom prst="rect">
             <a:avLst/>
@@ -3843,20 +3843,22 @@
       <p:grpSpPr/>
       <p:sp>
         <p:nvSpPr>
-          <p:cNvPr id="2" name="Rectangle 1"/>
+          <p:cNvPr id="2" name="Rounded Rectangle 1"/>
           <p:cNvSpPr/>
           <p:nvPr/>
         </p:nvSpPr>
         <p:spPr>
           <a:xfrm>
-            <a:off x="274320" y="274320"/>
-            <a:ext cx="11612880" cy="6309360"/>
-          </a:xfrm>
-          <a:prstGeom prst="rect">
-            <a:avLst/>
+            <a:off x="365760" y="320040"/>
+            <a:ext cx="11460175" cy="5943600"/>
+          </a:xfrm>
+          <a:prstGeom prst="roundRect">
+            <a:avLst>
+              <a:gd name="adj" fmla="val 2000"/>
+            </a:avLst>
           </a:prstGeom>
           <a:noFill/>
-          <a:ln w="50800">
+          <a:ln w="38100">
             <a:solidFill>
               <a:srgbClr val="C8102E"/>
             </a:solidFill>
@@ -3892,8 +3894,8 @@
         </p:nvSpPr>
         <p:spPr>
           <a:xfrm>
-            <a:off x="1097280" y="914400"/>
-            <a:ext cx="10058400" cy="640080"/>
+            <a:off x="822960" y="731520"/>
+            <a:ext cx="10058400" cy="411480"/>
           </a:xfrm>
           <a:prstGeom prst="rect">
             <a:avLst/>
@@ -3901,21 +3903,18 @@
           <a:noFill/>
         </p:spPr>
         <p:txBody>
-          <a:bodyPr wrap="square">
-            <a:spAutoFit/>
-          </a:bodyPr>
-          <a:lstStyle/>
-          <a:p>
-            <a:pPr algn="l">
-              <a:defRPr sz="3200" b="1">
+          <a:bodyPr wrap="square" anchor="t"/>
+          <a:lstStyle/>
+          <a:p>
+            <a:pPr algn="l"/>
+            <a:r>
+              <a:rPr sz="2000" b="1">
                 <a:solidFill>
                   <a:srgbClr val="C8102E"/>
                 </a:solidFill>
                 <a:latin typeface="Segoe UI"/>
-              </a:defRPr>
-            </a:pPr>
-            <a:r>
-              <a:t>Step 1: Map What You’re Doing</a:t>
+              </a:rPr>
+              <a:t>Step 1: Map What You're Doing</a:t>
             </a:r>
           </a:p>
         </p:txBody>
@@ -3928,8 +3927,8 @@
         </p:nvSpPr>
         <p:spPr>
           <a:xfrm>
-            <a:off x="1097280" y="2011680"/>
-            <a:ext cx="9601200" cy="3200400"/>
+            <a:off x="822960" y="1371600"/>
+            <a:ext cx="10058400" cy="3200400"/>
           </a:xfrm>
           <a:prstGeom prst="rect">
             <a:avLst/>
@@ -3937,30 +3936,25 @@
           <a:noFill/>
         </p:spPr>
         <p:txBody>
-          <a:bodyPr wrap="square">
-            <a:spAutoFit/>
-          </a:bodyPr>
-          <a:lstStyle/>
-          <a:p>
-            <a:pPr algn="l">
-              <a:lnSpc>
-                <a:spcPts val="3400"/>
-              </a:lnSpc>
+          <a:bodyPr wrap="square"/>
+          <a:lstStyle/>
+          <a:p>
+            <a:pPr algn="l" marL="228600" indent="-182880">
+              <a:spcBef>
+                <a:spcPts val="200"/>
+              </a:spcBef>
               <a:spcAft>
-                <a:spcPts val="800"/>
+                <a:spcPts val="400"/>
               </a:spcAft>
+              <a:buChar char="•"/>
+              <a:buClr>
+                <a:srgbClr val="C8102E"/>
+              </a:buClr>
+              <a:buSzPct val="100000"/>
+              <a:buFont typeface="Segoe UI"/>
             </a:pPr>
             <a:r>
-              <a:rPr sz="2000">
-                <a:solidFill>
-                  <a:srgbClr val="C8102E"/>
-                </a:solidFill>
-                <a:latin typeface="Segoe UI"/>
-              </a:rPr>
-              <a:t>•  </a:t>
-            </a:r>
-            <a:r>
-              <a:rPr sz="2000">
+              <a:rPr sz="1300" b="0">
                 <a:solidFill>
                   <a:srgbClr val="58595B"/>
                 </a:solidFill>
@@ -3970,81 +3964,108 @@
             </a:r>
           </a:p>
           <a:p>
-            <a:pPr algn="l">
-              <a:lnSpc>
-                <a:spcPts val="3400"/>
-              </a:lnSpc>
+            <a:pPr algn="l" marL="228600" indent="-182880">
+              <a:spcBef>
+                <a:spcPts val="200"/>
+              </a:spcBef>
               <a:spcAft>
-                <a:spcPts val="800"/>
+                <a:spcPts val="400"/>
               </a:spcAft>
+              <a:buChar char="•"/>
+              <a:buClr>
+                <a:srgbClr val="C8102E"/>
+              </a:buClr>
+              <a:buSzPct val="100000"/>
+              <a:buFont typeface="Segoe UI"/>
             </a:pPr>
             <a:r>
-              <a:rPr sz="2000">
-                <a:solidFill>
-                  <a:srgbClr val="C8102E"/>
-                </a:solidFill>
-                <a:latin typeface="Segoe UI"/>
-              </a:rPr>
-              <a:t>•  </a:t>
-            </a:r>
-            <a:r>
-              <a:rPr sz="2000">
+              <a:rPr sz="1300" b="0">
                 <a:solidFill>
                   <a:srgbClr val="58595B"/>
                 </a:solidFill>
                 <a:latin typeface="Segoe UI"/>
               </a:rPr>
-              <a:t>For each one, answer: WHY are you doing this?</a:t>
-            </a:r>
-          </a:p>
-          <a:p>
-            <a:pPr algn="l">
-              <a:lnSpc>
-                <a:spcPts val="3400"/>
-              </a:lnSpc>
+              <a:t>For each one, answer: </a:t>
+            </a:r>
+            <a:r>
+              <a:rPr sz="1300" b="1">
+                <a:solidFill>
+                  <a:srgbClr val="58595B"/>
+                </a:solidFill>
+                <a:latin typeface="Segoe UI"/>
+              </a:rPr>
+              <a:t>WHY</a:t>
+            </a:r>
+            <a:r>
+              <a:rPr sz="1300" b="0">
+                <a:solidFill>
+                  <a:srgbClr val="58595B"/>
+                </a:solidFill>
+                <a:latin typeface="Segoe UI"/>
+              </a:rPr>
+              <a:t> are you doing this?</a:t>
+            </a:r>
+          </a:p>
+          <a:p>
+            <a:pPr algn="l" marL="228600" indent="-182880">
+              <a:spcBef>
+                <a:spcPts val="200"/>
+              </a:spcBef>
               <a:spcAft>
-                <a:spcPts val="800"/>
+                <a:spcPts val="400"/>
               </a:spcAft>
+              <a:buChar char="•"/>
+              <a:buClr>
+                <a:srgbClr val="C8102E"/>
+              </a:buClr>
+              <a:buSzPct val="100000"/>
+              <a:buFont typeface="Segoe UI"/>
             </a:pPr>
             <a:r>
-              <a:rPr sz="2000">
-                <a:solidFill>
-                  <a:srgbClr val="C8102E"/>
-                </a:solidFill>
-                <a:latin typeface="Segoe UI"/>
-              </a:rPr>
-              <a:t>•  </a:t>
-            </a:r>
-            <a:r>
-              <a:rPr sz="2000">
+              <a:rPr sz="1300" b="0">
                 <a:solidFill>
                   <a:srgbClr val="58595B"/>
                 </a:solidFill>
                 <a:latin typeface="Segoe UI"/>
               </a:rPr>
-              <a:t>Then answer: WHERE does it fit in the funnel?</a:t>
-            </a:r>
-          </a:p>
-          <a:p>
-            <a:pPr algn="l">
-              <a:lnSpc>
-                <a:spcPts val="3400"/>
-              </a:lnSpc>
+              <a:t>Then answer: </a:t>
+            </a:r>
+            <a:r>
+              <a:rPr sz="1300" b="1">
+                <a:solidFill>
+                  <a:srgbClr val="58595B"/>
+                </a:solidFill>
+                <a:latin typeface="Segoe UI"/>
+              </a:rPr>
+              <a:t>WHERE</a:t>
+            </a:r>
+            <a:r>
+              <a:rPr sz="1300" b="0">
+                <a:solidFill>
+                  <a:srgbClr val="58595B"/>
+                </a:solidFill>
+                <a:latin typeface="Segoe UI"/>
+              </a:rPr>
+              <a:t> does it fit in the funnel?</a:t>
+            </a:r>
+          </a:p>
+          <a:p>
+            <a:pPr algn="l" marL="228600" indent="-182880">
+              <a:spcBef>
+                <a:spcPts val="200"/>
+              </a:spcBef>
               <a:spcAft>
-                <a:spcPts val="800"/>
+                <a:spcPts val="400"/>
               </a:spcAft>
+              <a:buChar char="•"/>
+              <a:buClr>
+                <a:srgbClr val="C8102E"/>
+              </a:buClr>
+              <a:buSzPct val="100000"/>
+              <a:buFont typeface="Segoe UI"/>
             </a:pPr>
             <a:r>
-              <a:rPr sz="2000">
-                <a:solidFill>
-                  <a:srgbClr val="C8102E"/>
-                </a:solidFill>
-                <a:latin typeface="Segoe UI"/>
-              </a:rPr>
-              <a:t>•  </a:t>
-            </a:r>
-            <a:r>
-              <a:rPr sz="2000">
+              <a:rPr sz="1300" b="0">
                 <a:solidFill>
                   <a:srgbClr val="58595B"/>
                 </a:solidFill>
@@ -4071,8 +4092,8 @@
         </p:blipFill>
         <p:spPr>
           <a:xfrm>
-            <a:off x="365760" y="6126480"/>
-            <a:ext cx="345758" cy="502920"/>
+            <a:off x="365760" y="6309360"/>
+            <a:ext cx="282892" cy="411480"/>
           </a:xfrm>
           <a:prstGeom prst="rect">
             <a:avLst/>
@@ -4095,8 +4116,8 @@
         </p:blipFill>
         <p:spPr>
           <a:xfrm>
-            <a:off x="10515600" y="6263640"/>
-            <a:ext cx="526948" cy="320040"/>
+            <a:off x="11231575" y="6400800"/>
+            <a:ext cx="451669" cy="274320"/>
           </a:xfrm>
           <a:prstGeom prst="rect">
             <a:avLst/>
@@ -4123,20 +4144,22 @@
       <p:grpSpPr/>
       <p:sp>
         <p:nvSpPr>
-          <p:cNvPr id="2" name="Rectangle 1"/>
+          <p:cNvPr id="2" name="Rounded Rectangle 1"/>
           <p:cNvSpPr/>
           <p:nvPr/>
         </p:nvSpPr>
         <p:spPr>
           <a:xfrm>
-            <a:off x="274320" y="274320"/>
-            <a:ext cx="11612880" cy="6309360"/>
-          </a:xfrm>
-          <a:prstGeom prst="rect">
-            <a:avLst/>
+            <a:off x="365760" y="320040"/>
+            <a:ext cx="11460175" cy="5943600"/>
+          </a:xfrm>
+          <a:prstGeom prst="roundRect">
+            <a:avLst>
+              <a:gd name="adj" fmla="val 2000"/>
+            </a:avLst>
           </a:prstGeom>
           <a:noFill/>
-          <a:ln w="50800">
+          <a:ln w="38100">
             <a:solidFill>
               <a:srgbClr val="C8102E"/>
             </a:solidFill>
@@ -4172,8 +4195,8 @@
         </p:nvSpPr>
         <p:spPr>
           <a:xfrm>
-            <a:off x="1097280" y="914400"/>
-            <a:ext cx="10058400" cy="640080"/>
+            <a:off x="822960" y="731520"/>
+            <a:ext cx="10058400" cy="411480"/>
           </a:xfrm>
           <a:prstGeom prst="rect">
             <a:avLst/>
@@ -4181,20 +4204,17 @@
           <a:noFill/>
         </p:spPr>
         <p:txBody>
-          <a:bodyPr wrap="square">
-            <a:spAutoFit/>
-          </a:bodyPr>
-          <a:lstStyle/>
-          <a:p>
-            <a:pPr algn="l">
-              <a:defRPr sz="3200" b="1">
+          <a:bodyPr wrap="square" anchor="t"/>
+          <a:lstStyle/>
+          <a:p>
+            <a:pPr algn="l"/>
+            <a:r>
+              <a:rPr sz="2000" b="1">
                 <a:solidFill>
                   <a:srgbClr val="C8102E"/>
                 </a:solidFill>
                 <a:latin typeface="Segoe UI"/>
-              </a:defRPr>
-            </a:pPr>
-            <a:r>
+              </a:rPr>
               <a:t>Step 2: Find the Gaps</a:t>
             </a:r>
           </a:p>
@@ -4208,8 +4228,8 @@
         </p:nvSpPr>
         <p:spPr>
           <a:xfrm>
-            <a:off x="1097280" y="1828800"/>
-            <a:ext cx="9601200" cy="3657600"/>
+            <a:off x="822960" y="1371600"/>
+            <a:ext cx="10058400" cy="3200400"/>
           </a:xfrm>
           <a:prstGeom prst="rect">
             <a:avLst/>
@@ -4217,148 +4237,131 @@
           <a:noFill/>
         </p:spPr>
         <p:txBody>
-          <a:bodyPr wrap="square">
-            <a:spAutoFit/>
-          </a:bodyPr>
-          <a:lstStyle/>
-          <a:p>
-            <a:pPr algn="l">
-              <a:lnSpc>
-                <a:spcPts val="3400"/>
-              </a:lnSpc>
+          <a:bodyPr wrap="square"/>
+          <a:lstStyle/>
+          <a:p>
+            <a:pPr algn="l" marL="228600" indent="-182880">
+              <a:spcBef>
+                <a:spcPts val="200"/>
+              </a:spcBef>
               <a:spcAft>
-                <a:spcPts val="1000"/>
+                <a:spcPts val="400"/>
               </a:spcAft>
+              <a:buChar char="•"/>
+              <a:buClr>
+                <a:srgbClr val="C8102E"/>
+              </a:buClr>
+              <a:buSzPct val="100000"/>
+              <a:buFont typeface="Segoe UI"/>
             </a:pPr>
             <a:r>
-              <a:rPr sz="2000">
+              <a:rPr sz="1300" b="0">
+                <a:solidFill>
+                  <a:srgbClr val="58595B"/>
+                </a:solidFill>
+                <a:latin typeface="Segoe UI"/>
+              </a:rPr>
+              <a:t>Which funnel stages have the most activity? Which have none?</a:t>
+            </a:r>
+          </a:p>
+          <a:p>
+            <a:pPr algn="l" marL="228600" indent="-182880">
+              <a:spcBef>
+                <a:spcPts val="200"/>
+              </a:spcBef>
+              <a:spcAft>
+                <a:spcPts val="400"/>
+              </a:spcAft>
+              <a:buChar char="•"/>
+              <a:buClr>
+                <a:srgbClr val="C8102E"/>
+              </a:buClr>
+              <a:buSzPct val="100000"/>
+              <a:buFont typeface="Segoe UI"/>
+            </a:pPr>
+            <a:r>
+              <a:rPr sz="1300" b="0">
+                <a:solidFill>
+                  <a:srgbClr val="58595B"/>
+                </a:solidFill>
+                <a:latin typeface="Segoe UI"/>
+              </a:rPr>
+              <a:t>Heavy on Decision (LSA, PPC) but light on everything else?</a:t>
+            </a:r>
+          </a:p>
+          <a:p>
+            <a:pPr algn="l" marL="228600" indent="-182880">
+              <a:spcBef>
+                <a:spcPts val="200"/>
+              </a:spcBef>
+              <a:spcAft>
+                <a:spcPts val="400"/>
+              </a:spcAft>
+              <a:buChar char="•"/>
+              <a:buClr>
+                <a:srgbClr val="C8102E"/>
+              </a:buClr>
+              <a:buSzPct val="100000"/>
+              <a:buFont typeface="Segoe UI"/>
+            </a:pPr>
+            <a:r>
+              <a:rPr sz="1300" b="0">
+                <a:solidFill>
+                  <a:srgbClr val="58595B"/>
+                </a:solidFill>
+                <a:latin typeface="Segoe UI"/>
+              </a:rPr>
+              <a:t>No Awareness activity at all?</a:t>
+            </a:r>
+          </a:p>
+          <a:p>
+            <a:pPr algn="l" marL="228600" indent="-182880">
+              <a:spcBef>
+                <a:spcPts val="200"/>
+              </a:spcBef>
+              <a:spcAft>
+                <a:spcPts val="400"/>
+              </a:spcAft>
+              <a:buChar char="•"/>
+              <a:buClr>
+                <a:srgbClr val="C8102E"/>
+              </a:buClr>
+              <a:buSzPct val="100000"/>
+              <a:buFont typeface="Segoe UI"/>
+            </a:pPr>
+            <a:r>
+              <a:rPr sz="1300" b="0">
+                <a:solidFill>
+                  <a:srgbClr val="58595B"/>
+                </a:solidFill>
+                <a:latin typeface="Segoe UI"/>
+              </a:rPr>
+              <a:t>Nothing in Conversion beyond "we answer the phone"?</a:t>
+            </a:r>
+          </a:p>
+          <a:p>
+            <a:pPr algn="l" marL="228600" indent="-182880">
+              <a:spcBef>
+                <a:spcPts val="200"/>
+              </a:spcBef>
+              <a:spcAft>
+                <a:spcPts val="400"/>
+              </a:spcAft>
+              <a:buChar char="•"/>
+              <a:buClr>
+                <a:srgbClr val="C8102E"/>
+              </a:buClr>
+              <a:buSzPct val="100000"/>
+              <a:buFont typeface="Segoe UI"/>
+            </a:pPr>
+            <a:r>
+              <a:rPr sz="1300" b="1">
                 <a:solidFill>
                   <a:srgbClr val="C8102E"/>
                 </a:solidFill>
                 <a:latin typeface="Segoe UI"/>
               </a:rPr>
-              <a:t>•  </a:t>
-            </a:r>
-            <a:r>
-              <a:rPr sz="2000" b="0">
-                <a:solidFill>
-                  <a:srgbClr val="58595B"/>
-                </a:solidFill>
-                <a:latin typeface="Segoe UI"/>
-              </a:rPr>
-              <a:t>Which funnel stages have the most activity? Which have none?</a:t>
-            </a:r>
-          </a:p>
-          <a:p>
-            <a:pPr algn="l">
-              <a:lnSpc>
-                <a:spcPts val="3400"/>
-              </a:lnSpc>
-              <a:spcAft>
-                <a:spcPts val="1000"/>
-              </a:spcAft>
-            </a:pPr>
-            <a:r>
-              <a:rPr sz="2000">
-                <a:solidFill>
-                  <a:srgbClr val="C8102E"/>
-                </a:solidFill>
-                <a:latin typeface="Segoe UI"/>
-              </a:rPr>
-              <a:t>•  </a:t>
-            </a:r>
-            <a:r>
-              <a:rPr sz="2000" b="0">
-                <a:solidFill>
-                  <a:srgbClr val="58595B"/>
-                </a:solidFill>
-                <a:latin typeface="Segoe UI"/>
-              </a:rPr>
-              <a:t>Heavy on Decision (LSA, PPC) but light on everything else?</a:t>
-            </a:r>
-          </a:p>
-          <a:p>
-            <a:pPr algn="l">
-              <a:lnSpc>
-                <a:spcPts val="3400"/>
-              </a:lnSpc>
-              <a:spcAft>
-                <a:spcPts val="1000"/>
-              </a:spcAft>
-            </a:pPr>
-            <a:r>
-              <a:rPr sz="2000">
-                <a:solidFill>
-                  <a:srgbClr val="C8102E"/>
-                </a:solidFill>
-                <a:latin typeface="Segoe UI"/>
-              </a:rPr>
-              <a:t>•  </a:t>
-            </a:r>
-            <a:r>
-              <a:rPr sz="2000" b="0">
-                <a:solidFill>
-                  <a:srgbClr val="58595B"/>
-                </a:solidFill>
-                <a:latin typeface="Segoe UI"/>
-              </a:rPr>
-              <a:t>No Awareness activity at all?</a:t>
-            </a:r>
-          </a:p>
-          <a:p>
-            <a:pPr algn="l">
-              <a:lnSpc>
-                <a:spcPts val="3400"/>
-              </a:lnSpc>
-              <a:spcAft>
-                <a:spcPts val="1000"/>
-              </a:spcAft>
-            </a:pPr>
-            <a:r>
-              <a:rPr sz="2000">
-                <a:solidFill>
-                  <a:srgbClr val="C8102E"/>
-                </a:solidFill>
-                <a:latin typeface="Segoe UI"/>
-              </a:rPr>
-              <a:t>•  </a:t>
-            </a:r>
-            <a:r>
-              <a:rPr sz="2000" b="0">
-                <a:solidFill>
-                  <a:srgbClr val="58595B"/>
-                </a:solidFill>
-                <a:latin typeface="Segoe UI"/>
-              </a:rPr>
-              <a:t>Nothing in Conversion beyond "we answer the phone"?</a:t>
-            </a:r>
-          </a:p>
-          <a:p>
-            <a:pPr algn="l">
-              <a:lnSpc>
-                <a:spcPts val="3400"/>
-              </a:lnSpc>
-              <a:spcAft>
-                <a:spcPts val="1000"/>
-              </a:spcAft>
-            </a:pPr>
-            <a:r>
-              <a:rPr sz="2000">
-                <a:solidFill>
-                  <a:srgbClr val="C8102E"/>
-                </a:solidFill>
-                <a:latin typeface="Segoe UI"/>
-              </a:rPr>
-              <a:t>•  </a:t>
-            </a:r>
-            <a:r>
-              <a:rPr sz="2000" b="1">
-                <a:solidFill>
-                  <a:srgbClr val="C8102E"/>
-                </a:solidFill>
-                <a:latin typeface="Segoe UI"/>
-              </a:rPr>
-              <a:t>Circle the biggest gap — that’s your #1 priority</a:t>
+              <a:t>Circle the biggest gap — that's your #1 priority</a:t>
             </a:r>
           </a:p>
         </p:txBody>
@@ -4379,8 +4382,8 @@
         </p:blipFill>
         <p:spPr>
           <a:xfrm>
-            <a:off x="365760" y="6126480"/>
-            <a:ext cx="345758" cy="502920"/>
+            <a:off x="365760" y="6309360"/>
+            <a:ext cx="282892" cy="411480"/>
           </a:xfrm>
           <a:prstGeom prst="rect">
             <a:avLst/>
@@ -4403,8 +4406,8 @@
         </p:blipFill>
         <p:spPr>
           <a:xfrm>
-            <a:off x="10515600" y="6263640"/>
-            <a:ext cx="526948" cy="320040"/>
+            <a:off x="11231575" y="6400800"/>
+            <a:ext cx="451669" cy="274320"/>
           </a:xfrm>
           <a:prstGeom prst="rect">
             <a:avLst/>
@@ -4431,20 +4434,22 @@
       <p:grpSpPr/>
       <p:sp>
         <p:nvSpPr>
-          <p:cNvPr id="2" name="Rectangle 1"/>
+          <p:cNvPr id="2" name="Rounded Rectangle 1"/>
           <p:cNvSpPr/>
           <p:nvPr/>
         </p:nvSpPr>
         <p:spPr>
           <a:xfrm>
-            <a:off x="274320" y="274320"/>
-            <a:ext cx="11612880" cy="6309360"/>
-          </a:xfrm>
-          <a:prstGeom prst="rect">
-            <a:avLst/>
+            <a:off x="365760" y="320040"/>
+            <a:ext cx="11460175" cy="5943600"/>
+          </a:xfrm>
+          <a:prstGeom prst="roundRect">
+            <a:avLst>
+              <a:gd name="adj" fmla="val 2000"/>
+            </a:avLst>
           </a:prstGeom>
           <a:noFill/>
-          <a:ln w="50800">
+          <a:ln w="38100">
             <a:solidFill>
               <a:srgbClr val="C8102E"/>
             </a:solidFill>
@@ -4480,8 +4485,8 @@
         </p:nvSpPr>
         <p:spPr>
           <a:xfrm>
-            <a:off x="1097280" y="914400"/>
-            <a:ext cx="10058400" cy="640080"/>
+            <a:off x="822960" y="731520"/>
+            <a:ext cx="10058400" cy="411480"/>
           </a:xfrm>
           <a:prstGeom prst="rect">
             <a:avLst/>
@@ -4489,20 +4494,17 @@
           <a:noFill/>
         </p:spPr>
         <p:txBody>
-          <a:bodyPr wrap="square">
-            <a:spAutoFit/>
-          </a:bodyPr>
-          <a:lstStyle/>
-          <a:p>
-            <a:pPr algn="l">
-              <a:defRPr sz="3200" b="1">
+          <a:bodyPr wrap="square" anchor="t"/>
+          <a:lstStyle/>
+          <a:p>
+            <a:pPr algn="l"/>
+            <a:r>
+              <a:rPr sz="2000" b="1">
                 <a:solidFill>
                   <a:srgbClr val="C8102E"/>
                 </a:solidFill>
                 <a:latin typeface="Segoe UI"/>
-              </a:defRPr>
-            </a:pPr>
-            <a:r>
+              </a:rPr>
               <a:t>Step 3: Pick Your Next Move</a:t>
             </a:r>
           </a:p>
@@ -4516,8 +4518,8 @@
         </p:nvSpPr>
         <p:spPr>
           <a:xfrm>
-            <a:off x="1097280" y="1828800"/>
-            <a:ext cx="9601200" cy="3657600"/>
+            <a:off x="822960" y="1371600"/>
+            <a:ext cx="10058400" cy="3200400"/>
           </a:xfrm>
           <a:prstGeom prst="rect">
             <a:avLst/>
@@ -4525,30 +4527,25 @@
           <a:noFill/>
         </p:spPr>
         <p:txBody>
-          <a:bodyPr wrap="square">
-            <a:spAutoFit/>
-          </a:bodyPr>
-          <a:lstStyle/>
-          <a:p>
-            <a:pPr algn="l">
-              <a:lnSpc>
-                <a:spcPts val="3400"/>
-              </a:lnSpc>
+          <a:bodyPr wrap="square"/>
+          <a:lstStyle/>
+          <a:p>
+            <a:pPr algn="l" marL="228600" indent="-182880">
+              <a:spcBef>
+                <a:spcPts val="200"/>
+              </a:spcBef>
               <a:spcAft>
-                <a:spcPts val="1000"/>
+                <a:spcPts val="400"/>
               </a:spcAft>
+              <a:buChar char="•"/>
+              <a:buClr>
+                <a:srgbClr val="C8102E"/>
+              </a:buClr>
+              <a:buSzPct val="100000"/>
+              <a:buFont typeface="Segoe UI"/>
             </a:pPr>
             <a:r>
-              <a:rPr sz="2000">
-                <a:solidFill>
-                  <a:srgbClr val="C8102E"/>
-                </a:solidFill>
-                <a:latin typeface="Segoe UI"/>
-              </a:rPr>
-              <a:t>•  </a:t>
-            </a:r>
-            <a:r>
-              <a:rPr sz="2000" b="0">
+              <a:rPr sz="1300" b="0">
                 <a:solidFill>
                   <a:srgbClr val="58595B"/>
                 </a:solidFill>
@@ -4557,7 +4554,7 @@
               <a:t>Based on your gaps, choose </a:t>
             </a:r>
             <a:r>
-              <a:rPr sz="2000" b="1">
+              <a:rPr sz="1300" b="1">
                 <a:solidFill>
                   <a:srgbClr val="58595B"/>
                 </a:solidFill>
@@ -4566,7 +4563,7 @@
               <a:t>1-3 things</a:t>
             </a:r>
             <a:r>
-              <a:rPr sz="2000" b="0">
+              <a:rPr sz="1300" b="0">
                 <a:solidFill>
                   <a:srgbClr val="58595B"/>
                 </a:solidFill>
@@ -4576,25 +4573,22 @@
             </a:r>
           </a:p>
           <a:p>
-            <a:pPr algn="l">
-              <a:lnSpc>
-                <a:spcPts val="3400"/>
-              </a:lnSpc>
+            <a:pPr algn="l" marL="228600" indent="-182880">
+              <a:spcBef>
+                <a:spcPts val="200"/>
+              </a:spcBef>
               <a:spcAft>
-                <a:spcPts val="1000"/>
+                <a:spcPts val="400"/>
               </a:spcAft>
+              <a:buChar char="•"/>
+              <a:buClr>
+                <a:srgbClr val="C8102E"/>
+              </a:buClr>
+              <a:buSzPct val="100000"/>
+              <a:buFont typeface="Segoe UI"/>
             </a:pPr>
             <a:r>
-              <a:rPr sz="2000">
-                <a:solidFill>
-                  <a:srgbClr val="C8102E"/>
-                </a:solidFill>
-                <a:latin typeface="Segoe UI"/>
-              </a:rPr>
-              <a:t>•  </a:t>
-            </a:r>
-            <a:r>
-              <a:rPr sz="2000" b="0">
+              <a:rPr sz="1300" b="0">
                 <a:solidFill>
                   <a:srgbClr val="58595B"/>
                 </a:solidFill>
@@ -4603,7 +4597,7 @@
               <a:t>For each one, write down: </a:t>
             </a:r>
             <a:r>
-              <a:rPr sz="2000" b="1">
+              <a:rPr sz="1300" b="1">
                 <a:solidFill>
                   <a:srgbClr val="58595B"/>
                 </a:solidFill>
@@ -4613,25 +4607,22 @@
             </a:r>
           </a:p>
           <a:p>
-            <a:pPr algn="l">
-              <a:lnSpc>
-                <a:spcPts val="3400"/>
-              </a:lnSpc>
+            <a:pPr algn="l" marL="228600" indent="-182880">
+              <a:spcBef>
+                <a:spcPts val="200"/>
+              </a:spcBef>
               <a:spcAft>
-                <a:spcPts val="1000"/>
+                <a:spcPts val="400"/>
               </a:spcAft>
+              <a:buChar char="•"/>
+              <a:buClr>
+                <a:srgbClr val="C8102E"/>
+              </a:buClr>
+              <a:buSzPct val="100000"/>
+              <a:buFont typeface="Segoe UI"/>
             </a:pPr>
             <a:r>
-              <a:rPr sz="2000">
-                <a:solidFill>
-                  <a:srgbClr val="C8102E"/>
-                </a:solidFill>
-                <a:latin typeface="Segoe UI"/>
-              </a:rPr>
-              <a:t>•  </a:t>
-            </a:r>
-            <a:r>
-              <a:rPr sz="2000" b="0">
+              <a:rPr sz="1300" b="0">
                 <a:solidFill>
                   <a:srgbClr val="58595B"/>
                 </a:solidFill>
@@ -4641,25 +4632,22 @@
             </a:r>
           </a:p>
           <a:p>
-            <a:pPr algn="l">
-              <a:lnSpc>
-                <a:spcPts val="3400"/>
-              </a:lnSpc>
+            <a:pPr algn="l" marL="228600" indent="-182880">
+              <a:spcBef>
+                <a:spcPts val="200"/>
+              </a:spcBef>
               <a:spcAft>
-                <a:spcPts val="1000"/>
+                <a:spcPts val="400"/>
               </a:spcAft>
+              <a:buChar char="•"/>
+              <a:buClr>
+                <a:srgbClr val="C8102E"/>
+              </a:buClr>
+              <a:buSzPct val="100000"/>
+              <a:buFont typeface="Segoe UI"/>
             </a:pPr>
             <a:r>
-              <a:rPr sz="2000">
-                <a:solidFill>
-                  <a:srgbClr val="C8102E"/>
-                </a:solidFill>
-                <a:latin typeface="Segoe UI"/>
-              </a:rPr>
-              <a:t>•  </a:t>
-            </a:r>
-            <a:r>
-              <a:rPr sz="2000" b="0">
+              <a:rPr sz="1300" b="0">
                 <a:solidFill>
                   <a:srgbClr val="58595B"/>
                 </a:solidFill>
@@ -4669,25 +4657,22 @@
             </a:r>
           </a:p>
           <a:p>
-            <a:pPr algn="l">
-              <a:lnSpc>
-                <a:spcPts val="3400"/>
-              </a:lnSpc>
+            <a:pPr algn="l" marL="228600" indent="-182880">
+              <a:spcBef>
+                <a:spcPts val="200"/>
+              </a:spcBef>
               <a:spcAft>
-                <a:spcPts val="1000"/>
+                <a:spcPts val="400"/>
               </a:spcAft>
+              <a:buChar char="•"/>
+              <a:buClr>
+                <a:srgbClr val="C8102E"/>
+              </a:buClr>
+              <a:buSzPct val="100000"/>
+              <a:buFont typeface="Segoe UI"/>
             </a:pPr>
             <a:r>
-              <a:rPr sz="2000">
-                <a:solidFill>
-                  <a:srgbClr val="C8102E"/>
-                </a:solidFill>
-                <a:latin typeface="Segoe UI"/>
-              </a:rPr>
-              <a:t>•  </a:t>
-            </a:r>
-            <a:r>
-              <a:rPr sz="2000" b="0">
+              <a:rPr sz="1300" b="0">
                 <a:solidFill>
                   <a:srgbClr val="58595B"/>
                 </a:solidFill>
@@ -4696,7 +4681,7 @@
               <a:t>Don't worry about the "how" yet — </a:t>
             </a:r>
             <a:r>
-              <a:rPr sz="2000" b="1">
+              <a:rPr sz="1300" b="1">
                 <a:solidFill>
                   <a:srgbClr val="C8102E"/>
                 </a:solidFill>
@@ -4723,8 +4708,8 @@
         </p:blipFill>
         <p:spPr>
           <a:xfrm>
-            <a:off x="365760" y="6126480"/>
-            <a:ext cx="345758" cy="502920"/>
+            <a:off x="365760" y="6309360"/>
+            <a:ext cx="282892" cy="411480"/>
           </a:xfrm>
           <a:prstGeom prst="rect">
             <a:avLst/>
@@ -4747,8 +4732,8 @@
         </p:blipFill>
         <p:spPr>
           <a:xfrm>
-            <a:off x="10515600" y="6263640"/>
-            <a:ext cx="526948" cy="320040"/>
+            <a:off x="11231575" y="6400800"/>
+            <a:ext cx="451669" cy="274320"/>
           </a:xfrm>
           <a:prstGeom prst="rect">
             <a:avLst/>
@@ -4797,7 +4782,7 @@
         </p:blipFill>
         <p:spPr>
           <a:xfrm>
-            <a:off x="3840480" y="731520"/>
+            <a:off x="4114800" y="914400"/>
             <a:ext cx="628650" cy="914400"/>
           </a:xfrm>
           <a:prstGeom prst="rect">
@@ -4821,7 +4806,7 @@
         </p:blipFill>
         <p:spPr>
           <a:xfrm>
-            <a:off x="6858000" y="914400"/>
+            <a:off x="6858000" y="1051560"/>
             <a:ext cx="1002375" cy="594360"/>
           </a:xfrm>
           <a:prstGeom prst="rect">
@@ -4838,7 +4823,7 @@
         <p:spPr>
           <a:xfrm>
             <a:off x="914400" y="2286000"/>
-            <a:ext cx="10332720" cy="2286000"/>
+            <a:ext cx="10362895" cy="2286000"/>
           </a:xfrm>
           <a:prstGeom prst="rect">
             <a:avLst/>
@@ -4846,31 +4831,62 @@
           <a:noFill/>
         </p:spPr>
         <p:txBody>
-          <a:bodyPr wrap="square">
-            <a:spAutoFit/>
-          </a:bodyPr>
+          <a:bodyPr wrap="square" anchor="ctr"/>
           <a:lstStyle/>
           <a:p>
             <a:pPr algn="ctr">
-              <a:lnSpc>
-                <a:spcPts val="5200"/>
-              </a:lnSpc>
-              <a:defRPr sz="4000" b="1">
+              <a:spcBef>
+                <a:spcPts val="0"/>
+              </a:spcBef>
+              <a:spcAft>
+                <a:spcPts val="200"/>
+              </a:spcAft>
+            </a:pPr>
+            <a:r>
+              <a:rPr sz="3000" b="1">
                 <a:solidFill>
                   <a:srgbClr val="FFFFFF"/>
                 </a:solidFill>
                 <a:latin typeface="Segoe UI"/>
-              </a:defRPr>
+              </a:rPr>
+              <a:t>Build the System.</a:t>
+            </a:r>
+          </a:p>
+          <a:p>
+            <a:pPr algn="ctr">
+              <a:spcBef>
+                <a:spcPts val="0"/>
+              </a:spcBef>
+              <a:spcAft>
+                <a:spcPts val="200"/>
+              </a:spcAft>
             </a:pPr>
             <a:r>
-              <a:t>Build the System.</a:t>
-            </a:r>
-            <a:br/>
-            <a:r>
+              <a:rPr sz="3000" b="1">
+                <a:solidFill>
+                  <a:srgbClr val="FFFFFF"/>
+                </a:solidFill>
+                <a:latin typeface="Segoe UI"/>
+              </a:rPr>
               <a:t>Cover the Funnel.</a:t>
             </a:r>
-            <a:br/>
-            <a:r>
+          </a:p>
+          <a:p>
+            <a:pPr algn="ctr">
+              <a:spcBef>
+                <a:spcPts val="0"/>
+              </a:spcBef>
+              <a:spcAft>
+                <a:spcPts val="200"/>
+              </a:spcAft>
+            </a:pPr>
+            <a:r>
+              <a:rPr sz="3000" b="1">
+                <a:solidFill>
+                  <a:srgbClr val="FFFFFF"/>
+                </a:solidFill>
+                <a:latin typeface="Segoe UI"/>
+              </a:rPr>
               <a:t>Win the Market.</a:t>
             </a:r>
           </a:p>
@@ -4885,7 +4901,7 @@
         <p:spPr>
           <a:xfrm>
             <a:off x="914400" y="4754880"/>
-            <a:ext cx="10332720" cy="548640"/>
+            <a:ext cx="10362895" cy="457200"/>
           </a:xfrm>
           <a:prstGeom prst="rect">
             <a:avLst/>
@@ -4893,20 +4909,17 @@
           <a:noFill/>
         </p:spPr>
         <p:txBody>
-          <a:bodyPr wrap="square">
-            <a:spAutoFit/>
-          </a:bodyPr>
-          <a:lstStyle/>
-          <a:p>
-            <a:pPr algn="ctr">
-              <a:defRPr sz="1800" b="0">
-                <a:solidFill>
-                  <a:srgbClr val="9999AA"/>
-                </a:solidFill>
-                <a:latin typeface="Segoe UI"/>
-              </a:defRPr>
-            </a:pPr>
-            <a:r>
+          <a:bodyPr wrap="square" anchor="t"/>
+          <a:lstStyle/>
+          <a:p>
+            <a:pPr algn="ctr"/>
+            <a:r>
+              <a:rPr sz="1400" b="0">
+                <a:solidFill>
+                  <a:srgbClr val="8899AA"/>
+                </a:solidFill>
+                <a:latin typeface="Segoe UI"/>
+              </a:rPr>
               <a:t>Authoritative content. Strong reviews. A brand worth citing.</a:t>
             </a:r>
           </a:p>
@@ -4954,7 +4967,7 @@
         </p:blipFill>
         <p:spPr>
           <a:xfrm>
-            <a:off x="3840480" y="457200"/>
+            <a:off x="4114800" y="548640"/>
             <a:ext cx="628650" cy="914400"/>
           </a:xfrm>
           <a:prstGeom prst="rect">
@@ -4978,7 +4991,7 @@
         </p:blipFill>
         <p:spPr>
           <a:xfrm>
-            <a:off x="6858000" y="640080"/>
+            <a:off x="6858000" y="685800"/>
             <a:ext cx="1002375" cy="594360"/>
           </a:xfrm>
           <a:prstGeom prst="rect">
@@ -4994,8 +5007,8 @@
         </p:nvSpPr>
         <p:spPr>
           <a:xfrm>
-            <a:off x="914400" y="1645920"/>
-            <a:ext cx="10332720" cy="640080"/>
+            <a:off x="914400" y="1828800"/>
+            <a:ext cx="10362895" cy="457200"/>
           </a:xfrm>
           <a:prstGeom prst="rect">
             <a:avLst/>
@@ -5003,20 +5016,17 @@
           <a:noFill/>
         </p:spPr>
         <p:txBody>
-          <a:bodyPr wrap="square">
-            <a:spAutoFit/>
-          </a:bodyPr>
-          <a:lstStyle/>
-          <a:p>
-            <a:pPr algn="ctr">
-              <a:defRPr sz="3200" b="1">
+          <a:bodyPr wrap="square" anchor="t"/>
+          <a:lstStyle/>
+          <a:p>
+            <a:pPr algn="ctr"/>
+            <a:r>
+              <a:rPr sz="2400" b="0">
                 <a:solidFill>
                   <a:srgbClr val="FFFFFF"/>
                 </a:solidFill>
                 <a:latin typeface="Segoe UI"/>
-              </a:defRPr>
-            </a:pPr>
-            <a:r>
+              </a:rPr>
               <a:t>Scan Before You Leave</a:t>
             </a:r>
           </a:p>
@@ -5030,19 +5040,19 @@
         </p:nvSpPr>
         <p:spPr>
           <a:xfrm>
-            <a:off x="2621127" y="2743200"/>
-            <a:ext cx="1828800" cy="1828800"/>
+            <a:off x="2666847" y="2743200"/>
+            <a:ext cx="1371600" cy="1371600"/>
           </a:xfrm>
           <a:prstGeom prst="roundRect">
-            <a:avLst/>
+            <a:avLst>
+              <a:gd name="adj" fmla="val 6000"/>
+            </a:avLst>
           </a:prstGeom>
           <a:solidFill>
-            <a:srgbClr val="2A4068"/>
+            <a:srgbClr val="FFFFFF"/>
           </a:solidFill>
-          <a:ln w="25400">
-            <a:solidFill>
-              <a:srgbClr val="4A6088"/>
-            </a:solidFill>
+          <a:ln>
+            <a:noFill/>
           </a:ln>
         </p:spPr>
         <p:style>
@@ -5075,8 +5085,8 @@
         </p:nvSpPr>
         <p:spPr>
           <a:xfrm>
-            <a:off x="2621127" y="3383280"/>
-            <a:ext cx="1828800" cy="365760"/>
+            <a:off x="2666847" y="3200400"/>
+            <a:ext cx="1371600" cy="274320"/>
           </a:xfrm>
           <a:prstGeom prst="rect">
             <a:avLst/>
@@ -5084,20 +5094,17 @@
           <a:noFill/>
         </p:spPr>
         <p:txBody>
-          <a:bodyPr wrap="square">
-            <a:spAutoFit/>
-          </a:bodyPr>
-          <a:lstStyle/>
-          <a:p>
-            <a:pPr algn="ctr">
-              <a:defRPr sz="1200" b="0">
-                <a:solidFill>
-                  <a:srgbClr val="607090"/>
-                </a:solidFill>
-                <a:latin typeface="Segoe UI"/>
-              </a:defRPr>
-            </a:pPr>
-            <a:r>
+          <a:bodyPr wrap="square" anchor="t"/>
+          <a:lstStyle/>
+          <a:p>
+            <a:pPr algn="ctr"/>
+            <a:r>
+              <a:rPr sz="900" b="0">
+                <a:solidFill>
+                  <a:srgbClr val="CCCCCC"/>
+                </a:solidFill>
+                <a:latin typeface="Segoe UI"/>
+              </a:rPr>
               <a:t>QR CODE</a:t>
             </a:r>
           </a:p>
@@ -5111,8 +5118,8 @@
         </p:nvSpPr>
         <p:spPr>
           <a:xfrm>
-            <a:off x="2438247" y="4709160"/>
-            <a:ext cx="2194560" cy="640080"/>
+            <a:off x="2438247" y="4251960"/>
+            <a:ext cx="1828800" cy="457200"/>
           </a:xfrm>
           <a:prstGeom prst="rect">
             <a:avLst/>
@@ -5120,20 +5127,17 @@
           <a:noFill/>
         </p:spPr>
         <p:txBody>
-          <a:bodyPr wrap="square">
-            <a:spAutoFit/>
-          </a:bodyPr>
-          <a:lstStyle/>
-          <a:p>
-            <a:pPr algn="ctr">
-              <a:defRPr sz="1400" b="1">
+          <a:bodyPr wrap="square" anchor="t"/>
+          <a:lstStyle/>
+          <a:p>
+            <a:pPr algn="ctr"/>
+            <a:r>
+              <a:rPr sz="1100" b="1">
                 <a:solidFill>
                   <a:srgbClr val="FFFFFF"/>
                 </a:solidFill>
                 <a:latin typeface="Segoe UI"/>
-              </a:defRPr>
-            </a:pPr>
-            <a:r>
+              </a:rPr>
               <a:t>Download the Report</a:t>
             </a:r>
           </a:p>
@@ -5147,19 +5151,19 @@
         </p:nvSpPr>
         <p:spPr>
           <a:xfrm>
-            <a:off x="5181447" y="2743200"/>
-            <a:ext cx="1828800" cy="1828800"/>
+            <a:off x="5410047" y="2743200"/>
+            <a:ext cx="1371600" cy="1371600"/>
           </a:xfrm>
           <a:prstGeom prst="roundRect">
-            <a:avLst/>
+            <a:avLst>
+              <a:gd name="adj" fmla="val 6000"/>
+            </a:avLst>
           </a:prstGeom>
           <a:solidFill>
-            <a:srgbClr val="2A4068"/>
+            <a:srgbClr val="FFFFFF"/>
           </a:solidFill>
-          <a:ln w="25400">
-            <a:solidFill>
-              <a:srgbClr val="4A6088"/>
-            </a:solidFill>
+          <a:ln>
+            <a:noFill/>
           </a:ln>
         </p:spPr>
         <p:style>
@@ -5192,8 +5196,8 @@
         </p:nvSpPr>
         <p:spPr>
           <a:xfrm>
-            <a:off x="5181447" y="3383280"/>
-            <a:ext cx="1828800" cy="365760"/>
+            <a:off x="5410047" y="3200400"/>
+            <a:ext cx="1371600" cy="274320"/>
           </a:xfrm>
           <a:prstGeom prst="rect">
             <a:avLst/>
@@ -5201,20 +5205,17 @@
           <a:noFill/>
         </p:spPr>
         <p:txBody>
-          <a:bodyPr wrap="square">
-            <a:spAutoFit/>
-          </a:bodyPr>
-          <a:lstStyle/>
-          <a:p>
-            <a:pPr algn="ctr">
-              <a:defRPr sz="1200" b="0">
-                <a:solidFill>
-                  <a:srgbClr val="607090"/>
-                </a:solidFill>
-                <a:latin typeface="Segoe UI"/>
-              </a:defRPr>
-            </a:pPr>
-            <a:r>
+          <a:bodyPr wrap="square" anchor="t"/>
+          <a:lstStyle/>
+          <a:p>
+            <a:pPr algn="ctr"/>
+            <a:r>
+              <a:rPr sz="900" b="0">
+                <a:solidFill>
+                  <a:srgbClr val="CCCCCC"/>
+                </a:solidFill>
+                <a:latin typeface="Segoe UI"/>
+              </a:rPr>
               <a:t>QR CODE</a:t>
             </a:r>
           </a:p>
@@ -5228,8 +5229,8 @@
         </p:nvSpPr>
         <p:spPr>
           <a:xfrm>
-            <a:off x="4998567" y="4709160"/>
-            <a:ext cx="2194560" cy="640080"/>
+            <a:off x="5181447" y="4251960"/>
+            <a:ext cx="1828800" cy="457200"/>
           </a:xfrm>
           <a:prstGeom prst="rect">
             <a:avLst/>
@@ -5237,20 +5238,17 @@
           <a:noFill/>
         </p:spPr>
         <p:txBody>
-          <a:bodyPr wrap="square">
-            <a:spAutoFit/>
-          </a:bodyPr>
-          <a:lstStyle/>
-          <a:p>
-            <a:pPr algn="ctr">
-              <a:defRPr sz="1400" b="1">
+          <a:bodyPr wrap="square" anchor="t"/>
+          <a:lstStyle/>
+          <a:p>
+            <a:pPr algn="ctr"/>
+            <a:r>
+              <a:rPr sz="1100" b="1">
                 <a:solidFill>
                   <a:srgbClr val="FFFFFF"/>
                 </a:solidFill>
                 <a:latin typeface="Segoe UI"/>
-              </a:defRPr>
-            </a:pPr>
-            <a:r>
+              </a:rPr>
               <a:t>Workshop Worksheet</a:t>
             </a:r>
           </a:p>
@@ -5264,19 +5262,19 @@
         </p:nvSpPr>
         <p:spPr>
           <a:xfrm>
-            <a:off x="7741767" y="2743200"/>
-            <a:ext cx="1828800" cy="1828800"/>
+            <a:off x="8153247" y="2743200"/>
+            <a:ext cx="1371600" cy="1371600"/>
           </a:xfrm>
           <a:prstGeom prst="roundRect">
-            <a:avLst/>
+            <a:avLst>
+              <a:gd name="adj" fmla="val 6000"/>
+            </a:avLst>
           </a:prstGeom>
           <a:solidFill>
-            <a:srgbClr val="2A4068"/>
+            <a:srgbClr val="FFFFFF"/>
           </a:solidFill>
-          <a:ln w="25400">
-            <a:solidFill>
-              <a:srgbClr val="4A6088"/>
-            </a:solidFill>
+          <a:ln>
+            <a:noFill/>
           </a:ln>
         </p:spPr>
         <p:style>
@@ -5309,8 +5307,8 @@
         </p:nvSpPr>
         <p:spPr>
           <a:xfrm>
-            <a:off x="7741767" y="3383280"/>
-            <a:ext cx="1828800" cy="365760"/>
+            <a:off x="8153247" y="3200400"/>
+            <a:ext cx="1371600" cy="274320"/>
           </a:xfrm>
           <a:prstGeom prst="rect">
             <a:avLst/>
@@ -5318,20 +5316,17 @@
           <a:noFill/>
         </p:spPr>
         <p:txBody>
-          <a:bodyPr wrap="square">
-            <a:spAutoFit/>
-          </a:bodyPr>
-          <a:lstStyle/>
-          <a:p>
-            <a:pPr algn="ctr">
-              <a:defRPr sz="1200" b="0">
-                <a:solidFill>
-                  <a:srgbClr val="607090"/>
-                </a:solidFill>
-                <a:latin typeface="Segoe UI"/>
-              </a:defRPr>
-            </a:pPr>
-            <a:r>
+          <a:bodyPr wrap="square" anchor="t"/>
+          <a:lstStyle/>
+          <a:p>
+            <a:pPr algn="ctr"/>
+            <a:r>
+              <a:rPr sz="900" b="0">
+                <a:solidFill>
+                  <a:srgbClr val="CCCCCC"/>
+                </a:solidFill>
+                <a:latin typeface="Segoe UI"/>
+              </a:rPr>
               <a:t>QR CODE</a:t>
             </a:r>
           </a:p>
@@ -5345,8 +5340,8 @@
         </p:nvSpPr>
         <p:spPr>
           <a:xfrm>
-            <a:off x="7558887" y="4709160"/>
-            <a:ext cx="2194560" cy="640080"/>
+            <a:off x="7924647" y="4251960"/>
+            <a:ext cx="1828800" cy="457200"/>
           </a:xfrm>
           <a:prstGeom prst="rect">
             <a:avLst/>
@@ -5354,25 +5349,19 @@
           <a:noFill/>
         </p:spPr>
         <p:txBody>
-          <a:bodyPr wrap="square">
-            <a:spAutoFit/>
-          </a:bodyPr>
-          <a:lstStyle/>
-          <a:p>
-            <a:pPr algn="ctr">
-              <a:defRPr sz="1400" b="1">
+          <a:bodyPr wrap="square" anchor="t"/>
+          <a:lstStyle/>
+          <a:p>
+            <a:pPr algn="ctr"/>
+            <a:r>
+              <a:rPr sz="1100" b="1">
                 <a:solidFill>
                   <a:srgbClr val="FFFFFF"/>
                 </a:solidFill>
                 <a:latin typeface="Segoe UI"/>
-              </a:defRPr>
-            </a:pPr>
-            <a:r>
-              <a:t>Talk to an SOS</a:t>
-            </a:r>
-            <a:br/>
-            <a:r>
-              <a:t>Marketing Consultant</a:t>
+              </a:rPr>
+              <a:t>Talk to an SOS
+Marketing Consultant</a:t>
             </a:r>
           </a:p>
         </p:txBody>
@@ -5489,8 +5478,8 @@
         </p:nvSpPr>
         <p:spPr>
           <a:xfrm>
-            <a:off x="1218895" y="3401568"/>
-            <a:ext cx="9753904" cy="50800"/>
+            <a:off x="1219169" y="3419856"/>
+            <a:ext cx="9753356" cy="38100"/>
           </a:xfrm>
           <a:prstGeom prst="rect">
             <a:avLst/>
@@ -5532,8 +5521,8 @@
         </p:nvSpPr>
         <p:spPr>
           <a:xfrm>
-            <a:off x="914400" y="1645920"/>
-            <a:ext cx="10332720" cy="1371600"/>
+            <a:off x="914400" y="914400"/>
+            <a:ext cx="10362895" cy="2286000"/>
           </a:xfrm>
           <a:prstGeom prst="rect">
             <a:avLst/>
@@ -5541,28 +5530,18 @@
           <a:noFill/>
         </p:spPr>
         <p:txBody>
-          <a:bodyPr wrap="square">
-            <a:spAutoFit/>
-          </a:bodyPr>
-          <a:lstStyle/>
-          <a:p>
-            <a:pPr algn="ctr">
-              <a:lnSpc>
-                <a:spcPts val="5000"/>
-              </a:lnSpc>
-              <a:defRPr sz="4000" b="1">
+          <a:bodyPr wrap="square" anchor="b"/>
+          <a:lstStyle/>
+          <a:p>
+            <a:pPr algn="ctr"/>
+            <a:r>
+              <a:rPr sz="3200" b="1">
                 <a:solidFill>
                   <a:srgbClr val="1B3057"/>
                 </a:solidFill>
                 <a:latin typeface="Segoe UI"/>
-              </a:defRPr>
-            </a:pPr>
-            <a:r>
-              <a:t>How your customers find you</a:t>
-            </a:r>
-            <a:br/>
-            <a:r>
-              <a:t>has changed</a:t>
+              </a:rPr>
+              <a:t>How your customers find you has changed</a:t>
             </a:r>
           </a:p>
         </p:txBody>
@@ -5575,8 +5554,8 @@
         </p:nvSpPr>
         <p:spPr>
           <a:xfrm>
-            <a:off x="914400" y="4114800"/>
-            <a:ext cx="10332720" cy="914400"/>
+            <a:off x="914400" y="3657600"/>
+            <a:ext cx="10362895" cy="2286000"/>
           </a:xfrm>
           <a:prstGeom prst="rect">
             <a:avLst/>
@@ -5584,20 +5563,17 @@
           <a:noFill/>
         </p:spPr>
         <p:txBody>
-          <a:bodyPr wrap="square">
-            <a:spAutoFit/>
-          </a:bodyPr>
-          <a:lstStyle/>
-          <a:p>
-            <a:pPr algn="ctr">
-              <a:defRPr sz="2600" b="0">
-                <a:solidFill>
-                  <a:srgbClr val="AAAAAA"/>
-                </a:solidFill>
-                <a:latin typeface="Segoe UI"/>
-              </a:defRPr>
-            </a:pPr>
-            <a:r>
+          <a:bodyPr wrap="square" anchor="t"/>
+          <a:lstStyle/>
+          <a:p>
+            <a:pPr algn="ctr"/>
+            <a:r>
+              <a:rPr sz="2000" b="0">
+                <a:solidFill>
+                  <a:srgbClr val="999999"/>
+                </a:solidFill>
+                <a:latin typeface="Segoe UI"/>
+              </a:rPr>
               <a:t>Has your marketing kept up?</a:t>
             </a:r>
           </a:p>
@@ -5619,8 +5595,8 @@
         </p:blipFill>
         <p:spPr>
           <a:xfrm>
-            <a:off x="365760" y="6126480"/>
-            <a:ext cx="345758" cy="502920"/>
+            <a:off x="365760" y="6309360"/>
+            <a:ext cx="282892" cy="411480"/>
           </a:xfrm>
           <a:prstGeom prst="rect">
             <a:avLst/>
@@ -5643,8 +5619,8 @@
         </p:blipFill>
         <p:spPr>
           <a:xfrm>
-            <a:off x="10515600" y="6263640"/>
-            <a:ext cx="539741" cy="320040"/>
+            <a:off x="11231575" y="6400800"/>
+            <a:ext cx="462635" cy="274320"/>
           </a:xfrm>
           <a:prstGeom prst="rect">
             <a:avLst/>
@@ -5677,8 +5653,8 @@
         </p:nvSpPr>
         <p:spPr>
           <a:xfrm>
-            <a:off x="731520" y="365760"/>
-            <a:ext cx="10058400" cy="548640"/>
+            <a:off x="548640" y="457200"/>
+            <a:ext cx="11094415" cy="411480"/>
           </a:xfrm>
           <a:prstGeom prst="rect">
             <a:avLst/>
@@ -5686,20 +5662,17 @@
           <a:noFill/>
         </p:spPr>
         <p:txBody>
-          <a:bodyPr wrap="square">
-            <a:spAutoFit/>
-          </a:bodyPr>
-          <a:lstStyle/>
-          <a:p>
-            <a:pPr algn="l">
-              <a:defRPr sz="2800" b="1">
+          <a:bodyPr wrap="square" anchor="t"/>
+          <a:lstStyle/>
+          <a:p>
+            <a:pPr algn="l"/>
+            <a:r>
+              <a:rPr sz="2000" b="1">
                 <a:solidFill>
                   <a:srgbClr val="1B3057"/>
                 </a:solidFill>
                 <a:latin typeface="Segoe UI"/>
-              </a:defRPr>
-            </a:pPr>
-            <a:r>
+              </a:rPr>
               <a:t>Your Media Mix Is Your System</a:t>
             </a:r>
           </a:p>
@@ -5713,8 +5686,8 @@
         </p:nvSpPr>
         <p:spPr>
           <a:xfrm>
-            <a:off x="731520" y="868680"/>
-            <a:ext cx="4114800" cy="38100"/>
+            <a:off x="548640" y="841248"/>
+            <a:ext cx="11094415" cy="38100"/>
           </a:xfrm>
           <a:prstGeom prst="rect">
             <a:avLst/>
@@ -5756,8 +5729,8 @@
         </p:nvSpPr>
         <p:spPr>
           <a:xfrm>
-            <a:off x="731520" y="1097280"/>
-            <a:ext cx="10058400" cy="1097280"/>
+            <a:off x="548640" y="960120"/>
+            <a:ext cx="11094415" cy="640080"/>
           </a:xfrm>
           <a:prstGeom prst="rect">
             <a:avLst/>
@@ -5765,30 +5738,25 @@
           <a:noFill/>
         </p:spPr>
         <p:txBody>
-          <a:bodyPr wrap="square">
-            <a:spAutoFit/>
-          </a:bodyPr>
-          <a:lstStyle/>
-          <a:p>
-            <a:pPr algn="l">
-              <a:lnSpc>
-                <a:spcPts val="2400"/>
-              </a:lnSpc>
+          <a:bodyPr wrap="square"/>
+          <a:lstStyle/>
+          <a:p>
+            <a:pPr algn="l" marL="228600" indent="-182880">
+              <a:spcBef>
+                <a:spcPts val="200"/>
+              </a:spcBef>
               <a:spcAft>
-                <a:spcPts val="800"/>
+                <a:spcPts val="400"/>
               </a:spcAft>
+              <a:buChar char="•"/>
+              <a:buClr>
+                <a:srgbClr val="C8102E"/>
+              </a:buClr>
+              <a:buSzPct val="100000"/>
+              <a:buFont typeface="Segoe UI"/>
             </a:pPr>
             <a:r>
-              <a:rPr sz="1600">
-                <a:solidFill>
-                  <a:srgbClr val="C8102E"/>
-                </a:solidFill>
-                <a:latin typeface="Segoe UI"/>
-              </a:rPr>
-              <a:t>•  </a:t>
-            </a:r>
-            <a:r>
-              <a:rPr sz="1600">
+              <a:rPr sz="1300" b="0">
                 <a:solidFill>
                   <a:srgbClr val="58595B"/>
                 </a:solidFill>
@@ -5798,51 +5766,59 @@
             </a:r>
           </a:p>
           <a:p>
-            <a:pPr algn="l">
-              <a:lnSpc>
-                <a:spcPts val="2400"/>
-              </a:lnSpc>
+            <a:pPr algn="l" marL="228600" indent="-182880">
+              <a:spcBef>
+                <a:spcPts val="200"/>
+              </a:spcBef>
               <a:spcAft>
-                <a:spcPts val="800"/>
+                <a:spcPts val="400"/>
               </a:spcAft>
+              <a:buChar char="•"/>
+              <a:buClr>
+                <a:srgbClr val="C8102E"/>
+              </a:buClr>
+              <a:buSzPct val="100000"/>
+              <a:buFont typeface="Segoe UI"/>
             </a:pPr>
             <a:r>
-              <a:rPr sz="1600">
-                <a:solidFill>
-                  <a:srgbClr val="C8102E"/>
-                </a:solidFill>
-                <a:latin typeface="Segoe UI"/>
-              </a:rPr>
-              <a:t>•  </a:t>
-            </a:r>
-            <a:r>
-              <a:rPr sz="1600">
+              <a:rPr sz="1300" b="0">
                 <a:solidFill>
                   <a:srgbClr val="58595B"/>
                 </a:solidFill>
                 <a:latin typeface="Segoe UI"/>
               </a:rPr>
-              <a:t>Most operators have a list of channels. The best operators have a system.</a:t>
-            </a:r>
-          </a:p>
-        </p:txBody>
-      </p:sp>
-      <p:sp>
-        <p:nvSpPr>
-          <p:cNvPr id="5" name="Rectangle 4"/>
+              <a:t>Most operators have a list of channels. The best operators have a </a:t>
+            </a:r>
+            <a:r>
+              <a:rPr sz="1300" b="1">
+                <a:solidFill>
+                  <a:srgbClr val="58595B"/>
+                </a:solidFill>
+                <a:latin typeface="Segoe UI"/>
+              </a:rPr>
+              <a:t>system.</a:t>
+            </a:r>
+          </a:p>
+        </p:txBody>
+      </p:sp>
+      <p:sp>
+        <p:nvSpPr>
+          <p:cNvPr id="5" name="Rounded Rectangle 4"/>
           <p:cNvSpPr/>
           <p:nvPr/>
         </p:nvSpPr>
         <p:spPr>
           <a:xfrm>
-            <a:off x="1097280" y="2743200"/>
-            <a:ext cx="3200400" cy="1463040"/>
-          </a:xfrm>
-          <a:prstGeom prst="rect">
-            <a:avLst/>
+            <a:off x="548640" y="1737360"/>
+            <a:ext cx="3606698" cy="1188720"/>
+          </a:xfrm>
+          <a:prstGeom prst="roundRect">
+            <a:avLst>
+              <a:gd name="adj" fmla="val 4000"/>
+            </a:avLst>
           </a:prstGeom>
           <a:solidFill>
-            <a:srgbClr val="E8ECF2"/>
+            <a:srgbClr val="EDEEF0"/>
           </a:solidFill>
           <a:ln>
             <a:noFill/>
@@ -5878,8 +5854,8 @@
         </p:nvSpPr>
         <p:spPr>
           <a:xfrm>
-            <a:off x="1097280" y="2743200"/>
-            <a:ext cx="3200400" cy="63500"/>
+            <a:off x="548640" y="1737360"/>
+            <a:ext cx="3606698" cy="50800"/>
           </a:xfrm>
           <a:prstGeom prst="rect">
             <a:avLst/>
@@ -5921,8 +5897,8 @@
         </p:nvSpPr>
         <p:spPr>
           <a:xfrm>
-            <a:off x="1097280" y="2926080"/>
-            <a:ext cx="3200400" cy="457200"/>
+            <a:off x="548640" y="1920240"/>
+            <a:ext cx="3606698" cy="365760"/>
           </a:xfrm>
           <a:prstGeom prst="rect">
             <a:avLst/>
@@ -5930,20 +5906,17 @@
           <a:noFill/>
         </p:spPr>
         <p:txBody>
-          <a:bodyPr wrap="square">
-            <a:spAutoFit/>
-          </a:bodyPr>
-          <a:lstStyle/>
-          <a:p>
-            <a:pPr algn="ctr">
-              <a:defRPr sz="2600" b="1">
+          <a:bodyPr wrap="square" anchor="t"/>
+          <a:lstStyle/>
+          <a:p>
+            <a:pPr algn="ctr"/>
+            <a:r>
+              <a:rPr sz="2200" b="1">
                 <a:solidFill>
                   <a:srgbClr val="1B3057"/>
                 </a:solidFill>
                 <a:latin typeface="Segoe UI"/>
-              </a:defRPr>
-            </a:pPr>
-            <a:r>
+              </a:rPr>
               <a:t>CAPTURE</a:t>
             </a:r>
           </a:p>
@@ -5957,8 +5930,8 @@
         </p:nvSpPr>
         <p:spPr>
           <a:xfrm>
-            <a:off x="1097280" y="3383280"/>
-            <a:ext cx="3200400" cy="640080"/>
+            <a:off x="640080" y="2331720"/>
+            <a:ext cx="3423818" cy="457200"/>
           </a:xfrm>
           <a:prstGeom prst="rect">
             <a:avLst/>
@@ -5966,45 +5939,41 @@
           <a:noFill/>
         </p:spPr>
         <p:txBody>
-          <a:bodyPr wrap="square">
-            <a:spAutoFit/>
-          </a:bodyPr>
-          <a:lstStyle/>
-          <a:p>
-            <a:pPr algn="ctr">
-              <a:defRPr sz="1300" b="0">
+          <a:bodyPr wrap="square" anchor="t"/>
+          <a:lstStyle/>
+          <a:p>
+            <a:pPr algn="ctr"/>
+            <a:r>
+              <a:rPr sz="1000" b="0">
                 <a:solidFill>
                   <a:srgbClr val="58595B"/>
                 </a:solidFill>
                 <a:latin typeface="Segoe UI"/>
-              </a:defRPr>
-            </a:pPr>
-            <a:r>
-              <a:t>Demand that</a:t>
-            </a:r>
-            <a:br/>
-            <a:r>
-              <a:t>already exists</a:t>
-            </a:r>
-          </a:p>
-        </p:txBody>
-      </p:sp>
-      <p:sp>
-        <p:nvSpPr>
-          <p:cNvPr id="9" name="Rectangle 8"/>
+              </a:rPr>
+              <a:t>Demand that
+already exists</a:t>
+            </a:r>
+          </a:p>
+        </p:txBody>
+      </p:sp>
+      <p:sp>
+        <p:nvSpPr>
+          <p:cNvPr id="9" name="Rounded Rectangle 8"/>
           <p:cNvSpPr/>
           <p:nvPr/>
         </p:nvSpPr>
         <p:spPr>
           <a:xfrm>
-            <a:off x="4617720" y="2743200"/>
-            <a:ext cx="3200400" cy="1463040"/>
-          </a:xfrm>
-          <a:prstGeom prst="rect">
-            <a:avLst/>
+            <a:off x="4292498" y="1737360"/>
+            <a:ext cx="3606698" cy="1188720"/>
+          </a:xfrm>
+          <a:prstGeom prst="roundRect">
+            <a:avLst>
+              <a:gd name="adj" fmla="val 4000"/>
+            </a:avLst>
           </a:prstGeom>
           <a:solidFill>
-            <a:srgbClr val="FBF0F1"/>
+            <a:srgbClr val="FDEEF0"/>
           </a:solidFill>
           <a:ln>
             <a:noFill/>
@@ -6040,8 +6009,8 @@
         </p:nvSpPr>
         <p:spPr>
           <a:xfrm>
-            <a:off x="4617720" y="2743200"/>
-            <a:ext cx="3200400" cy="63500"/>
+            <a:off x="4292498" y="1737360"/>
+            <a:ext cx="3606698" cy="50800"/>
           </a:xfrm>
           <a:prstGeom prst="rect">
             <a:avLst/>
@@ -6083,8 +6052,8 @@
         </p:nvSpPr>
         <p:spPr>
           <a:xfrm>
-            <a:off x="4617720" y="2926080"/>
-            <a:ext cx="3200400" cy="457200"/>
+            <a:off x="4292498" y="1920240"/>
+            <a:ext cx="3606698" cy="365760"/>
           </a:xfrm>
           <a:prstGeom prst="rect">
             <a:avLst/>
@@ -6092,20 +6061,17 @@
           <a:noFill/>
         </p:spPr>
         <p:txBody>
-          <a:bodyPr wrap="square">
-            <a:spAutoFit/>
-          </a:bodyPr>
-          <a:lstStyle/>
-          <a:p>
-            <a:pPr algn="ctr">
-              <a:defRPr sz="2600" b="1">
+          <a:bodyPr wrap="square" anchor="t"/>
+          <a:lstStyle/>
+          <a:p>
+            <a:pPr algn="ctr"/>
+            <a:r>
+              <a:rPr sz="2200" b="1">
                 <a:solidFill>
                   <a:srgbClr val="C8102E"/>
                 </a:solidFill>
                 <a:latin typeface="Segoe UI"/>
-              </a:defRPr>
-            </a:pPr>
-            <a:r>
+              </a:rPr>
               <a:t>CREATE</a:t>
             </a:r>
           </a:p>
@@ -6119,8 +6085,8 @@
         </p:nvSpPr>
         <p:spPr>
           <a:xfrm>
-            <a:off x="4617720" y="3383280"/>
-            <a:ext cx="3200400" cy="640080"/>
+            <a:off x="4383938" y="2331720"/>
+            <a:ext cx="3423818" cy="457200"/>
           </a:xfrm>
           <a:prstGeom prst="rect">
             <a:avLst/>
@@ -6128,45 +6094,41 @@
           <a:noFill/>
         </p:spPr>
         <p:txBody>
-          <a:bodyPr wrap="square">
-            <a:spAutoFit/>
-          </a:bodyPr>
-          <a:lstStyle/>
-          <a:p>
-            <a:pPr algn="ctr">
-              <a:defRPr sz="1300" b="0">
+          <a:bodyPr wrap="square" anchor="t"/>
+          <a:lstStyle/>
+          <a:p>
+            <a:pPr algn="ctr"/>
+            <a:r>
+              <a:rPr sz="1000" b="0">
                 <a:solidFill>
                   <a:srgbClr val="58595B"/>
                 </a:solidFill>
                 <a:latin typeface="Segoe UI"/>
-              </a:defRPr>
-            </a:pPr>
-            <a:r>
-              <a:t>Demand before the</a:t>
-            </a:r>
-            <a:br/>
-            <a:r>
-              <a:t>emergency happens</a:t>
-            </a:r>
-          </a:p>
-        </p:txBody>
-      </p:sp>
-      <p:sp>
-        <p:nvSpPr>
-          <p:cNvPr id="13" name="Rectangle 12"/>
+              </a:rPr>
+              <a:t>Demand before the
+emergency happens</a:t>
+            </a:r>
+          </a:p>
+        </p:txBody>
+      </p:sp>
+      <p:sp>
+        <p:nvSpPr>
+          <p:cNvPr id="13" name="Rounded Rectangle 12"/>
           <p:cNvSpPr/>
           <p:nvPr/>
         </p:nvSpPr>
         <p:spPr>
           <a:xfrm>
-            <a:off x="8138160" y="2743200"/>
-            <a:ext cx="3200400" cy="1463040"/>
-          </a:xfrm>
-          <a:prstGeom prst="rect">
-            <a:avLst/>
+            <a:off x="8036356" y="1737360"/>
+            <a:ext cx="3606698" cy="1188720"/>
+          </a:xfrm>
+          <a:prstGeom prst="roundRect">
+            <a:avLst>
+              <a:gd name="adj" fmla="val 4000"/>
+            </a:avLst>
           </a:prstGeom>
           <a:solidFill>
-            <a:srgbClr val="F0F0F1"/>
+            <a:srgbClr val="EEEEEF"/>
           </a:solidFill>
           <a:ln>
             <a:noFill/>
@@ -6202,8 +6164,8 @@
         </p:nvSpPr>
         <p:spPr>
           <a:xfrm>
-            <a:off x="8138160" y="2743200"/>
-            <a:ext cx="3200400" cy="63500"/>
+            <a:off x="8036356" y="1737360"/>
+            <a:ext cx="3606698" cy="50800"/>
           </a:xfrm>
           <a:prstGeom prst="rect">
             <a:avLst/>
@@ -6245,8 +6207,8 @@
         </p:nvSpPr>
         <p:spPr>
           <a:xfrm>
-            <a:off x="8138160" y="2926080"/>
-            <a:ext cx="3200400" cy="457200"/>
+            <a:off x="8036356" y="1920240"/>
+            <a:ext cx="3606698" cy="365760"/>
           </a:xfrm>
           <a:prstGeom prst="rect">
             <a:avLst/>
@@ -6254,20 +6216,17 @@
           <a:noFill/>
         </p:spPr>
         <p:txBody>
-          <a:bodyPr wrap="square">
-            <a:spAutoFit/>
-          </a:bodyPr>
-          <a:lstStyle/>
-          <a:p>
-            <a:pPr algn="ctr">
-              <a:defRPr sz="2600" b="1">
+          <a:bodyPr wrap="square" anchor="t"/>
+          <a:lstStyle/>
+          <a:p>
+            <a:pPr algn="ctr"/>
+            <a:r>
+              <a:rPr sz="2200" b="1">
                 <a:solidFill>
                   <a:srgbClr val="58595B"/>
                 </a:solidFill>
                 <a:latin typeface="Segoe UI"/>
-              </a:defRPr>
-            </a:pPr>
-            <a:r>
+              </a:rPr>
               <a:t>CONVERT</a:t>
             </a:r>
           </a:p>
@@ -6281,8 +6240,8 @@
         </p:nvSpPr>
         <p:spPr>
           <a:xfrm>
-            <a:off x="8138160" y="3383280"/>
-            <a:ext cx="3200400" cy="640080"/>
+            <a:off x="8127796" y="2331720"/>
+            <a:ext cx="3423818" cy="457200"/>
           </a:xfrm>
           <a:prstGeom prst="rect">
             <a:avLst/>
@@ -6290,25 +6249,19 @@
           <a:noFill/>
         </p:spPr>
         <p:txBody>
-          <a:bodyPr wrap="square">
-            <a:spAutoFit/>
-          </a:bodyPr>
-          <a:lstStyle/>
-          <a:p>
-            <a:pPr algn="ctr">
-              <a:defRPr sz="1300" b="0">
+          <a:bodyPr wrap="square" anchor="t"/>
+          <a:lstStyle/>
+          <a:p>
+            <a:pPr algn="ctr"/>
+            <a:r>
+              <a:rPr sz="1000" b="0">
                 <a:solidFill>
                   <a:srgbClr val="58595B"/>
                 </a:solidFill>
                 <a:latin typeface="Segoe UI"/>
-              </a:defRPr>
-            </a:pPr>
-            <a:r>
-              <a:t>Attention into</a:t>
-            </a:r>
-            <a:br/>
-            <a:r>
-              <a:t>booked jobs</a:t>
+              </a:rPr>
+              <a:t>Attention into
+booked jobs</a:t>
             </a:r>
           </a:p>
         </p:txBody>
@@ -6321,14 +6274,14 @@
         </p:nvSpPr>
         <p:spPr>
           <a:xfrm>
-            <a:off x="1097280" y="4663440"/>
-            <a:ext cx="10241280" cy="640080"/>
+            <a:off x="548640" y="3063240"/>
+            <a:ext cx="11094415" cy="411480"/>
           </a:xfrm>
           <a:prstGeom prst="rect">
             <a:avLst/>
           </a:prstGeom>
           <a:solidFill>
-            <a:srgbClr val="EEEFF2"/>
+            <a:srgbClr val="EDEEF0"/>
           </a:solidFill>
           <a:ln>
             <a:noFill/>
@@ -6364,8 +6317,8 @@
         </p:nvSpPr>
         <p:spPr>
           <a:xfrm>
-            <a:off x="1097280" y="4663440"/>
-            <a:ext cx="63500" cy="640080"/>
+            <a:off x="548640" y="3063240"/>
+            <a:ext cx="38100" cy="411480"/>
           </a:xfrm>
           <a:prstGeom prst="rect">
             <a:avLst/>
@@ -6407,8 +6360,8 @@
         </p:nvSpPr>
         <p:spPr>
           <a:xfrm>
-            <a:off x="1325880" y="4736592"/>
-            <a:ext cx="10012680" cy="493776"/>
+            <a:off x="685800" y="3108960"/>
+            <a:ext cx="10911535" cy="320040"/>
           </a:xfrm>
           <a:prstGeom prst="rect">
             <a:avLst/>
@@ -6421,15 +6374,14 @@
           </a:bodyPr>
           <a:lstStyle/>
           <a:p>
-            <a:pPr algn="l">
-              <a:defRPr sz="1400" b="0">
+            <a:pPr algn="l"/>
+            <a:r>
+              <a:rPr sz="1100" b="0">
                 <a:solidFill>
                   <a:srgbClr val="58595B"/>
                 </a:solidFill>
                 <a:latin typeface="Segoe UI"/>
-              </a:defRPr>
-            </a:pPr>
-            <a:r>
+              </a:rPr>
               <a:t>Most restoration companies are good at one of these. The ones growing are covering all three.</a:t>
             </a:r>
           </a:p>
@@ -6451,8 +6403,8 @@
         </p:blipFill>
         <p:spPr>
           <a:xfrm>
-            <a:off x="365760" y="6126480"/>
-            <a:ext cx="345758" cy="502920"/>
+            <a:off x="365760" y="6309360"/>
+            <a:ext cx="282892" cy="411480"/>
           </a:xfrm>
           <a:prstGeom prst="rect">
             <a:avLst/>
@@ -6475,8 +6427,8 @@
         </p:blipFill>
         <p:spPr>
           <a:xfrm>
-            <a:off x="10515600" y="6263640"/>
-            <a:ext cx="526948" cy="320040"/>
+            <a:off x="11231575" y="6400800"/>
+            <a:ext cx="451669" cy="274320"/>
           </a:xfrm>
           <a:prstGeom prst="rect">
             <a:avLst/>
@@ -6509,8 +6461,8 @@
         </p:nvSpPr>
         <p:spPr>
           <a:xfrm>
-            <a:off x="731520" y="365760"/>
-            <a:ext cx="10058400" cy="548640"/>
+            <a:off x="548640" y="457200"/>
+            <a:ext cx="11094415" cy="411480"/>
           </a:xfrm>
           <a:prstGeom prst="rect">
             <a:avLst/>
@@ -6518,20 +6470,17 @@
           <a:noFill/>
         </p:spPr>
         <p:txBody>
-          <a:bodyPr wrap="square">
-            <a:spAutoFit/>
-          </a:bodyPr>
-          <a:lstStyle/>
-          <a:p>
-            <a:pPr algn="l">
-              <a:defRPr sz="2800" b="1">
+          <a:bodyPr wrap="square" anchor="t"/>
+          <a:lstStyle/>
+          <a:p>
+            <a:pPr algn="l"/>
+            <a:r>
+              <a:rPr sz="2000" b="1">
                 <a:solidFill>
                   <a:srgbClr val="1B3057"/>
                 </a:solidFill>
                 <a:latin typeface="Segoe UI"/>
-              </a:defRPr>
-            </a:pPr>
-            <a:r>
+              </a:rPr>
               <a:t>The Marketing Funnel</a:t>
             </a:r>
           </a:p>
@@ -6545,8 +6494,8 @@
         </p:nvSpPr>
         <p:spPr>
           <a:xfrm>
-            <a:off x="731520" y="868680"/>
-            <a:ext cx="3200400" cy="38100"/>
+            <a:off x="548640" y="841248"/>
+            <a:ext cx="11094415" cy="38100"/>
           </a:xfrm>
           <a:prstGeom prst="rect">
             <a:avLst/>
@@ -6588,8 +6537,8 @@
         </p:nvSpPr>
         <p:spPr>
           <a:xfrm>
-            <a:off x="1371600" y="1280160"/>
-            <a:ext cx="3657600" cy="918972"/>
+            <a:off x="548640" y="1051560"/>
+            <a:ext cx="3657600" cy="822960"/>
           </a:xfrm>
           <a:custGeom>
             <a:avLst/>
@@ -6598,7 +6547,7 @@
             <a:cxnLst/>
             <a:rect l="l" t="t" r="r" b="b"/>
             <a:pathLst>
-              <a:path w="3657600" h="918972">
+              <a:path w="3657600" h="822960">
                 <a:moveTo>
                   <a:pt x="0" y="0"/>
                 </a:moveTo>
@@ -6606,10 +6555,10 @@
                   <a:pt x="3657600" y="0"/>
                 </a:lnTo>
                 <a:lnTo>
-                  <a:pt x="3145536" y="918972"/>
+                  <a:pt x="3383280" y="822960"/>
                 </a:lnTo>
                 <a:lnTo>
-                  <a:pt x="512064" y="918972"/>
+                  <a:pt x="274320" y="822960"/>
                 </a:lnTo>
                 <a:lnTo>
                   <a:pt x="0" y="0"/>
@@ -6619,7 +6568,9 @@
             </a:pathLst>
           </a:custGeom>
           <a:solidFill>
-            <a:srgbClr val="C8102E"/>
+            <a:srgbClr val="C8102E">
+              <a:alpha val="92000"/>
+            </a:srgbClr>
           </a:solidFill>
           <a:ln>
             <a:noFill/>
@@ -6655,8 +6606,8 @@
         </p:nvSpPr>
         <p:spPr>
           <a:xfrm>
-            <a:off x="1371600" y="1509903"/>
-            <a:ext cx="3657600" cy="459486"/>
+            <a:off x="685800" y="1325880"/>
+            <a:ext cx="3383280" cy="274320"/>
           </a:xfrm>
           <a:prstGeom prst="rect">
             <a:avLst/>
@@ -6664,20 +6615,17 @@
           <a:noFill/>
         </p:spPr>
         <p:txBody>
-          <a:bodyPr wrap="square">
-            <a:spAutoFit/>
-          </a:bodyPr>
-          <a:lstStyle/>
-          <a:p>
-            <a:pPr algn="ctr">
-              <a:defRPr sz="1600" b="1">
+          <a:bodyPr wrap="square" anchor="t"/>
+          <a:lstStyle/>
+          <a:p>
+            <a:pPr algn="ctr"/>
+            <a:r>
+              <a:rPr sz="1300" b="1">
                 <a:solidFill>
                   <a:srgbClr val="FFFFFF"/>
                 </a:solidFill>
                 <a:latin typeface="Segoe UI"/>
-              </a:defRPr>
-            </a:pPr>
-            <a:r>
+              </a:rPr>
               <a:t>AWARENESS</a:t>
             </a:r>
           </a:p>
@@ -6691,8 +6639,8 @@
         </p:nvSpPr>
         <p:spPr>
           <a:xfrm>
-            <a:off x="1883664" y="2253996"/>
-            <a:ext cx="2633472" cy="918972"/>
+            <a:off x="822960" y="1938528"/>
+            <a:ext cx="3108960" cy="822960"/>
           </a:xfrm>
           <a:custGeom>
             <a:avLst/>
@@ -6701,18 +6649,18 @@
             <a:cxnLst/>
             <a:rect l="l" t="t" r="r" b="b"/>
             <a:pathLst>
-              <a:path w="2633472" h="918972">
+              <a:path w="3108960" h="822960">
                 <a:moveTo>
                   <a:pt x="0" y="0"/>
                 </a:moveTo>
                 <a:lnTo>
-                  <a:pt x="2633472" y="0"/>
+                  <a:pt x="3108960" y="0"/>
                 </a:lnTo>
                 <a:lnTo>
-                  <a:pt x="2194560" y="918972"/>
+                  <a:pt x="2743200" y="822960"/>
                 </a:lnTo>
                 <a:lnTo>
-                  <a:pt x="438912" y="918972"/>
+                  <a:pt x="365760" y="822960"/>
                 </a:lnTo>
                 <a:lnTo>
                   <a:pt x="0" y="0"/>
@@ -6722,7 +6670,9 @@
             </a:pathLst>
           </a:custGeom>
           <a:solidFill>
-            <a:srgbClr val="9B1B30"/>
+            <a:srgbClr val="9B1B30">
+              <a:alpha val="88000"/>
+            </a:srgbClr>
           </a:solidFill>
           <a:ln>
             <a:noFill/>
@@ -6758,8 +6708,8 @@
         </p:nvSpPr>
         <p:spPr>
           <a:xfrm>
-            <a:off x="1883664" y="2483739"/>
-            <a:ext cx="2633472" cy="459486"/>
+            <a:off x="1005840" y="2212848"/>
+            <a:ext cx="2743200" cy="274320"/>
           </a:xfrm>
           <a:prstGeom prst="rect">
             <a:avLst/>
@@ -6767,20 +6717,17 @@
           <a:noFill/>
         </p:spPr>
         <p:txBody>
-          <a:bodyPr wrap="square">
-            <a:spAutoFit/>
-          </a:bodyPr>
-          <a:lstStyle/>
-          <a:p>
-            <a:pPr algn="ctr">
-              <a:defRPr sz="1400" b="1">
+          <a:bodyPr wrap="square" anchor="t"/>
+          <a:lstStyle/>
+          <a:p>
+            <a:pPr algn="ctr"/>
+            <a:r>
+              <a:rPr sz="1300" b="1">
                 <a:solidFill>
                   <a:srgbClr val="FFFFFF"/>
                 </a:solidFill>
                 <a:latin typeface="Segoe UI"/>
-              </a:defRPr>
-            </a:pPr>
-            <a:r>
+              </a:rPr>
               <a:t>CONSIDERATION</a:t>
             </a:r>
           </a:p>
@@ -6794,8 +6741,8 @@
         </p:nvSpPr>
         <p:spPr>
           <a:xfrm>
-            <a:off x="2322576" y="3227832"/>
-            <a:ext cx="1755648" cy="918972"/>
+            <a:off x="1188720" y="2825496"/>
+            <a:ext cx="2377440" cy="822960"/>
           </a:xfrm>
           <a:custGeom>
             <a:avLst/>
@@ -6804,18 +6751,18 @@
             <a:cxnLst/>
             <a:rect l="l" t="t" r="r" b="b"/>
             <a:pathLst>
-              <a:path w="1755648" h="918972">
+              <a:path w="2377440" h="822960">
                 <a:moveTo>
                   <a:pt x="0" y="0"/>
                 </a:moveTo>
                 <a:lnTo>
-                  <a:pt x="1755648" y="0"/>
+                  <a:pt x="2377440" y="0"/>
                 </a:lnTo>
                 <a:lnTo>
-                  <a:pt x="1389888" y="918972"/>
+                  <a:pt x="1956816" y="822960"/>
                 </a:lnTo>
                 <a:lnTo>
-                  <a:pt x="365760" y="918972"/>
+                  <a:pt x="420624" y="822960"/>
                 </a:lnTo>
                 <a:lnTo>
                   <a:pt x="0" y="0"/>
@@ -6825,7 +6772,9 @@
             </a:pathLst>
           </a:custGeom>
           <a:solidFill>
-            <a:srgbClr val="1B3057"/>
+            <a:srgbClr val="1B3057">
+              <a:alpha val="92000"/>
+            </a:srgbClr>
           </a:solidFill>
           <a:ln>
             <a:noFill/>
@@ -6861,8 +6810,8 @@
         </p:nvSpPr>
         <p:spPr>
           <a:xfrm>
-            <a:off x="2322576" y="3457575"/>
-            <a:ext cx="1755648" cy="459486"/>
+            <a:off x="1399032" y="3099816"/>
+            <a:ext cx="1956816" cy="274320"/>
           </a:xfrm>
           <a:prstGeom prst="rect">
             <a:avLst/>
@@ -6870,20 +6819,17 @@
           <a:noFill/>
         </p:spPr>
         <p:txBody>
-          <a:bodyPr wrap="square">
-            <a:spAutoFit/>
-          </a:bodyPr>
-          <a:lstStyle/>
-          <a:p>
-            <a:pPr algn="ctr">
-              <a:defRPr sz="1600" b="1">
+          <a:bodyPr wrap="square" anchor="t"/>
+          <a:lstStyle/>
+          <a:p>
+            <a:pPr algn="ctr"/>
+            <a:r>
+              <a:rPr sz="1300" b="1">
                 <a:solidFill>
                   <a:srgbClr val="FFFFFF"/>
                 </a:solidFill>
                 <a:latin typeface="Segoe UI"/>
-              </a:defRPr>
-            </a:pPr>
-            <a:r>
+              </a:rPr>
               <a:t>DECISION</a:t>
             </a:r>
           </a:p>
@@ -6897,8 +6843,8 @@
         </p:nvSpPr>
         <p:spPr>
           <a:xfrm>
-            <a:off x="2688336" y="4201668"/>
-            <a:ext cx="1024128" cy="918972"/>
+            <a:off x="1609344" y="3712464"/>
+            <a:ext cx="1536192" cy="822960"/>
           </a:xfrm>
           <a:custGeom>
             <a:avLst/>
@@ -6907,18 +6853,18 @@
             <a:cxnLst/>
             <a:rect l="l" t="t" r="r" b="b"/>
             <a:pathLst>
-              <a:path w="1024128" h="918972">
+              <a:path w="1536192" h="822960">
                 <a:moveTo>
                   <a:pt x="0" y="0"/>
                 </a:moveTo>
                 <a:lnTo>
-                  <a:pt x="1024128" y="0"/>
+                  <a:pt x="1536192" y="0"/>
                 </a:lnTo>
                 <a:lnTo>
-                  <a:pt x="841248" y="918972"/>
+                  <a:pt x="1225296" y="822960"/>
                 </a:lnTo>
                 <a:lnTo>
-                  <a:pt x="182880" y="918972"/>
+                  <a:pt x="310896" y="822960"/>
                 </a:lnTo>
                 <a:lnTo>
                   <a:pt x="0" y="0"/>
@@ -6928,7 +6874,9 @@
             </a:pathLst>
           </a:custGeom>
           <a:solidFill>
-            <a:srgbClr val="58595B"/>
+            <a:srgbClr val="58595B">
+              <a:alpha val="88000"/>
+            </a:srgbClr>
           </a:solidFill>
           <a:ln>
             <a:noFill/>
@@ -6964,8 +6912,8 @@
         </p:nvSpPr>
         <p:spPr>
           <a:xfrm>
-            <a:off x="2688336" y="4431411"/>
-            <a:ext cx="1024128" cy="459486"/>
+            <a:off x="1764792" y="3986784"/>
+            <a:ext cx="1225296" cy="274320"/>
           </a:xfrm>
           <a:prstGeom prst="rect">
             <a:avLst/>
@@ -6973,20 +6921,17 @@
           <a:noFill/>
         </p:spPr>
         <p:txBody>
-          <a:bodyPr wrap="square">
-            <a:spAutoFit/>
-          </a:bodyPr>
-          <a:lstStyle/>
-          <a:p>
-            <a:pPr algn="ctr">
-              <a:defRPr sz="1200" b="1">
+          <a:bodyPr wrap="square" anchor="t"/>
+          <a:lstStyle/>
+          <a:p>
+            <a:pPr algn="ctr"/>
+            <a:r>
+              <a:rPr sz="1300" b="1">
                 <a:solidFill>
                   <a:srgbClr val="FFFFFF"/>
                 </a:solidFill>
                 <a:latin typeface="Segoe UI"/>
-              </a:defRPr>
-            </a:pPr>
-            <a:r>
+              </a:rPr>
               <a:t>CONVERSION</a:t>
             </a:r>
           </a:p>
@@ -6994,16 +6939,16 @@
       </p:sp>
       <p:sp>
         <p:nvSpPr>
-          <p:cNvPr id="12" name="Rectangle 11"/>
+          <p:cNvPr id="12" name="Oval 11"/>
           <p:cNvSpPr/>
           <p:nvPr/>
         </p:nvSpPr>
         <p:spPr>
           <a:xfrm>
-            <a:off x="5943600" y="1417320"/>
-            <a:ext cx="137160" cy="137160"/>
-          </a:xfrm>
-          <a:prstGeom prst="rect">
+            <a:off x="4572000" y="1307592"/>
+            <a:ext cx="109728" cy="109728"/>
+          </a:xfrm>
+          <a:prstGeom prst="ellipse">
             <a:avLst/>
           </a:prstGeom>
           <a:solidFill>
@@ -7043,8 +6988,8 @@
         </p:nvSpPr>
         <p:spPr>
           <a:xfrm>
-            <a:off x="6217920" y="1325880"/>
-            <a:ext cx="5029200" cy="320040"/>
+            <a:off x="4754880" y="1216152"/>
+            <a:ext cx="6888175" cy="457200"/>
           </a:xfrm>
           <a:prstGeom prst="rect">
             <a:avLst/>
@@ -7052,56 +6997,43 @@
           <a:noFill/>
         </p:spPr>
         <p:txBody>
-          <a:bodyPr wrap="square">
-            <a:spAutoFit/>
-          </a:bodyPr>
+          <a:bodyPr wrap="square" anchor="t"/>
           <a:lstStyle/>
           <a:p>
             <a:pPr algn="l">
-              <a:defRPr sz="1800" b="1">
+              <a:spcBef>
+                <a:spcPts val="0"/>
+              </a:spcBef>
+              <a:spcAft>
+                <a:spcPts val="200"/>
+              </a:spcAft>
+            </a:pPr>
+            <a:r>
+              <a:rPr sz="1300" b="1">
                 <a:solidFill>
                   <a:srgbClr val="C8102E"/>
                 </a:solidFill>
                 <a:latin typeface="Segoe UI"/>
-              </a:defRPr>
+              </a:rPr>
+              <a:t>Awareness</a:t>
+            </a:r>
+          </a:p>
+          <a:p>
+            <a:pPr algn="l">
+              <a:spcBef>
+                <a:spcPts val="0"/>
+              </a:spcBef>
+              <a:spcAft>
+                <a:spcPts val="200"/>
+              </a:spcAft>
             </a:pPr>
             <a:r>
-              <a:t>Awareness</a:t>
-            </a:r>
-          </a:p>
-        </p:txBody>
-      </p:sp>
-      <p:sp>
-        <p:nvSpPr>
-          <p:cNvPr id="14" name="TextBox 13"/>
-          <p:cNvSpPr txBox="1"/>
-          <p:nvPr/>
-        </p:nvSpPr>
-        <p:spPr>
-          <a:xfrm>
-            <a:off x="6217920" y="1645920"/>
-            <a:ext cx="5029200" cy="457200"/>
-          </a:xfrm>
-          <a:prstGeom prst="rect">
-            <a:avLst/>
-          </a:prstGeom>
-          <a:noFill/>
-        </p:spPr>
-        <p:txBody>
-          <a:bodyPr wrap="square">
-            <a:spAutoFit/>
-          </a:bodyPr>
-          <a:lstStyle/>
-          <a:p>
-            <a:pPr algn="l">
-              <a:defRPr sz="1200" b="0">
+              <a:rPr sz="1000" b="0">
                 <a:solidFill>
                   <a:srgbClr val="58595B"/>
                 </a:solidFill>
                 <a:latin typeface="Segoe UI"/>
-              </a:defRPr>
-            </a:pPr>
-            <a:r>
+              </a:rPr>
               <a:t>Social media, sponsorships, YouTube, vehicle wraps</a:t>
             </a:r>
           </a:p>
@@ -7109,16 +7041,16 @@
       </p:sp>
       <p:sp>
         <p:nvSpPr>
-          <p:cNvPr id="15" name="Rectangle 14"/>
+          <p:cNvPr id="14" name="Oval 13"/>
           <p:cNvSpPr/>
           <p:nvPr/>
         </p:nvSpPr>
         <p:spPr>
           <a:xfrm>
-            <a:off x="5943600" y="2423160"/>
-            <a:ext cx="137160" cy="137160"/>
-          </a:xfrm>
-          <a:prstGeom prst="rect">
+            <a:off x="4572000" y="2194560"/>
+            <a:ext cx="109728" cy="109728"/>
+          </a:xfrm>
+          <a:prstGeom prst="ellipse">
             <a:avLst/>
           </a:prstGeom>
           <a:solidFill>
@@ -7152,14 +7084,14 @@
       </p:sp>
       <p:sp>
         <p:nvSpPr>
-          <p:cNvPr id="16" name="TextBox 15"/>
+          <p:cNvPr id="15" name="TextBox 14"/>
           <p:cNvSpPr txBox="1"/>
           <p:nvPr/>
         </p:nvSpPr>
         <p:spPr>
           <a:xfrm>
-            <a:off x="6217920" y="2331720"/>
-            <a:ext cx="5029200" cy="320040"/>
+            <a:off x="4754880" y="2103120"/>
+            <a:ext cx="6888175" cy="457200"/>
           </a:xfrm>
           <a:prstGeom prst="rect">
             <a:avLst/>
@@ -7167,56 +7099,43 @@
           <a:noFill/>
         </p:spPr>
         <p:txBody>
-          <a:bodyPr wrap="square">
-            <a:spAutoFit/>
-          </a:bodyPr>
+          <a:bodyPr wrap="square" anchor="t"/>
           <a:lstStyle/>
           <a:p>
             <a:pPr algn="l">
-              <a:defRPr sz="1800" b="1">
+              <a:spcBef>
+                <a:spcPts val="0"/>
+              </a:spcBef>
+              <a:spcAft>
+                <a:spcPts val="200"/>
+              </a:spcAft>
+            </a:pPr>
+            <a:r>
+              <a:rPr sz="1300" b="1">
                 <a:solidFill>
                   <a:srgbClr val="9B1B30"/>
                 </a:solidFill>
                 <a:latin typeface="Segoe UI"/>
-              </a:defRPr>
+              </a:rPr>
+              <a:t>Consideration</a:t>
+            </a:r>
+          </a:p>
+          <a:p>
+            <a:pPr algn="l">
+              <a:spcBef>
+                <a:spcPts val="0"/>
+              </a:spcBef>
+              <a:spcAft>
+                <a:spcPts val="200"/>
+              </a:spcAft>
             </a:pPr>
             <a:r>
-              <a:t>Consideration</a:t>
-            </a:r>
-          </a:p>
-        </p:txBody>
-      </p:sp>
-      <p:sp>
-        <p:nvSpPr>
-          <p:cNvPr id="17" name="TextBox 16"/>
-          <p:cNvSpPr txBox="1"/>
-          <p:nvPr/>
-        </p:nvSpPr>
-        <p:spPr>
-          <a:xfrm>
-            <a:off x="6217920" y="2651760"/>
-            <a:ext cx="5029200" cy="457200"/>
-          </a:xfrm>
-          <a:prstGeom prst="rect">
-            <a:avLst/>
-          </a:prstGeom>
-          <a:noFill/>
-        </p:spPr>
-        <p:txBody>
-          <a:bodyPr wrap="square">
-            <a:spAutoFit/>
-          </a:bodyPr>
-          <a:lstStyle/>
-          <a:p>
-            <a:pPr algn="l">
-              <a:defRPr sz="1200" b="0">
+              <a:rPr sz="1000" b="0">
                 <a:solidFill>
                   <a:srgbClr val="58595B"/>
                 </a:solidFill>
                 <a:latin typeface="Segoe UI"/>
-              </a:defRPr>
-            </a:pPr>
-            <a:r>
+              </a:rPr>
               <a:t>Retargeting, blog content, SEO, email nurture</a:t>
             </a:r>
           </a:p>
@@ -7224,16 +7143,16 @@
       </p:sp>
       <p:sp>
         <p:nvSpPr>
-          <p:cNvPr id="18" name="Rectangle 17"/>
+          <p:cNvPr id="16" name="Oval 15"/>
           <p:cNvSpPr/>
           <p:nvPr/>
         </p:nvSpPr>
         <p:spPr>
           <a:xfrm>
-            <a:off x="5943600" y="3429000"/>
-            <a:ext cx="137160" cy="137160"/>
-          </a:xfrm>
-          <a:prstGeom prst="rect">
+            <a:off x="4572000" y="3081528"/>
+            <a:ext cx="109728" cy="109728"/>
+          </a:xfrm>
+          <a:prstGeom prst="ellipse">
             <a:avLst/>
           </a:prstGeom>
           <a:solidFill>
@@ -7267,14 +7186,14 @@
       </p:sp>
       <p:sp>
         <p:nvSpPr>
-          <p:cNvPr id="19" name="TextBox 18"/>
+          <p:cNvPr id="17" name="TextBox 16"/>
           <p:cNvSpPr txBox="1"/>
           <p:nvPr/>
         </p:nvSpPr>
         <p:spPr>
           <a:xfrm>
-            <a:off x="6217920" y="3337560"/>
-            <a:ext cx="5029200" cy="320040"/>
+            <a:off x="4754880" y="2990088"/>
+            <a:ext cx="6888175" cy="457200"/>
           </a:xfrm>
           <a:prstGeom prst="rect">
             <a:avLst/>
@@ -7282,56 +7201,43 @@
           <a:noFill/>
         </p:spPr>
         <p:txBody>
-          <a:bodyPr wrap="square">
-            <a:spAutoFit/>
-          </a:bodyPr>
+          <a:bodyPr wrap="square" anchor="t"/>
           <a:lstStyle/>
           <a:p>
             <a:pPr algn="l">
-              <a:defRPr sz="1800" b="1">
+              <a:spcBef>
+                <a:spcPts val="0"/>
+              </a:spcBef>
+              <a:spcAft>
+                <a:spcPts val="200"/>
+              </a:spcAft>
+            </a:pPr>
+            <a:r>
+              <a:rPr sz="1300" b="1">
                 <a:solidFill>
                   <a:srgbClr val="1B3057"/>
                 </a:solidFill>
                 <a:latin typeface="Segoe UI"/>
-              </a:defRPr>
+              </a:rPr>
+              <a:t>Decision</a:t>
+            </a:r>
+          </a:p>
+          <a:p>
+            <a:pPr algn="l">
+              <a:spcBef>
+                <a:spcPts val="0"/>
+              </a:spcBef>
+              <a:spcAft>
+                <a:spcPts val="200"/>
+              </a:spcAft>
             </a:pPr>
             <a:r>
-              <a:t>Decision</a:t>
-            </a:r>
-          </a:p>
-        </p:txBody>
-      </p:sp>
-      <p:sp>
-        <p:nvSpPr>
-          <p:cNvPr id="20" name="TextBox 19"/>
-          <p:cNvSpPr txBox="1"/>
-          <p:nvPr/>
-        </p:nvSpPr>
-        <p:spPr>
-          <a:xfrm>
-            <a:off x="6217920" y="3657600"/>
-            <a:ext cx="5029200" cy="457200"/>
-          </a:xfrm>
-          <a:prstGeom prst="rect">
-            <a:avLst/>
-          </a:prstGeom>
-          <a:noFill/>
-        </p:spPr>
-        <p:txBody>
-          <a:bodyPr wrap="square">
-            <a:spAutoFit/>
-          </a:bodyPr>
-          <a:lstStyle/>
-          <a:p>
-            <a:pPr algn="l">
-              <a:defRPr sz="1200" b="0">
+              <a:rPr sz="1000" b="0">
                 <a:solidFill>
                   <a:srgbClr val="58595B"/>
                 </a:solidFill>
                 <a:latin typeface="Segoe UI"/>
-              </a:defRPr>
-            </a:pPr>
-            <a:r>
+              </a:rPr>
               <a:t>LSA, Google Ads, SEO (high-intent), GBP</a:t>
             </a:r>
           </a:p>
@@ -7339,16 +7245,16 @@
       </p:sp>
       <p:sp>
         <p:nvSpPr>
-          <p:cNvPr id="21" name="Rectangle 20"/>
+          <p:cNvPr id="18" name="Oval 17"/>
           <p:cNvSpPr/>
           <p:nvPr/>
         </p:nvSpPr>
         <p:spPr>
           <a:xfrm>
-            <a:off x="5943600" y="4434840"/>
-            <a:ext cx="137160" cy="137160"/>
-          </a:xfrm>
-          <a:prstGeom prst="rect">
+            <a:off x="4572000" y="3968496"/>
+            <a:ext cx="109728" cy="109728"/>
+          </a:xfrm>
+          <a:prstGeom prst="ellipse">
             <a:avLst/>
           </a:prstGeom>
           <a:solidFill>
@@ -7382,14 +7288,14 @@
       </p:sp>
       <p:sp>
         <p:nvSpPr>
-          <p:cNvPr id="22" name="TextBox 21"/>
+          <p:cNvPr id="19" name="TextBox 18"/>
           <p:cNvSpPr txBox="1"/>
           <p:nvPr/>
         </p:nvSpPr>
         <p:spPr>
           <a:xfrm>
-            <a:off x="6217920" y="4343400"/>
-            <a:ext cx="5029200" cy="320040"/>
+            <a:off x="4754880" y="3877056"/>
+            <a:ext cx="6888175" cy="457200"/>
           </a:xfrm>
           <a:prstGeom prst="rect">
             <a:avLst/>
@@ -7397,56 +7303,43 @@
           <a:noFill/>
         </p:spPr>
         <p:txBody>
-          <a:bodyPr wrap="square">
-            <a:spAutoFit/>
-          </a:bodyPr>
+          <a:bodyPr wrap="square" anchor="t"/>
           <a:lstStyle/>
           <a:p>
             <a:pPr algn="l">
-              <a:defRPr sz="1800" b="1">
+              <a:spcBef>
+                <a:spcPts val="0"/>
+              </a:spcBef>
+              <a:spcAft>
+                <a:spcPts val="200"/>
+              </a:spcAft>
+            </a:pPr>
+            <a:r>
+              <a:rPr sz="1300" b="1">
                 <a:solidFill>
                   <a:srgbClr val="58595B"/>
                 </a:solidFill>
                 <a:latin typeface="Segoe UI"/>
-              </a:defRPr>
+              </a:rPr>
+              <a:t>Conversion</a:t>
+            </a:r>
+          </a:p>
+          <a:p>
+            <a:pPr algn="l">
+              <a:spcBef>
+                <a:spcPts val="0"/>
+              </a:spcBef>
+              <a:spcAft>
+                <a:spcPts val="200"/>
+              </a:spcAft>
             </a:pPr>
             <a:r>
-              <a:t>Conversion</a:t>
-            </a:r>
-          </a:p>
-        </p:txBody>
-      </p:sp>
-      <p:sp>
-        <p:nvSpPr>
-          <p:cNvPr id="23" name="TextBox 22"/>
-          <p:cNvSpPr txBox="1"/>
-          <p:nvPr/>
-        </p:nvSpPr>
-        <p:spPr>
-          <a:xfrm>
-            <a:off x="6217920" y="4663440"/>
-            <a:ext cx="5029200" cy="457200"/>
-          </a:xfrm>
-          <a:prstGeom prst="rect">
-            <a:avLst/>
-          </a:prstGeom>
-          <a:noFill/>
-        </p:spPr>
-        <p:txBody>
-          <a:bodyPr wrap="square">
-            <a:spAutoFit/>
-          </a:bodyPr>
-          <a:lstStyle/>
-          <a:p>
-            <a:pPr algn="l">
-              <a:defRPr sz="1200" b="0">
+              <a:rPr sz="1000" b="0">
                 <a:solidFill>
                   <a:srgbClr val="58595B"/>
                 </a:solidFill>
                 <a:latin typeface="Segoe UI"/>
-              </a:defRPr>
-            </a:pPr>
-            <a:r>
+              </a:rPr>
               <a:t>Website, reviews, speed to lead, follow-up</a:t>
             </a:r>
           </a:p>
@@ -7454,20 +7347,20 @@
       </p:sp>
       <p:sp>
         <p:nvSpPr>
-          <p:cNvPr id="24" name="Rectangle 23"/>
+          <p:cNvPr id="20" name="Rectangle 19"/>
           <p:cNvSpPr/>
           <p:nvPr/>
         </p:nvSpPr>
         <p:spPr>
           <a:xfrm>
-            <a:off x="731520" y="5303520"/>
-            <a:ext cx="10515600" cy="777240"/>
+            <a:off x="548640" y="4736592"/>
+            <a:ext cx="11094415" cy="457200"/>
           </a:xfrm>
           <a:prstGeom prst="rect">
             <a:avLst/>
           </a:prstGeom>
           <a:solidFill>
-            <a:srgbClr val="FBF0F1"/>
+            <a:srgbClr val="FDEEF0"/>
           </a:solidFill>
           <a:ln>
             <a:noFill/>
@@ -7497,14 +7390,14 @@
       </p:sp>
       <p:sp>
         <p:nvSpPr>
-          <p:cNvPr id="25" name="Rectangle 24"/>
+          <p:cNvPr id="21" name="Rectangle 20"/>
           <p:cNvSpPr/>
           <p:nvPr/>
         </p:nvSpPr>
         <p:spPr>
           <a:xfrm>
-            <a:off x="731520" y="5303520"/>
-            <a:ext cx="63500" cy="777240"/>
+            <a:off x="548640" y="4736592"/>
+            <a:ext cx="38100" cy="457200"/>
           </a:xfrm>
           <a:prstGeom prst="rect">
             <a:avLst/>
@@ -7540,14 +7433,14 @@
       </p:sp>
       <p:sp>
         <p:nvSpPr>
-          <p:cNvPr id="26" name="TextBox 25"/>
+          <p:cNvPr id="22" name="TextBox 21"/>
           <p:cNvSpPr txBox="1"/>
           <p:nvPr/>
         </p:nvSpPr>
         <p:spPr>
           <a:xfrm>
-            <a:off x="960120" y="5376672"/>
-            <a:ext cx="10195560" cy="630936"/>
+            <a:off x="685800" y="4782312"/>
+            <a:ext cx="10911535" cy="365760"/>
           </a:xfrm>
           <a:prstGeom prst="rect">
             <a:avLst/>
@@ -7560,23 +7453,31 @@
           </a:bodyPr>
           <a:lstStyle/>
           <a:p>
-            <a:pPr algn="l">
-              <a:defRPr sz="1300" b="0">
+            <a:pPr algn="l"/>
+            <a:r>
+              <a:rPr sz="1100" b="1">
+                <a:solidFill>
+                  <a:srgbClr val="C8102E"/>
+                </a:solidFill>
+                <a:latin typeface="Segoe UI"/>
+              </a:rPr>
+              <a:t>Restoration is emergency-driven. </a:t>
+            </a:r>
+            <a:r>
+              <a:rPr sz="1100" b="0">
                 <a:solidFill>
                   <a:srgbClr val="58595B"/>
                 </a:solidFill>
                 <a:latin typeface="Segoe UI"/>
-              </a:defRPr>
-            </a:pPr>
-            <a:r>
-              <a:t>Restoration is emergency-driven. The consideration phase is far shorter than most industries. Trust has to be built BEFORE the emergency.</a:t>
+              </a:rPr>
+              <a:t>The consideration phase is far shorter than most industries. Trust has to be built BEFORE the emergency.</a:t>
             </a:r>
           </a:p>
         </p:txBody>
       </p:sp>
       <p:pic>
         <p:nvPicPr>
-          <p:cNvPr id="27" name="Picture 26" descr="rainbow-logo.png"/>
+          <p:cNvPr id="23" name="Picture 22" descr="rainbow-logo.png"/>
           <p:cNvPicPr>
             <a:picLocks noChangeAspect="1"/>
           </p:cNvPicPr>
@@ -7590,8 +7491,8 @@
         </p:blipFill>
         <p:spPr>
           <a:xfrm>
-            <a:off x="365760" y="6126480"/>
-            <a:ext cx="345758" cy="502920"/>
+            <a:off x="365760" y="6309360"/>
+            <a:ext cx="282892" cy="411480"/>
           </a:xfrm>
           <a:prstGeom prst="rect">
             <a:avLst/>
@@ -7600,7 +7501,7 @@
       </p:pic>
       <p:pic>
         <p:nvPicPr>
-          <p:cNvPr id="28" name="Picture 27" descr="sos-logo.png"/>
+          <p:cNvPr id="24" name="Picture 23" descr="sos-logo.png"/>
           <p:cNvPicPr>
             <a:picLocks noChangeAspect="1"/>
           </p:cNvPicPr>
@@ -7614,8 +7515,8 @@
         </p:blipFill>
         <p:spPr>
           <a:xfrm>
-            <a:off x="10515600" y="6263640"/>
-            <a:ext cx="526948" cy="320040"/>
+            <a:off x="11231575" y="6400800"/>
+            <a:ext cx="451669" cy="274320"/>
           </a:xfrm>
           <a:prstGeom prst="rect">
             <a:avLst/>
@@ -7648,8 +7549,8 @@
         </p:nvSpPr>
         <p:spPr>
           <a:xfrm>
-            <a:off x="731520" y="365760"/>
-            <a:ext cx="10058400" cy="548640"/>
+            <a:off x="548640" y="457200"/>
+            <a:ext cx="11094415" cy="411480"/>
           </a:xfrm>
           <a:prstGeom prst="rect">
             <a:avLst/>
@@ -7657,20 +7558,17 @@
           <a:noFill/>
         </p:spPr>
         <p:txBody>
-          <a:bodyPr wrap="square">
-            <a:spAutoFit/>
-          </a:bodyPr>
-          <a:lstStyle/>
-          <a:p>
-            <a:pPr algn="l">
-              <a:defRPr sz="2800" b="1">
+          <a:bodyPr wrap="square" anchor="t"/>
+          <a:lstStyle/>
+          <a:p>
+            <a:pPr algn="l"/>
+            <a:r>
+              <a:rPr sz="2000" b="1">
                 <a:solidFill>
                   <a:srgbClr val="1B3057"/>
                 </a:solidFill>
                 <a:latin typeface="Segoe UI"/>
-              </a:defRPr>
-            </a:pPr>
-            <a:r>
+              </a:rPr>
               <a:t>The Landscape Is Shifting</a:t>
             </a:r>
           </a:p>
@@ -7684,8 +7582,8 @@
         </p:nvSpPr>
         <p:spPr>
           <a:xfrm>
-            <a:off x="731520" y="868680"/>
-            <a:ext cx="3657600" cy="38100"/>
+            <a:off x="548640" y="841248"/>
+            <a:ext cx="11094415" cy="38100"/>
           </a:xfrm>
           <a:prstGeom prst="rect">
             <a:avLst/>
@@ -7721,17 +7619,19 @@
       </p:sp>
       <p:sp>
         <p:nvSpPr>
-          <p:cNvPr id="4" name="Rectangle 3"/>
+          <p:cNvPr id="4" name="Rounded Rectangle 3"/>
           <p:cNvSpPr/>
           <p:nvPr/>
         </p:nvSpPr>
         <p:spPr>
           <a:xfrm>
-            <a:off x="1097280" y="1188720"/>
-            <a:ext cx="3200400" cy="1463040"/>
-          </a:xfrm>
-          <a:prstGeom prst="rect">
-            <a:avLst/>
+            <a:off x="548640" y="960120"/>
+            <a:ext cx="3606698" cy="1005840"/>
+          </a:xfrm>
+          <a:prstGeom prst="roundRect">
+            <a:avLst>
+              <a:gd name="adj" fmla="val 5000"/>
+            </a:avLst>
           </a:prstGeom>
           <a:solidFill>
             <a:srgbClr val="F2F2F2"/>
@@ -7770,8 +7670,8 @@
         </p:nvSpPr>
         <p:spPr>
           <a:xfrm>
-            <a:off x="1097280" y="1188720"/>
-            <a:ext cx="3200400" cy="63500"/>
+            <a:off x="548640" y="960120"/>
+            <a:ext cx="3606698" cy="50800"/>
           </a:xfrm>
           <a:prstGeom prst="rect">
             <a:avLst/>
@@ -7813,8 +7713,8 @@
         </p:nvSpPr>
         <p:spPr>
           <a:xfrm>
-            <a:off x="1097280" y="1417320"/>
-            <a:ext cx="3200400" cy="548640"/>
+            <a:off x="548640" y="1097280"/>
+            <a:ext cx="3606698" cy="411480"/>
           </a:xfrm>
           <a:prstGeom prst="rect">
             <a:avLst/>
@@ -7822,20 +7722,17 @@
           <a:noFill/>
         </p:spPr>
         <p:txBody>
-          <a:bodyPr wrap="square">
-            <a:spAutoFit/>
-          </a:bodyPr>
-          <a:lstStyle/>
-          <a:p>
-            <a:pPr algn="ctr">
-              <a:defRPr sz="3200" b="1">
+          <a:bodyPr wrap="square" anchor="t"/>
+          <a:lstStyle/>
+          <a:p>
+            <a:pPr algn="ctr"/>
+            <a:r>
+              <a:rPr sz="2800" b="1">
                 <a:solidFill>
                   <a:srgbClr val="1B3057"/>
                 </a:solidFill>
                 <a:latin typeface="Segoe UI"/>
-              </a:defRPr>
-            </a:pPr>
-            <a:r>
+              </a:rPr>
               <a:t>29%</a:t>
             </a:r>
           </a:p>
@@ -7849,8 +7746,8 @@
         </p:nvSpPr>
         <p:spPr>
           <a:xfrm>
-            <a:off x="1188720" y="1965960"/>
-            <a:ext cx="3017520" cy="731520"/>
+            <a:off x="594360" y="1463040"/>
+            <a:ext cx="3515258" cy="457200"/>
           </a:xfrm>
           <a:prstGeom prst="rect">
             <a:avLst/>
@@ -7858,46 +7755,39 @@
           <a:noFill/>
         </p:spPr>
         <p:txBody>
-          <a:bodyPr wrap="square">
-            <a:spAutoFit/>
-          </a:bodyPr>
-          <a:lstStyle/>
-          <a:p>
-            <a:pPr algn="ctr">
-              <a:defRPr sz="1100" b="0">
+          <a:bodyPr wrap="square" anchor="t"/>
+          <a:lstStyle/>
+          <a:p>
+            <a:pPr algn="ctr"/>
+            <a:r>
+              <a:rPr sz="1000" b="0">
                 <a:solidFill>
                   <a:srgbClr val="58595B"/>
                 </a:solidFill>
                 <a:latin typeface="Segoe UI"/>
-              </a:defRPr>
-            </a:pPr>
-            <a:r>
-              <a:t>of homeowners already have a</a:t>
-            </a:r>
-            <a:br/>
-            <a:r>
-              <a:t>company name in mind</a:t>
-            </a:r>
-            <a:br/>
-            <a:r>
-              <a:t>when they search</a:t>
-            </a:r>
-          </a:p>
-        </p:txBody>
-      </p:sp>
-      <p:sp>
-        <p:nvSpPr>
-          <p:cNvPr id="8" name="Rectangle 7"/>
+              </a:rPr>
+              <a:t>of homeowners already have a
+company name in mind
+when they search</a:t>
+            </a:r>
+          </a:p>
+        </p:txBody>
+      </p:sp>
+      <p:sp>
+        <p:nvSpPr>
+          <p:cNvPr id="8" name="Rounded Rectangle 7"/>
           <p:cNvSpPr/>
           <p:nvPr/>
         </p:nvSpPr>
         <p:spPr>
           <a:xfrm>
-            <a:off x="4663440" y="1188720"/>
-            <a:ext cx="3200400" cy="1463040"/>
-          </a:xfrm>
-          <a:prstGeom prst="rect">
-            <a:avLst/>
+            <a:off x="4292498" y="960120"/>
+            <a:ext cx="3606698" cy="1005840"/>
+          </a:xfrm>
+          <a:prstGeom prst="roundRect">
+            <a:avLst>
+              <a:gd name="adj" fmla="val 5000"/>
+            </a:avLst>
           </a:prstGeom>
           <a:solidFill>
             <a:srgbClr val="F2F2F2"/>
@@ -7936,8 +7826,8 @@
         </p:nvSpPr>
         <p:spPr>
           <a:xfrm>
-            <a:off x="4663440" y="1188720"/>
-            <a:ext cx="3200400" cy="63500"/>
+            <a:off x="4292498" y="960120"/>
+            <a:ext cx="3606698" cy="50800"/>
           </a:xfrm>
           <a:prstGeom prst="rect">
             <a:avLst/>
@@ -7979,8 +7869,8 @@
         </p:nvSpPr>
         <p:spPr>
           <a:xfrm>
-            <a:off x="4663440" y="1417320"/>
-            <a:ext cx="3200400" cy="548640"/>
+            <a:off x="4292498" y="1097280"/>
+            <a:ext cx="3606698" cy="411480"/>
           </a:xfrm>
           <a:prstGeom prst="rect">
             <a:avLst/>
@@ -7988,20 +7878,17 @@
           <a:noFill/>
         </p:spPr>
         <p:txBody>
-          <a:bodyPr wrap="square">
-            <a:spAutoFit/>
-          </a:bodyPr>
-          <a:lstStyle/>
-          <a:p>
-            <a:pPr algn="ctr">
-              <a:defRPr sz="3200" b="1">
+          <a:bodyPr wrap="square" anchor="t"/>
+          <a:lstStyle/>
+          <a:p>
+            <a:pPr algn="ctr"/>
+            <a:r>
+              <a:rPr sz="2800" b="1">
                 <a:solidFill>
                   <a:srgbClr val="1B3057"/>
                 </a:solidFill>
                 <a:latin typeface="Segoe UI"/>
-              </a:defRPr>
-            </a:pPr>
-            <a:r>
+              </a:rPr>
               <a:t>+27.8%</a:t>
             </a:r>
           </a:p>
@@ -8015,8 +7902,8 @@
         </p:nvSpPr>
         <p:spPr>
           <a:xfrm>
-            <a:off x="4754880" y="1965960"/>
-            <a:ext cx="3017520" cy="731520"/>
+            <a:off x="4338218" y="1463040"/>
+            <a:ext cx="3515258" cy="457200"/>
           </a:xfrm>
           <a:prstGeom prst="rect">
             <a:avLst/>
@@ -8024,42 +7911,38 @@
           <a:noFill/>
         </p:spPr>
         <p:txBody>
-          <a:bodyPr wrap="square">
-            <a:spAutoFit/>
-          </a:bodyPr>
-          <a:lstStyle/>
-          <a:p>
-            <a:pPr algn="ctr">
-              <a:defRPr sz="1100" b="0">
+          <a:bodyPr wrap="square" anchor="t"/>
+          <a:lstStyle/>
+          <a:p>
+            <a:pPr algn="ctr"/>
+            <a:r>
+              <a:rPr sz="1000" b="0">
                 <a:solidFill>
                   <a:srgbClr val="58595B"/>
                 </a:solidFill>
                 <a:latin typeface="Segoe UI"/>
-              </a:defRPr>
-            </a:pPr>
-            <a:r>
-              <a:t>Google Ads spend growth</a:t>
-            </a:r>
-            <a:br/>
-            <a:r>
-              <a:t>across our restoration clients</a:t>
-            </a:r>
-          </a:p>
-        </p:txBody>
-      </p:sp>
-      <p:sp>
-        <p:nvSpPr>
-          <p:cNvPr id="12" name="Rectangle 11"/>
+              </a:rPr>
+              <a:t>Google Ads spend growth
+across our restoration clients</a:t>
+            </a:r>
+          </a:p>
+        </p:txBody>
+      </p:sp>
+      <p:sp>
+        <p:nvSpPr>
+          <p:cNvPr id="12" name="Rounded Rectangle 11"/>
           <p:cNvSpPr/>
           <p:nvPr/>
         </p:nvSpPr>
         <p:spPr>
           <a:xfrm>
-            <a:off x="8229600" y="1188720"/>
-            <a:ext cx="3200400" cy="1463040"/>
-          </a:xfrm>
-          <a:prstGeom prst="rect">
-            <a:avLst/>
+            <a:off x="8036356" y="960120"/>
+            <a:ext cx="3606698" cy="1005840"/>
+          </a:xfrm>
+          <a:prstGeom prst="roundRect">
+            <a:avLst>
+              <a:gd name="adj" fmla="val 5000"/>
+            </a:avLst>
           </a:prstGeom>
           <a:solidFill>
             <a:srgbClr val="F2F2F2"/>
@@ -8098,8 +7981,8 @@
         </p:nvSpPr>
         <p:spPr>
           <a:xfrm>
-            <a:off x="8229600" y="1188720"/>
-            <a:ext cx="3200400" cy="63500"/>
+            <a:off x="8036356" y="960120"/>
+            <a:ext cx="3606698" cy="50800"/>
           </a:xfrm>
           <a:prstGeom prst="rect">
             <a:avLst/>
@@ -8141,8 +8024,8 @@
         </p:nvSpPr>
         <p:spPr>
           <a:xfrm>
-            <a:off x="8229600" y="1417320"/>
-            <a:ext cx="3200400" cy="548640"/>
+            <a:off x="8036356" y="1097280"/>
+            <a:ext cx="3606698" cy="411480"/>
           </a:xfrm>
           <a:prstGeom prst="rect">
             <a:avLst/>
@@ -8150,20 +8033,17 @@
           <a:noFill/>
         </p:spPr>
         <p:txBody>
-          <a:bodyPr wrap="square">
-            <a:spAutoFit/>
-          </a:bodyPr>
-          <a:lstStyle/>
-          <a:p>
-            <a:pPr algn="ctr">
-              <a:defRPr sz="3200" b="1">
+          <a:bodyPr wrap="square" anchor="t"/>
+          <a:lstStyle/>
+          <a:p>
+            <a:pPr algn="ctr"/>
+            <a:r>
+              <a:rPr sz="2800" b="1">
                 <a:solidFill>
                   <a:srgbClr val="1B3057"/>
                 </a:solidFill>
                 <a:latin typeface="Segoe UI"/>
-              </a:defRPr>
-            </a:pPr>
-            <a:r>
+              </a:rPr>
               <a:t>+63.9%</a:t>
             </a:r>
           </a:p>
@@ -8177,8 +8057,8 @@
         </p:nvSpPr>
         <p:spPr>
           <a:xfrm>
-            <a:off x="8321040" y="1965960"/>
-            <a:ext cx="3017520" cy="731520"/>
+            <a:off x="8082076" y="1463040"/>
+            <a:ext cx="3515258" cy="457200"/>
           </a:xfrm>
           <a:prstGeom prst="rect">
             <a:avLst/>
@@ -8186,25 +8066,19 @@
           <a:noFill/>
         </p:spPr>
         <p:txBody>
-          <a:bodyPr wrap="square">
-            <a:spAutoFit/>
-          </a:bodyPr>
-          <a:lstStyle/>
-          <a:p>
-            <a:pPr algn="ctr">
-              <a:defRPr sz="1100" b="0">
+          <a:bodyPr wrap="square" anchor="t"/>
+          <a:lstStyle/>
+          <a:p>
+            <a:pPr algn="ctr"/>
+            <a:r>
+              <a:rPr sz="1000" b="0">
                 <a:solidFill>
                   <a:srgbClr val="58595B"/>
                 </a:solidFill>
                 <a:latin typeface="Segoe UI"/>
-              </a:defRPr>
-            </a:pPr>
-            <a:r>
-              <a:t>LSA spend growth</a:t>
-            </a:r>
-            <a:br/>
-            <a:r>
-              <a:t>across our restoration clients</a:t>
+              </a:rPr>
+              <a:t>LSA spend growth
+across our restoration clients</a:t>
             </a:r>
           </a:p>
         </p:txBody>
@@ -8217,8 +8091,8 @@
         </p:nvSpPr>
         <p:spPr>
           <a:xfrm>
-            <a:off x="731520" y="3017520"/>
-            <a:ext cx="10515600" cy="914400"/>
+            <a:off x="548640" y="2103120"/>
+            <a:ext cx="11094415" cy="594360"/>
           </a:xfrm>
           <a:prstGeom prst="rect">
             <a:avLst/>
@@ -8226,64 +8100,83 @@
           <a:noFill/>
         </p:spPr>
         <p:txBody>
-          <a:bodyPr wrap="square">
-            <a:spAutoFit/>
-          </a:bodyPr>
-          <a:lstStyle/>
-          <a:p>
-            <a:pPr algn="l">
-              <a:lnSpc>
-                <a:spcPts val="2200"/>
-              </a:lnSpc>
+          <a:bodyPr wrap="square"/>
+          <a:lstStyle/>
+          <a:p>
+            <a:pPr algn="l" marL="228600" indent="-182880">
+              <a:spcBef>
+                <a:spcPts val="200"/>
+              </a:spcBef>
               <a:spcAft>
-                <a:spcPts val="800"/>
+                <a:spcPts val="400"/>
               </a:spcAft>
+              <a:buChar char="•"/>
+              <a:buClr>
+                <a:srgbClr val="C8102E"/>
+              </a:buClr>
+              <a:buSzPct val="100000"/>
+              <a:buFont typeface="Segoe UI"/>
             </a:pPr>
             <a:r>
-              <a:rPr sz="1400">
-                <a:solidFill>
-                  <a:srgbClr val="C8102E"/>
-                </a:solidFill>
-                <a:latin typeface="Segoe UI"/>
-              </a:rPr>
-              <a:t>•  </a:t>
-            </a:r>
-            <a:r>
-              <a:rPr sz="1400">
+              <a:rPr sz="1100" b="0">
                 <a:solidFill>
                   <a:srgbClr val="58595B"/>
                 </a:solidFill>
                 <a:latin typeface="Segoe UI"/>
               </a:rPr>
-              <a:t>Businesses in LSA results get 25-30% more calls than those relying on organic alone</a:t>
-            </a:r>
-          </a:p>
-          <a:p>
-            <a:pPr algn="l">
-              <a:lnSpc>
-                <a:spcPts val="2200"/>
-              </a:lnSpc>
+              <a:t>Businesses in LSA results get </a:t>
+            </a:r>
+            <a:r>
+              <a:rPr sz="1100" b="1">
+                <a:solidFill>
+                  <a:srgbClr val="58595B"/>
+                </a:solidFill>
+                <a:latin typeface="Segoe UI"/>
+              </a:rPr>
+              <a:t>25-30% more calls</a:t>
+            </a:r>
+            <a:r>
+              <a:rPr sz="1100" b="0">
+                <a:solidFill>
+                  <a:srgbClr val="58595B"/>
+                </a:solidFill>
+                <a:latin typeface="Segoe UI"/>
+              </a:rPr>
+              <a:t> than those relying on organic alone</a:t>
+            </a:r>
+          </a:p>
+          <a:p>
+            <a:pPr algn="l" marL="228600" indent="-182880">
+              <a:spcBef>
+                <a:spcPts val="200"/>
+              </a:spcBef>
               <a:spcAft>
-                <a:spcPts val="800"/>
+                <a:spcPts val="400"/>
               </a:spcAft>
+              <a:buChar char="•"/>
+              <a:buClr>
+                <a:srgbClr val="C8102E"/>
+              </a:buClr>
+              <a:buSzPct val="100000"/>
+              <a:buFont typeface="Segoe UI"/>
             </a:pPr>
             <a:r>
-              <a:rPr sz="1400">
-                <a:solidFill>
-                  <a:srgbClr val="C8102E"/>
-                </a:solidFill>
-                <a:latin typeface="Segoe UI"/>
-              </a:rPr>
-              <a:t>•  </a:t>
-            </a:r>
-            <a:r>
-              <a:rPr sz="1400">
+              <a:rPr sz="1100" b="1">
                 <a:solidFill>
                   <a:srgbClr val="58595B"/>
                 </a:solidFill>
                 <a:latin typeface="Segoe UI"/>
               </a:rPr>
-              <a:t>31% of consumers now require 4.5+ stars to consider a business — up from 17% last year</a:t>
+              <a:t>31% of consumers now require 4.5+ stars</a:t>
+            </a:r>
+            <a:r>
+              <a:rPr sz="1100" b="0">
+                <a:solidFill>
+                  <a:srgbClr val="58595B"/>
+                </a:solidFill>
+                <a:latin typeface="Segoe UI"/>
+              </a:rPr>
+              <a:t> to consider a business — up from 17% last year</a:t>
             </a:r>
           </a:p>
         </p:txBody>
@@ -8296,14 +8189,14 @@
         </p:nvSpPr>
         <p:spPr>
           <a:xfrm>
-            <a:off x="731520" y="4297680"/>
-            <a:ext cx="10515600" cy="777240"/>
+            <a:off x="548640" y="2743200"/>
+            <a:ext cx="11094415" cy="457200"/>
           </a:xfrm>
           <a:prstGeom prst="rect">
             <a:avLst/>
           </a:prstGeom>
           <a:solidFill>
-            <a:srgbClr val="EEEFF2"/>
+            <a:srgbClr val="EDEEF0"/>
           </a:solidFill>
           <a:ln>
             <a:noFill/>
@@ -8339,8 +8232,8 @@
         </p:nvSpPr>
         <p:spPr>
           <a:xfrm>
-            <a:off x="731520" y="4297680"/>
-            <a:ext cx="63500" cy="777240"/>
+            <a:off x="548640" y="2743200"/>
+            <a:ext cx="38100" cy="457200"/>
           </a:xfrm>
           <a:prstGeom prst="rect">
             <a:avLst/>
@@ -8382,8 +8275,8 @@
         </p:nvSpPr>
         <p:spPr>
           <a:xfrm>
-            <a:off x="960120" y="4370832"/>
-            <a:ext cx="10195560" cy="630936"/>
+            <a:off x="685800" y="2788920"/>
+            <a:ext cx="10911535" cy="365760"/>
           </a:xfrm>
           <a:prstGeom prst="rect">
             <a:avLst/>
@@ -8396,15 +8289,14 @@
           </a:bodyPr>
           <a:lstStyle/>
           <a:p>
-            <a:pPr algn="l">
-              <a:defRPr sz="1300" b="0">
+            <a:pPr algn="l"/>
+            <a:r>
+              <a:rPr sz="1100" b="0">
                 <a:solidFill>
                   <a:srgbClr val="58595B"/>
                 </a:solidFill>
                 <a:latin typeface="Segoe UI"/>
-              </a:defRPr>
-            </a:pPr>
-            <a:r>
+              </a:rPr>
               <a:t>Your competitors are spending more every quarter. But the operators winning aren't just spending — they're building recognition before the emergency.</a:t>
             </a:r>
           </a:p>
@@ -8418,8 +8310,8 @@
         </p:nvSpPr>
         <p:spPr>
           <a:xfrm>
-            <a:off x="0" y="6035040"/>
-            <a:ext cx="12191695" cy="274320"/>
+            <a:off x="0" y="6263640"/>
+            <a:ext cx="12191695" cy="228600"/>
           </a:xfrm>
           <a:prstGeom prst="rect">
             <a:avLst/>
@@ -8427,20 +8319,17 @@
           <a:noFill/>
         </p:spPr>
         <p:txBody>
-          <a:bodyPr wrap="square">
-            <a:spAutoFit/>
-          </a:bodyPr>
-          <a:lstStyle/>
-          <a:p>
-            <a:pPr algn="ctr">
-              <a:defRPr sz="900" b="0">
+          <a:bodyPr wrap="square" anchor="t"/>
+          <a:lstStyle/>
+          <a:p>
+            <a:pPr algn="ctr"/>
+            <a:r>
+              <a:rPr sz="800" b="0">
                 <a:solidFill>
                   <a:srgbClr val="AAAAAA"/>
                 </a:solidFill>
                 <a:latin typeface="Segoe UI"/>
-              </a:defRPr>
-            </a:pPr>
-            <a:r>
+              </a:rPr>
               <a:t>Sources: SOS x C&amp;R Magazine Report 2026; AdMall/SalesFuel 2025; BrightLocal LCRS 2026; Boomcycle 2026</a:t>
             </a:r>
           </a:p>
@@ -8462,8 +8351,8 @@
         </p:blipFill>
         <p:spPr>
           <a:xfrm>
-            <a:off x="365760" y="6126480"/>
-            <a:ext cx="345758" cy="502920"/>
+            <a:off x="365760" y="6309360"/>
+            <a:ext cx="282892" cy="411480"/>
           </a:xfrm>
           <a:prstGeom prst="rect">
             <a:avLst/>
@@ -8486,8 +8375,8 @@
         </p:blipFill>
         <p:spPr>
           <a:xfrm>
-            <a:off x="10515600" y="6263640"/>
-            <a:ext cx="526948" cy="320040"/>
+            <a:off x="11231575" y="6400800"/>
+            <a:ext cx="451669" cy="274320"/>
           </a:xfrm>
           <a:prstGeom prst="rect">
             <a:avLst/>
@@ -8520,8 +8409,8 @@
         </p:nvSpPr>
         <p:spPr>
           <a:xfrm>
-            <a:off x="731520" y="365760"/>
-            <a:ext cx="10058400" cy="548640"/>
+            <a:off x="548640" y="457200"/>
+            <a:ext cx="11094415" cy="411480"/>
           </a:xfrm>
           <a:prstGeom prst="rect">
             <a:avLst/>
@@ -8529,20 +8418,17 @@
           <a:noFill/>
         </p:spPr>
         <p:txBody>
-          <a:bodyPr wrap="square">
-            <a:spAutoFit/>
-          </a:bodyPr>
-          <a:lstStyle/>
-          <a:p>
-            <a:pPr algn="l">
-              <a:defRPr sz="2800" b="1">
+          <a:bodyPr wrap="square" anchor="t"/>
+          <a:lstStyle/>
+          <a:p>
+            <a:pPr algn="l"/>
+            <a:r>
+              <a:rPr sz="2000" b="1">
                 <a:solidFill>
                   <a:srgbClr val="1B3057"/>
                 </a:solidFill>
                 <a:latin typeface="Segoe UI"/>
-              </a:defRPr>
-            </a:pPr>
-            <a:r>
+              </a:rPr>
               <a:t>What Your Customers Respond To</a:t>
             </a:r>
           </a:p>
@@ -8556,8 +8442,8 @@
         </p:nvSpPr>
         <p:spPr>
           <a:xfrm>
-            <a:off x="731520" y="868680"/>
-            <a:ext cx="4572000" cy="38100"/>
+            <a:off x="548640" y="841248"/>
+            <a:ext cx="11094415" cy="38100"/>
           </a:xfrm>
           <a:prstGeom prst="rect">
             <a:avLst/>
@@ -8593,17 +8479,19 @@
       </p:sp>
       <p:sp>
         <p:nvSpPr>
-          <p:cNvPr id="4" name="Rectangle 3"/>
+          <p:cNvPr id="4" name="Rounded Rectangle 3"/>
           <p:cNvSpPr/>
           <p:nvPr/>
         </p:nvSpPr>
         <p:spPr>
           <a:xfrm>
-            <a:off x="1097280" y="1188720"/>
-            <a:ext cx="3200400" cy="1463040"/>
-          </a:xfrm>
-          <a:prstGeom prst="rect">
-            <a:avLst/>
+            <a:off x="548640" y="960120"/>
+            <a:ext cx="3606698" cy="1005840"/>
+          </a:xfrm>
+          <a:prstGeom prst="roundRect">
+            <a:avLst>
+              <a:gd name="adj" fmla="val 5000"/>
+            </a:avLst>
           </a:prstGeom>
           <a:solidFill>
             <a:srgbClr val="F2F2F2"/>
@@ -8642,8 +8530,8 @@
         </p:nvSpPr>
         <p:spPr>
           <a:xfrm>
-            <a:off x="1097280" y="1188720"/>
-            <a:ext cx="3200400" cy="63500"/>
+            <a:off x="548640" y="960120"/>
+            <a:ext cx="3606698" cy="50800"/>
           </a:xfrm>
           <a:prstGeom prst="rect">
             <a:avLst/>
@@ -8685,8 +8573,8 @@
         </p:nvSpPr>
         <p:spPr>
           <a:xfrm>
-            <a:off x="1097280" y="1417320"/>
-            <a:ext cx="3200400" cy="548640"/>
+            <a:off x="548640" y="1097280"/>
+            <a:ext cx="3606698" cy="411480"/>
           </a:xfrm>
           <a:prstGeom prst="rect">
             <a:avLst/>
@@ -8694,20 +8582,17 @@
           <a:noFill/>
         </p:spPr>
         <p:txBody>
-          <a:bodyPr wrap="square">
-            <a:spAutoFit/>
-          </a:bodyPr>
-          <a:lstStyle/>
-          <a:p>
-            <a:pPr algn="ctr">
-              <a:defRPr sz="3200" b="1">
+          <a:bodyPr wrap="square" anchor="t"/>
+          <a:lstStyle/>
+          <a:p>
+            <a:pPr algn="ctr"/>
+            <a:r>
+              <a:rPr sz="2800" b="1">
                 <a:solidFill>
                   <a:srgbClr val="1B3057"/>
                 </a:solidFill>
                 <a:latin typeface="Segoe UI"/>
-              </a:defRPr>
-            </a:pPr>
-            <a:r>
+              </a:rPr>
               <a:t>97%</a:t>
             </a:r>
           </a:p>
@@ -8721,8 +8606,8 @@
         </p:nvSpPr>
         <p:spPr>
           <a:xfrm>
-            <a:off x="1188720" y="1965960"/>
-            <a:ext cx="3017520" cy="731520"/>
+            <a:off x="594360" y="1463040"/>
+            <a:ext cx="3515258" cy="457200"/>
           </a:xfrm>
           <a:prstGeom prst="rect">
             <a:avLst/>
@@ -8730,42 +8615,38 @@
           <a:noFill/>
         </p:spPr>
         <p:txBody>
-          <a:bodyPr wrap="square">
-            <a:spAutoFit/>
-          </a:bodyPr>
-          <a:lstStyle/>
-          <a:p>
-            <a:pPr algn="ctr">
-              <a:defRPr sz="1100" b="0">
+          <a:bodyPr wrap="square" anchor="t"/>
+          <a:lstStyle/>
+          <a:p>
+            <a:pPr algn="ctr"/>
+            <a:r>
+              <a:rPr sz="1000" b="0">
                 <a:solidFill>
                   <a:srgbClr val="58595B"/>
                 </a:solidFill>
                 <a:latin typeface="Segoe UI"/>
-              </a:defRPr>
-            </a:pPr>
-            <a:r>
-              <a:t>of restoration operators say referrals</a:t>
-            </a:r>
-            <a:br/>
-            <a:r>
-              <a:t>are their #1 source of new business</a:t>
-            </a:r>
-          </a:p>
-        </p:txBody>
-      </p:sp>
-      <p:sp>
-        <p:nvSpPr>
-          <p:cNvPr id="8" name="Rectangle 7"/>
+              </a:rPr>
+              <a:t>of restoration operators say referrals
+are their #1 source of new business</a:t>
+            </a:r>
+          </a:p>
+        </p:txBody>
+      </p:sp>
+      <p:sp>
+        <p:nvSpPr>
+          <p:cNvPr id="8" name="Rounded Rectangle 7"/>
           <p:cNvSpPr/>
           <p:nvPr/>
         </p:nvSpPr>
         <p:spPr>
           <a:xfrm>
-            <a:off x="4663440" y="1188720"/>
-            <a:ext cx="3200400" cy="1463040"/>
-          </a:xfrm>
-          <a:prstGeom prst="rect">
-            <a:avLst/>
+            <a:off x="4292498" y="960120"/>
+            <a:ext cx="3606698" cy="1005840"/>
+          </a:xfrm>
+          <a:prstGeom prst="roundRect">
+            <a:avLst>
+              <a:gd name="adj" fmla="val 5000"/>
+            </a:avLst>
           </a:prstGeom>
           <a:solidFill>
             <a:srgbClr val="F2F2F2"/>
@@ -8804,8 +8685,8 @@
         </p:nvSpPr>
         <p:spPr>
           <a:xfrm>
-            <a:off x="4663440" y="1188720"/>
-            <a:ext cx="3200400" cy="63500"/>
+            <a:off x="4292498" y="960120"/>
+            <a:ext cx="3606698" cy="50800"/>
           </a:xfrm>
           <a:prstGeom prst="rect">
             <a:avLst/>
@@ -8847,8 +8728,8 @@
         </p:nvSpPr>
         <p:spPr>
           <a:xfrm>
-            <a:off x="4663440" y="1417320"/>
-            <a:ext cx="3200400" cy="548640"/>
+            <a:off x="4292498" y="1097280"/>
+            <a:ext cx="3606698" cy="411480"/>
           </a:xfrm>
           <a:prstGeom prst="rect">
             <a:avLst/>
@@ -8856,20 +8737,17 @@
           <a:noFill/>
         </p:spPr>
         <p:txBody>
-          <a:bodyPr wrap="square">
-            <a:spAutoFit/>
-          </a:bodyPr>
-          <a:lstStyle/>
-          <a:p>
-            <a:pPr algn="ctr">
-              <a:defRPr sz="3200" b="1">
+          <a:bodyPr wrap="square" anchor="t"/>
+          <a:lstStyle/>
+          <a:p>
+            <a:pPr algn="ctr"/>
+            <a:r>
+              <a:rPr sz="2800" b="1">
                 <a:solidFill>
                   <a:srgbClr val="1B3057"/>
                 </a:solidFill>
                 <a:latin typeface="Segoe UI"/>
-              </a:defRPr>
-            </a:pPr>
-            <a:r>
+              </a:rPr>
               <a:t>58%</a:t>
             </a:r>
           </a:p>
@@ -8883,8 +8761,8 @@
         </p:nvSpPr>
         <p:spPr>
           <a:xfrm>
-            <a:off x="4754880" y="1965960"/>
-            <a:ext cx="3017520" cy="731520"/>
+            <a:off x="4338218" y="1463040"/>
+            <a:ext cx="3515258" cy="457200"/>
           </a:xfrm>
           <a:prstGeom prst="rect">
             <a:avLst/>
@@ -8892,42 +8770,38 @@
           <a:noFill/>
         </p:spPr>
         <p:txBody>
-          <a:bodyPr wrap="square">
-            <a:spAutoFit/>
-          </a:bodyPr>
-          <a:lstStyle/>
-          <a:p>
-            <a:pPr algn="ctr">
-              <a:defRPr sz="1100" b="0">
+          <a:bodyPr wrap="square" anchor="t"/>
+          <a:lstStyle/>
+          <a:p>
+            <a:pPr algn="ctr"/>
+            <a:r>
+              <a:rPr sz="1000" b="0">
                 <a:solidFill>
                   <a:srgbClr val="58595B"/>
                 </a:solidFill>
                 <a:latin typeface="Segoe UI"/>
-              </a:defRPr>
-            </a:pPr>
-            <a:r>
-              <a:t>of homeowners were influenced</a:t>
-            </a:r>
-            <a:br/>
-            <a:r>
-              <a:t>by a blog post in the last 30 days</a:t>
-            </a:r>
-          </a:p>
-        </p:txBody>
-      </p:sp>
-      <p:sp>
-        <p:nvSpPr>
-          <p:cNvPr id="12" name="Rectangle 11"/>
+              </a:rPr>
+              <a:t>of homeowners were influenced
+by a blog post in the last 30 days</a:t>
+            </a:r>
+          </a:p>
+        </p:txBody>
+      </p:sp>
+      <p:sp>
+        <p:nvSpPr>
+          <p:cNvPr id="12" name="Rounded Rectangle 11"/>
           <p:cNvSpPr/>
           <p:nvPr/>
         </p:nvSpPr>
         <p:spPr>
           <a:xfrm>
-            <a:off x="8229600" y="1188720"/>
-            <a:ext cx="3200400" cy="1463040"/>
-          </a:xfrm>
-          <a:prstGeom prst="rect">
-            <a:avLst/>
+            <a:off x="8036356" y="960120"/>
+            <a:ext cx="3606698" cy="1005840"/>
+          </a:xfrm>
+          <a:prstGeom prst="roundRect">
+            <a:avLst>
+              <a:gd name="adj" fmla="val 5000"/>
+            </a:avLst>
           </a:prstGeom>
           <a:solidFill>
             <a:srgbClr val="F2F2F2"/>
@@ -8966,8 +8840,8 @@
         </p:nvSpPr>
         <p:spPr>
           <a:xfrm>
-            <a:off x="8229600" y="1188720"/>
-            <a:ext cx="3200400" cy="63500"/>
+            <a:off x="8036356" y="960120"/>
+            <a:ext cx="3606698" cy="50800"/>
           </a:xfrm>
           <a:prstGeom prst="rect">
             <a:avLst/>
@@ -9009,8 +8883,8 @@
         </p:nvSpPr>
         <p:spPr>
           <a:xfrm>
-            <a:off x="8229600" y="1417320"/>
-            <a:ext cx="3200400" cy="548640"/>
+            <a:off x="8036356" y="1097280"/>
+            <a:ext cx="3606698" cy="411480"/>
           </a:xfrm>
           <a:prstGeom prst="rect">
             <a:avLst/>
@@ -9018,20 +8892,17 @@
           <a:noFill/>
         </p:spPr>
         <p:txBody>
-          <a:bodyPr wrap="square">
-            <a:spAutoFit/>
-          </a:bodyPr>
-          <a:lstStyle/>
-          <a:p>
-            <a:pPr algn="ctr">
-              <a:defRPr sz="3200" b="1">
+          <a:bodyPr wrap="square" anchor="t"/>
+          <a:lstStyle/>
+          <a:p>
+            <a:pPr algn="ctr"/>
+            <a:r>
+              <a:rPr sz="2800" b="1">
                 <a:solidFill>
                   <a:srgbClr val="1B3057"/>
                 </a:solidFill>
                 <a:latin typeface="Segoe UI"/>
-              </a:defRPr>
-            </a:pPr>
-            <a:r>
+              </a:rPr>
               <a:t>55,352</a:t>
             </a:r>
           </a:p>
@@ -9045,8 +8916,8 @@
         </p:nvSpPr>
         <p:spPr>
           <a:xfrm>
-            <a:off x="8321040" y="1965960"/>
-            <a:ext cx="3017520" cy="731520"/>
+            <a:off x="8082076" y="1463040"/>
+            <a:ext cx="3515258" cy="457200"/>
           </a:xfrm>
           <a:prstGeom prst="rect">
             <a:avLst/>
@@ -9054,25 +8925,19 @@
           <a:noFill/>
         </p:spPr>
         <p:txBody>
-          <a:bodyPr wrap="square">
-            <a:spAutoFit/>
-          </a:bodyPr>
-          <a:lstStyle/>
-          <a:p>
-            <a:pPr algn="ctr">
-              <a:defRPr sz="1100" b="0">
+          <a:bodyPr wrap="square" anchor="t"/>
+          <a:lstStyle/>
+          <a:p>
+            <a:pPr algn="ctr"/>
+            <a:r>
+              <a:rPr sz="1000" b="0">
                 <a:solidFill>
                   <a:srgbClr val="58595B"/>
                 </a:solidFill>
                 <a:latin typeface="Segoe UI"/>
-              </a:defRPr>
-            </a:pPr>
-            <a:r>
-              <a:t>restoration establishments</a:t>
-            </a:r>
-            <a:br/>
-            <a:r>
-              <a:t>competing for attention nationwide</a:t>
+              </a:rPr>
+              <a:t>restoration establishments
+competing for attention nationwide</a:t>
             </a:r>
           </a:p>
         </p:txBody>
@@ -9085,8 +8950,8 @@
         </p:nvSpPr>
         <p:spPr>
           <a:xfrm>
-            <a:off x="731520" y="3017520"/>
-            <a:ext cx="10515600" cy="1280160"/>
+            <a:off x="548640" y="2103120"/>
+            <a:ext cx="11094415" cy="685800"/>
           </a:xfrm>
           <a:prstGeom prst="rect">
             <a:avLst/>
@@ -9094,92 +8959,108 @@
           <a:noFill/>
         </p:spPr>
         <p:txBody>
-          <a:bodyPr wrap="square">
-            <a:spAutoFit/>
-          </a:bodyPr>
-          <a:lstStyle/>
-          <a:p>
-            <a:pPr algn="l">
-              <a:lnSpc>
-                <a:spcPts val="2200"/>
-              </a:lnSpc>
+          <a:bodyPr wrap="square"/>
+          <a:lstStyle/>
+          <a:p>
+            <a:pPr algn="l" marL="228600" indent="-182880">
+              <a:spcBef>
+                <a:spcPts val="200"/>
+              </a:spcBef>
               <a:spcAft>
-                <a:spcPts val="800"/>
+                <a:spcPts val="400"/>
               </a:spcAft>
+              <a:buChar char="•"/>
+              <a:buClr>
+                <a:srgbClr val="C8102E"/>
+              </a:buClr>
+              <a:buSzPct val="100000"/>
+              <a:buFont typeface="Segoe UI"/>
             </a:pPr>
             <a:r>
-              <a:rPr sz="1400">
-                <a:solidFill>
-                  <a:srgbClr val="C8102E"/>
-                </a:solidFill>
-                <a:latin typeface="Segoe UI"/>
-              </a:rPr>
-              <a:t>•  </a:t>
-            </a:r>
-            <a:r>
-              <a:rPr sz="1400">
+              <a:rPr sz="1300" b="0">
                 <a:solidFill>
                   <a:srgbClr val="58595B"/>
                 </a:solidFill>
                 <a:latin typeface="Segoe UI"/>
               </a:rPr>
-              <a:t>Homeowners are 12% more likely to check a company’s blog to evaluate expertise</a:t>
-            </a:r>
-          </a:p>
-          <a:p>
-            <a:pPr algn="l">
-              <a:lnSpc>
-                <a:spcPts val="2200"/>
-              </a:lnSpc>
+              <a:t>Homeowners are 12% more likely to check a company's blog to evaluate expertise</a:t>
+            </a:r>
+          </a:p>
+          <a:p>
+            <a:pPr algn="l" marL="228600" indent="-182880">
+              <a:spcBef>
+                <a:spcPts val="200"/>
+              </a:spcBef>
               <a:spcAft>
-                <a:spcPts val="800"/>
+                <a:spcPts val="400"/>
               </a:spcAft>
+              <a:buChar char="•"/>
+              <a:buClr>
+                <a:srgbClr val="C8102E"/>
+              </a:buClr>
+              <a:buSzPct val="100000"/>
+              <a:buFont typeface="Segoe UI"/>
             </a:pPr>
             <a:r>
-              <a:rPr sz="1400">
-                <a:solidFill>
-                  <a:srgbClr val="C8102E"/>
-                </a:solidFill>
-                <a:latin typeface="Segoe UI"/>
-              </a:rPr>
-              <a:t>•  </a:t>
-            </a:r>
-            <a:r>
-              <a:rPr sz="1400">
+              <a:rPr sz="1100" b="0">
                 <a:solidFill>
                   <a:srgbClr val="58595B"/>
                 </a:solidFill>
                 <a:latin typeface="Segoe UI"/>
               </a:rPr>
-              <a:t>41% called or visited the advertiser after seeing an ad — 136% higher than the general population</a:t>
-            </a:r>
-          </a:p>
-          <a:p>
-            <a:pPr algn="l">
-              <a:lnSpc>
-                <a:spcPts val="2200"/>
-              </a:lnSpc>
+              <a:t>41% called or visited the advertiser after seeing an ad — </a:t>
+            </a:r>
+            <a:r>
+              <a:rPr sz="1100" b="1">
+                <a:solidFill>
+                  <a:srgbClr val="58595B"/>
+                </a:solidFill>
+                <a:latin typeface="Segoe UI"/>
+              </a:rPr>
+              <a:t>136% higher</a:t>
+            </a:r>
+            <a:r>
+              <a:rPr sz="1100" b="0">
+                <a:solidFill>
+                  <a:srgbClr val="58595B"/>
+                </a:solidFill>
+                <a:latin typeface="Segoe UI"/>
+              </a:rPr>
+              <a:t> than the general population</a:t>
+            </a:r>
+          </a:p>
+          <a:p>
+            <a:pPr algn="l" marL="228600" indent="-182880">
+              <a:spcBef>
+                <a:spcPts val="200"/>
+              </a:spcBef>
               <a:spcAft>
-                <a:spcPts val="800"/>
+                <a:spcPts val="400"/>
               </a:spcAft>
+              <a:buChar char="•"/>
+              <a:buClr>
+                <a:srgbClr val="C8102E"/>
+              </a:buClr>
+              <a:buSzPct val="100000"/>
+              <a:buFont typeface="Segoe UI"/>
             </a:pPr>
             <a:r>
-              <a:rPr sz="1400">
-                <a:solidFill>
-                  <a:srgbClr val="C8102E"/>
-                </a:solidFill>
-                <a:latin typeface="Segoe UI"/>
-              </a:rPr>
-              <a:t>•  </a:t>
-            </a:r>
-            <a:r>
-              <a:rPr sz="1400">
+              <a:rPr sz="1100" b="0">
                 <a:solidFill>
                   <a:srgbClr val="58595B"/>
                 </a:solidFill>
                 <a:latin typeface="Segoe UI"/>
               </a:rPr>
-              <a:t>Only 3.5% of restoration customers say they don’t read online reviews — nearly everyone checks</a:t>
+              <a:t>Only 3.5% of restoration customers say they don't read online reviews — </a:t>
+            </a:r>
+            <a:r>
+              <a:rPr sz="1100" b="1">
+                <a:solidFill>
+                  <a:srgbClr val="58595B"/>
+                </a:solidFill>
+                <a:latin typeface="Segoe UI"/>
+              </a:rPr>
+              <a:t>nearly everyone checks</a:t>
             </a:r>
           </a:p>
         </p:txBody>
@@ -9192,8 +9073,8 @@
         </p:nvSpPr>
         <p:spPr>
           <a:xfrm>
-            <a:off x="0" y="6035040"/>
-            <a:ext cx="12191695" cy="274320"/>
+            <a:off x="0" y="6263640"/>
+            <a:ext cx="12191695" cy="228600"/>
           </a:xfrm>
           <a:prstGeom prst="rect">
             <a:avLst/>
@@ -9201,20 +9082,17 @@
           <a:noFill/>
         </p:spPr>
         <p:txBody>
-          <a:bodyPr wrap="square">
-            <a:spAutoFit/>
-          </a:bodyPr>
-          <a:lstStyle/>
-          <a:p>
-            <a:pPr algn="ctr">
-              <a:defRPr sz="900" b="0">
+          <a:bodyPr wrap="square" anchor="t"/>
+          <a:lstStyle/>
+          <a:p>
+            <a:pPr algn="ctr"/>
+            <a:r>
+              <a:rPr sz="800" b="0">
                 <a:solidFill>
                   <a:srgbClr val="AAAAAA"/>
                 </a:solidFill>
                 <a:latin typeface="Segoe UI"/>
-              </a:defRPr>
-            </a:pPr>
-            <a:r>
+              </a:rPr>
               <a:t>Sources: AdMall/SalesFuel 2025; Cleanfax Restoration Benchmarking Survey 2024</a:t>
             </a:r>
           </a:p>
@@ -9236,8 +9114,8 @@
         </p:blipFill>
         <p:spPr>
           <a:xfrm>
-            <a:off x="365760" y="6126480"/>
-            <a:ext cx="345758" cy="502920"/>
+            <a:off x="365760" y="6309360"/>
+            <a:ext cx="282892" cy="411480"/>
           </a:xfrm>
           <a:prstGeom prst="rect">
             <a:avLst/>
@@ -9260,8 +9138,8 @@
         </p:blipFill>
         <p:spPr>
           <a:xfrm>
-            <a:off x="10515600" y="6263640"/>
-            <a:ext cx="526948" cy="320040"/>
+            <a:off x="11231575" y="6400800"/>
+            <a:ext cx="451669" cy="274320"/>
           </a:xfrm>
           <a:prstGeom prst="rect">
             <a:avLst/>
@@ -9294,8 +9172,8 @@
         </p:nvSpPr>
         <p:spPr>
           <a:xfrm>
-            <a:off x="731520" y="365760"/>
-            <a:ext cx="10058400" cy="548640"/>
+            <a:off x="548640" y="457200"/>
+            <a:ext cx="11094415" cy="411480"/>
           </a:xfrm>
           <a:prstGeom prst="rect">
             <a:avLst/>
@@ -9303,20 +9181,17 @@
           <a:noFill/>
         </p:spPr>
         <p:txBody>
-          <a:bodyPr wrap="square">
-            <a:spAutoFit/>
-          </a:bodyPr>
-          <a:lstStyle/>
-          <a:p>
-            <a:pPr algn="l">
-              <a:defRPr sz="2800" b="1">
+          <a:bodyPr wrap="square" anchor="t"/>
+          <a:lstStyle/>
+          <a:p>
+            <a:pPr algn="l"/>
+            <a:r>
+              <a:rPr sz="2000" b="1">
                 <a:solidFill>
                   <a:srgbClr val="1B3057"/>
                 </a:solidFill>
                 <a:latin typeface="Segoe UI"/>
-              </a:defRPr>
-            </a:pPr>
-            <a:r>
+              </a:rPr>
               <a:t>AI Is Changing How Customers Find You</a:t>
             </a:r>
           </a:p>
@@ -9330,8 +9205,8 @@
         </p:nvSpPr>
         <p:spPr>
           <a:xfrm>
-            <a:off x="731520" y="868680"/>
-            <a:ext cx="5486400" cy="38100"/>
+            <a:off x="548640" y="841248"/>
+            <a:ext cx="11094415" cy="38100"/>
           </a:xfrm>
           <a:prstGeom prst="rect">
             <a:avLst/>
@@ -9367,17 +9242,19 @@
       </p:sp>
       <p:sp>
         <p:nvSpPr>
-          <p:cNvPr id="4" name="Rectangle 3"/>
+          <p:cNvPr id="4" name="Rounded Rectangle 3"/>
           <p:cNvSpPr/>
           <p:nvPr/>
         </p:nvSpPr>
         <p:spPr>
           <a:xfrm>
-            <a:off x="1097280" y="1188720"/>
-            <a:ext cx="3200400" cy="1097280"/>
-          </a:xfrm>
-          <a:prstGeom prst="rect">
-            <a:avLst/>
+            <a:off x="548640" y="960120"/>
+            <a:ext cx="3606698" cy="1005840"/>
+          </a:xfrm>
+          <a:prstGeom prst="roundRect">
+            <a:avLst>
+              <a:gd name="adj" fmla="val 5000"/>
+            </a:avLst>
           </a:prstGeom>
           <a:solidFill>
             <a:srgbClr val="F2F2F2"/>
@@ -9416,8 +9293,8 @@
         </p:nvSpPr>
         <p:spPr>
           <a:xfrm>
-            <a:off x="1097280" y="1188720"/>
-            <a:ext cx="3200400" cy="63500"/>
+            <a:off x="548640" y="960120"/>
+            <a:ext cx="3606698" cy="50800"/>
           </a:xfrm>
           <a:prstGeom prst="rect">
             <a:avLst/>
@@ -9459,8 +9336,8 @@
         </p:nvSpPr>
         <p:spPr>
           <a:xfrm>
-            <a:off x="1097280" y="1417320"/>
-            <a:ext cx="3200400" cy="548640"/>
+            <a:off x="548640" y="1097280"/>
+            <a:ext cx="3606698" cy="411480"/>
           </a:xfrm>
           <a:prstGeom prst="rect">
             <a:avLst/>
@@ -9468,20 +9345,17 @@
           <a:noFill/>
         </p:spPr>
         <p:txBody>
-          <a:bodyPr wrap="square">
-            <a:spAutoFit/>
-          </a:bodyPr>
-          <a:lstStyle/>
-          <a:p>
-            <a:pPr algn="ctr">
-              <a:defRPr sz="3200" b="1">
+          <a:bodyPr wrap="square" anchor="t"/>
+          <a:lstStyle/>
+          <a:p>
+            <a:pPr algn="ctr"/>
+            <a:r>
+              <a:rPr sz="2800" b="1">
                 <a:solidFill>
                   <a:srgbClr val="1B3057"/>
                 </a:solidFill>
                 <a:latin typeface="Segoe UI"/>
-              </a:defRPr>
-            </a:pPr>
-            <a:r>
+              </a:rPr>
               <a:t>14.2%</a:t>
             </a:r>
           </a:p>
@@ -9495,8 +9369,8 @@
         </p:nvSpPr>
         <p:spPr>
           <a:xfrm>
-            <a:off x="1188720" y="1965960"/>
-            <a:ext cx="3017520" cy="731520"/>
+            <a:off x="594360" y="1463040"/>
+            <a:ext cx="3515258" cy="457200"/>
           </a:xfrm>
           <a:prstGeom prst="rect">
             <a:avLst/>
@@ -9504,20 +9378,17 @@
           <a:noFill/>
         </p:spPr>
         <p:txBody>
-          <a:bodyPr wrap="square">
-            <a:spAutoFit/>
-          </a:bodyPr>
-          <a:lstStyle/>
-          <a:p>
-            <a:pPr algn="ctr">
-              <a:defRPr sz="1100" b="0">
+          <a:bodyPr wrap="square" anchor="t"/>
+          <a:lstStyle/>
+          <a:p>
+            <a:pPr algn="ctr"/>
+            <a:r>
+              <a:rPr sz="1000" b="0">
                 <a:solidFill>
                   <a:srgbClr val="58595B"/>
                 </a:solidFill>
                 <a:latin typeface="Segoe UI"/>
-              </a:defRPr>
-            </a:pPr>
-            <a:r>
+              </a:rPr>
               <a:t>AI Conversion Rate</a:t>
             </a:r>
           </a:p>
@@ -9525,17 +9396,19 @@
       </p:sp>
       <p:sp>
         <p:nvSpPr>
-          <p:cNvPr id="8" name="Rectangle 7"/>
+          <p:cNvPr id="8" name="Rounded Rectangle 7"/>
           <p:cNvSpPr/>
           <p:nvPr/>
         </p:nvSpPr>
         <p:spPr>
           <a:xfrm>
-            <a:off x="4663440" y="1188720"/>
-            <a:ext cx="3200400" cy="1097280"/>
-          </a:xfrm>
-          <a:prstGeom prst="rect">
-            <a:avLst/>
+            <a:off x="4292498" y="960120"/>
+            <a:ext cx="3606698" cy="1005840"/>
+          </a:xfrm>
+          <a:prstGeom prst="roundRect">
+            <a:avLst>
+              <a:gd name="adj" fmla="val 5000"/>
+            </a:avLst>
           </a:prstGeom>
           <a:solidFill>
             <a:srgbClr val="F2F2F2"/>
@@ -9574,8 +9447,8 @@
         </p:nvSpPr>
         <p:spPr>
           <a:xfrm>
-            <a:off x="4663440" y="1188720"/>
-            <a:ext cx="3200400" cy="63500"/>
+            <a:off x="4292498" y="960120"/>
+            <a:ext cx="3606698" cy="50800"/>
           </a:xfrm>
           <a:prstGeom prst="rect">
             <a:avLst/>
@@ -9617,8 +9490,8 @@
         </p:nvSpPr>
         <p:spPr>
           <a:xfrm>
-            <a:off x="4663440" y="1417320"/>
-            <a:ext cx="3200400" cy="548640"/>
+            <a:off x="4292498" y="1097280"/>
+            <a:ext cx="3606698" cy="411480"/>
           </a:xfrm>
           <a:prstGeom prst="rect">
             <a:avLst/>
@@ -9626,20 +9499,17 @@
           <a:noFill/>
         </p:spPr>
         <p:txBody>
-          <a:bodyPr wrap="square">
-            <a:spAutoFit/>
-          </a:bodyPr>
-          <a:lstStyle/>
-          <a:p>
-            <a:pPr algn="ctr">
-              <a:defRPr sz="3200" b="1">
+          <a:bodyPr wrap="square" anchor="t"/>
+          <a:lstStyle/>
+          <a:p>
+            <a:pPr algn="ctr"/>
+            <a:r>
+              <a:rPr sz="2800" b="1">
                 <a:solidFill>
                   <a:srgbClr val="1B3057"/>
                 </a:solidFill>
                 <a:latin typeface="Segoe UI"/>
-              </a:defRPr>
-            </a:pPr>
-            <a:r>
+              </a:rPr>
               <a:t>2.8%</a:t>
             </a:r>
           </a:p>
@@ -9653,8 +9523,8 @@
         </p:nvSpPr>
         <p:spPr>
           <a:xfrm>
-            <a:off x="4754880" y="1965960"/>
-            <a:ext cx="3017520" cy="731520"/>
+            <a:off x="4338218" y="1463040"/>
+            <a:ext cx="3515258" cy="457200"/>
           </a:xfrm>
           <a:prstGeom prst="rect">
             <a:avLst/>
@@ -9662,20 +9532,17 @@
           <a:noFill/>
         </p:spPr>
         <p:txBody>
-          <a:bodyPr wrap="square">
-            <a:spAutoFit/>
-          </a:bodyPr>
-          <a:lstStyle/>
-          <a:p>
-            <a:pPr algn="ctr">
-              <a:defRPr sz="1100" b="0">
+          <a:bodyPr wrap="square" anchor="t"/>
+          <a:lstStyle/>
+          <a:p>
+            <a:pPr algn="ctr"/>
+            <a:r>
+              <a:rPr sz="1000" b="0">
                 <a:solidFill>
                   <a:srgbClr val="58595B"/>
                 </a:solidFill>
                 <a:latin typeface="Segoe UI"/>
-              </a:defRPr>
-            </a:pPr>
-            <a:r>
+              </a:rPr>
               <a:t>Google Conversion Rate</a:t>
             </a:r>
           </a:p>
@@ -9683,17 +9550,19 @@
       </p:sp>
       <p:sp>
         <p:nvSpPr>
-          <p:cNvPr id="12" name="Rectangle 11"/>
+          <p:cNvPr id="12" name="Rounded Rectangle 11"/>
           <p:cNvSpPr/>
           <p:nvPr/>
         </p:nvSpPr>
         <p:spPr>
           <a:xfrm>
-            <a:off x="8229600" y="1188720"/>
-            <a:ext cx="3200400" cy="1097280"/>
-          </a:xfrm>
-          <a:prstGeom prst="rect">
-            <a:avLst/>
+            <a:off x="8036356" y="960120"/>
+            <a:ext cx="3606698" cy="1005840"/>
+          </a:xfrm>
+          <a:prstGeom prst="roundRect">
+            <a:avLst>
+              <a:gd name="adj" fmla="val 5000"/>
+            </a:avLst>
           </a:prstGeom>
           <a:solidFill>
             <a:srgbClr val="F2F2F2"/>
@@ -9732,8 +9601,8 @@
         </p:nvSpPr>
         <p:spPr>
           <a:xfrm>
-            <a:off x="8229600" y="1188720"/>
-            <a:ext cx="3200400" cy="63500"/>
+            <a:off x="8036356" y="960120"/>
+            <a:ext cx="3606698" cy="50800"/>
           </a:xfrm>
           <a:prstGeom prst="rect">
             <a:avLst/>
@@ -9775,8 +9644,8 @@
         </p:nvSpPr>
         <p:spPr>
           <a:xfrm>
-            <a:off x="8229600" y="1417320"/>
-            <a:ext cx="3200400" cy="548640"/>
+            <a:off x="8036356" y="1097280"/>
+            <a:ext cx="3606698" cy="411480"/>
           </a:xfrm>
           <a:prstGeom prst="rect">
             <a:avLst/>
@@ -9784,20 +9653,17 @@
           <a:noFill/>
         </p:spPr>
         <p:txBody>
-          <a:bodyPr wrap="square">
-            <a:spAutoFit/>
-          </a:bodyPr>
-          <a:lstStyle/>
-          <a:p>
-            <a:pPr algn="ctr">
-              <a:defRPr sz="3200" b="1">
+          <a:bodyPr wrap="square" anchor="t"/>
+          <a:lstStyle/>
+          <a:p>
+            <a:pPr algn="ctr"/>
+            <a:r>
+              <a:rPr sz="2800" b="1">
                 <a:solidFill>
                   <a:srgbClr val="1B3057"/>
                 </a:solidFill>
                 <a:latin typeface="Segoe UI"/>
-              </a:defRPr>
-            </a:pPr>
-            <a:r>
+              </a:rPr>
               <a:t>5x</a:t>
             </a:r>
           </a:p>
@@ -9811,8 +9677,8 @@
         </p:nvSpPr>
         <p:spPr>
           <a:xfrm>
-            <a:off x="8321040" y="1965960"/>
-            <a:ext cx="3017520" cy="731520"/>
+            <a:off x="8082076" y="1463040"/>
+            <a:ext cx="3515258" cy="457200"/>
           </a:xfrm>
           <a:prstGeom prst="rect">
             <a:avLst/>
@@ -9820,20 +9686,17 @@
           <a:noFill/>
         </p:spPr>
         <p:txBody>
-          <a:bodyPr wrap="square">
-            <a:spAutoFit/>
-          </a:bodyPr>
-          <a:lstStyle/>
-          <a:p>
-            <a:pPr algn="ctr">
-              <a:defRPr sz="1100" b="0">
+          <a:bodyPr wrap="square" anchor="t"/>
+          <a:lstStyle/>
+          <a:p>
+            <a:pPr algn="ctr"/>
+            <a:r>
+              <a:rPr sz="1000" b="0">
                 <a:solidFill>
                   <a:srgbClr val="58595B"/>
                 </a:solidFill>
                 <a:latin typeface="Segoe UI"/>
-              </a:defRPr>
-            </a:pPr>
-            <a:r>
+              </a:rPr>
               <a:t>AI Converts Higher</a:t>
             </a:r>
           </a:p>
@@ -9847,8 +9710,8 @@
         </p:nvSpPr>
         <p:spPr>
           <a:xfrm>
-            <a:off x="731520" y="2651760"/>
-            <a:ext cx="5029200" cy="365760"/>
+            <a:off x="548640" y="2148840"/>
+            <a:ext cx="5410047" cy="228600"/>
           </a:xfrm>
           <a:prstGeom prst="rect">
             <a:avLst/>
@@ -9856,20 +9719,17 @@
           <a:noFill/>
         </p:spPr>
         <p:txBody>
-          <a:bodyPr wrap="square">
-            <a:spAutoFit/>
-          </a:bodyPr>
-          <a:lstStyle/>
-          <a:p>
-            <a:pPr algn="l">
-              <a:defRPr sz="1300" b="1">
+          <a:bodyPr wrap="square" anchor="t"/>
+          <a:lstStyle/>
+          <a:p>
+            <a:pPr algn="l"/>
+            <a:r>
+              <a:rPr sz="1000" b="1">
                 <a:solidFill>
                   <a:srgbClr val="1B3057"/>
                 </a:solidFill>
                 <a:latin typeface="Segoe UI"/>
-              </a:defRPr>
-            </a:pPr>
-            <a:r>
+              </a:rPr>
               <a:t>THE REALITY</a:t>
             </a:r>
           </a:p>
@@ -9883,8 +9743,8 @@
         </p:nvSpPr>
         <p:spPr>
           <a:xfrm>
-            <a:off x="731520" y="2971800"/>
-            <a:ext cx="5029200" cy="1188720"/>
+            <a:off x="548640" y="2377440"/>
+            <a:ext cx="5410047" cy="731520"/>
           </a:xfrm>
           <a:prstGeom prst="rect">
             <a:avLst/>
@@ -9892,30 +9752,25 @@
           <a:noFill/>
         </p:spPr>
         <p:txBody>
-          <a:bodyPr wrap="square">
-            <a:spAutoFit/>
-          </a:bodyPr>
-          <a:lstStyle/>
-          <a:p>
-            <a:pPr algn="l">
-              <a:lnSpc>
-                <a:spcPts val="2000"/>
-              </a:lnSpc>
+          <a:bodyPr wrap="square"/>
+          <a:lstStyle/>
+          <a:p>
+            <a:pPr algn="l" marL="228600" indent="-182880">
+              <a:spcBef>
+                <a:spcPts val="200"/>
+              </a:spcBef>
               <a:spcAft>
-                <a:spcPts val="800"/>
+                <a:spcPts val="400"/>
               </a:spcAft>
+              <a:buChar char="•"/>
+              <a:buClr>
+                <a:srgbClr val="C8102E"/>
+              </a:buClr>
+              <a:buSzPct val="100000"/>
+              <a:buFont typeface="Segoe UI"/>
             </a:pPr>
             <a:r>
-              <a:rPr sz="1300">
-                <a:solidFill>
-                  <a:srgbClr val="C8102E"/>
-                </a:solidFill>
-                <a:latin typeface="Segoe UI"/>
-              </a:rPr>
-              <a:t>•  </a:t>
-            </a:r>
-            <a:r>
-              <a:rPr sz="1300">
+              <a:rPr sz="1100" b="0">
                 <a:solidFill>
                   <a:srgbClr val="58595B"/>
                 </a:solidFill>
@@ -9925,53 +9780,56 @@
             </a:r>
           </a:p>
           <a:p>
-            <a:pPr algn="l">
-              <a:lnSpc>
-                <a:spcPts val="2000"/>
-              </a:lnSpc>
+            <a:pPr algn="l" marL="228600" indent="-182880">
+              <a:spcBef>
+                <a:spcPts val="200"/>
+              </a:spcBef>
               <a:spcAft>
-                <a:spcPts val="800"/>
+                <a:spcPts val="400"/>
               </a:spcAft>
+              <a:buChar char="•"/>
+              <a:buClr>
+                <a:srgbClr val="C8102E"/>
+              </a:buClr>
+              <a:buSzPct val="100000"/>
+              <a:buFont typeface="Segoe UI"/>
             </a:pPr>
             <a:r>
-              <a:rPr sz="1300">
-                <a:solidFill>
-                  <a:srgbClr val="C8102E"/>
-                </a:solidFill>
-                <a:latin typeface="Segoe UI"/>
-              </a:rPr>
-              <a:t>•  </a:t>
-            </a:r>
-            <a:r>
-              <a:rPr sz="1300">
+              <a:rPr sz="1100" b="0">
                 <a:solidFill>
                   <a:srgbClr val="58595B"/>
                 </a:solidFill>
                 <a:latin typeface="Segoe UI"/>
               </a:rPr>
-              <a:t>AI converts at 5x the rate</a:t>
-            </a:r>
-          </a:p>
-          <a:p>
-            <a:pPr algn="l">
-              <a:lnSpc>
-                <a:spcPts val="2000"/>
-              </a:lnSpc>
+              <a:t>AI converts at </a:t>
+            </a:r>
+            <a:r>
+              <a:rPr sz="1100" b="1">
+                <a:solidFill>
+                  <a:srgbClr val="58595B"/>
+                </a:solidFill>
+                <a:latin typeface="Segoe UI"/>
+              </a:rPr>
+              <a:t>5x the rate</a:t>
+            </a:r>
+          </a:p>
+          <a:p>
+            <a:pPr algn="l" marL="228600" indent="-182880">
+              <a:spcBef>
+                <a:spcPts val="200"/>
+              </a:spcBef>
               <a:spcAft>
-                <a:spcPts val="800"/>
+                <a:spcPts val="400"/>
               </a:spcAft>
+              <a:buChar char="•"/>
+              <a:buClr>
+                <a:srgbClr val="C8102E"/>
+              </a:buClr>
+              <a:buSzPct val="100000"/>
+              <a:buFont typeface="Segoe UI"/>
             </a:pPr>
             <a:r>
-              <a:rPr sz="1300">
-                <a:solidFill>
-                  <a:srgbClr val="C8102E"/>
-                </a:solidFill>
-                <a:latin typeface="Segoe UI"/>
-              </a:rPr>
-              <a:t>•  </a:t>
-            </a:r>
-            <a:r>
-              <a:rPr sz="1300">
+              <a:rPr sz="1100" b="0">
                 <a:solidFill>
                   <a:srgbClr val="58595B"/>
                 </a:solidFill>
@@ -9990,8 +9848,8 @@
         </p:nvSpPr>
         <p:spPr>
           <a:xfrm>
-            <a:off x="6217920" y="2651760"/>
-            <a:ext cx="5029200" cy="365760"/>
+            <a:off x="6233007" y="2148840"/>
+            <a:ext cx="5410047" cy="228600"/>
           </a:xfrm>
           <a:prstGeom prst="rect">
             <a:avLst/>
@@ -9999,20 +9857,17 @@
           <a:noFill/>
         </p:spPr>
         <p:txBody>
-          <a:bodyPr wrap="square">
-            <a:spAutoFit/>
-          </a:bodyPr>
-          <a:lstStyle/>
-          <a:p>
-            <a:pPr algn="l">
-              <a:defRPr sz="1300" b="1">
+          <a:bodyPr wrap="square" anchor="t"/>
+          <a:lstStyle/>
+          <a:p>
+            <a:pPr algn="l"/>
+            <a:r>
+              <a:rPr sz="1000" b="1">
                 <a:solidFill>
                   <a:srgbClr val="1B3057"/>
                 </a:solidFill>
                 <a:latin typeface="Segoe UI"/>
-              </a:defRPr>
-            </a:pPr>
-            <a:r>
+              </a:rPr>
               <a:t>THE GOOD NEWS</a:t>
             </a:r>
           </a:p>
@@ -10026,8 +9881,8 @@
         </p:nvSpPr>
         <p:spPr>
           <a:xfrm>
-            <a:off x="6217920" y="2971800"/>
-            <a:ext cx="5029200" cy="1371600"/>
+            <a:off x="6233007" y="2377440"/>
+            <a:ext cx="5410047" cy="731520"/>
           </a:xfrm>
           <a:prstGeom prst="rect">
             <a:avLst/>
@@ -10035,58 +9890,59 @@
           <a:noFill/>
         </p:spPr>
         <p:txBody>
-          <a:bodyPr wrap="square">
-            <a:spAutoFit/>
-          </a:bodyPr>
-          <a:lstStyle/>
-          <a:p>
-            <a:pPr algn="l">
-              <a:lnSpc>
-                <a:spcPts val="2000"/>
-              </a:lnSpc>
+          <a:bodyPr wrap="square"/>
+          <a:lstStyle/>
+          <a:p>
+            <a:pPr algn="l" marL="228600" indent="-182880">
+              <a:spcBef>
+                <a:spcPts val="200"/>
+              </a:spcBef>
               <a:spcAft>
-                <a:spcPts val="800"/>
+                <a:spcPts val="400"/>
               </a:spcAft>
+              <a:buChar char="•"/>
+              <a:buClr>
+                <a:srgbClr val="C8102E"/>
+              </a:buClr>
+              <a:buSzPct val="100000"/>
+              <a:buFont typeface="Segoe UI"/>
             </a:pPr>
             <a:r>
-              <a:rPr sz="1300">
-                <a:solidFill>
-                  <a:srgbClr val="C8102E"/>
-                </a:solidFill>
-                <a:latin typeface="Segoe UI"/>
-              </a:rPr>
-              <a:t>•  </a:t>
-            </a:r>
-            <a:r>
-              <a:rPr sz="1300">
+              <a:rPr sz="1100" b="0">
                 <a:solidFill>
                   <a:srgbClr val="58595B"/>
                 </a:solidFill>
                 <a:latin typeface="Segoe UI"/>
               </a:rPr>
-              <a:t>Google and AI reward the same thing</a:t>
-            </a:r>
-          </a:p>
-          <a:p>
-            <a:pPr algn="l">
-              <a:lnSpc>
-                <a:spcPts val="2000"/>
-              </a:lnSpc>
+              <a:t>Google and AI reward the </a:t>
+            </a:r>
+            <a:r>
+              <a:rPr sz="1100" b="1">
+                <a:solidFill>
+                  <a:srgbClr val="58595B"/>
+                </a:solidFill>
+                <a:latin typeface="Segoe UI"/>
+              </a:rPr>
+              <a:t>same thing</a:t>
+            </a:r>
+          </a:p>
+          <a:p>
+            <a:pPr algn="l" marL="228600" indent="-182880">
+              <a:spcBef>
+                <a:spcPts val="200"/>
+              </a:spcBef>
               <a:spcAft>
-                <a:spcPts val="800"/>
+                <a:spcPts val="400"/>
               </a:spcAft>
+              <a:buChar char="•"/>
+              <a:buClr>
+                <a:srgbClr val="C8102E"/>
+              </a:buClr>
+              <a:buSzPct val="100000"/>
+              <a:buFont typeface="Segoe UI"/>
             </a:pPr>
             <a:r>
-              <a:rPr sz="1300">
-                <a:solidFill>
-                  <a:srgbClr val="C8102E"/>
-                </a:solidFill>
-                <a:latin typeface="Segoe UI"/>
-              </a:rPr>
-              <a:t>•  </a:t>
-            </a:r>
-            <a:r>
-              <a:rPr sz="1300">
+              <a:rPr sz="1100" b="0">
                 <a:solidFill>
                   <a:srgbClr val="58595B"/>
                 </a:solidFill>
@@ -10096,25 +9952,22 @@
             </a:r>
           </a:p>
           <a:p>
-            <a:pPr algn="l">
-              <a:lnSpc>
-                <a:spcPts val="2000"/>
-              </a:lnSpc>
+            <a:pPr algn="l" marL="228600" indent="-182880">
+              <a:spcBef>
+                <a:spcPts val="200"/>
+              </a:spcBef>
               <a:spcAft>
-                <a:spcPts val="800"/>
+                <a:spcPts val="400"/>
               </a:spcAft>
+              <a:buChar char="•"/>
+              <a:buClr>
+                <a:srgbClr val="C8102E"/>
+              </a:buClr>
+              <a:buSzPct val="100000"/>
+              <a:buFont typeface="Segoe UI"/>
             </a:pPr>
             <a:r>
-              <a:rPr sz="1300">
-                <a:solidFill>
-                  <a:srgbClr val="C8102E"/>
-                </a:solidFill>
-                <a:latin typeface="Segoe UI"/>
-              </a:rPr>
-              <a:t>•  </a:t>
-            </a:r>
-            <a:r>
-              <a:rPr sz="1300">
+              <a:rPr sz="1100" b="0">
                 <a:solidFill>
                   <a:srgbClr val="58595B"/>
                 </a:solidFill>
@@ -10133,14 +9986,14 @@
         </p:nvSpPr>
         <p:spPr>
           <a:xfrm>
-            <a:off x="731520" y="4663440"/>
-            <a:ext cx="10515600" cy="685800"/>
+            <a:off x="548640" y="3246120"/>
+            <a:ext cx="11094415" cy="411480"/>
           </a:xfrm>
           <a:prstGeom prst="rect">
             <a:avLst/>
           </a:prstGeom>
           <a:solidFill>
-            <a:srgbClr val="FBF0F1"/>
+            <a:srgbClr val="FDEEF0"/>
           </a:solidFill>
           <a:ln>
             <a:noFill/>
@@ -10176,8 +10029,8 @@
         </p:nvSpPr>
         <p:spPr>
           <a:xfrm>
-            <a:off x="731520" y="4663440"/>
-            <a:ext cx="63500" cy="685800"/>
+            <a:off x="548640" y="3246120"/>
+            <a:ext cx="38100" cy="411480"/>
           </a:xfrm>
           <a:prstGeom prst="rect">
             <a:avLst/>
@@ -10219,8 +10072,8 @@
         </p:nvSpPr>
         <p:spPr>
           <a:xfrm>
-            <a:off x="960120" y="4736592"/>
-            <a:ext cx="10195560" cy="539496"/>
+            <a:off x="685800" y="3291840"/>
+            <a:ext cx="10911535" cy="320040"/>
           </a:xfrm>
           <a:prstGeom prst="rect">
             <a:avLst/>
@@ -10233,16 +10086,24 @@
           </a:bodyPr>
           <a:lstStyle/>
           <a:p>
-            <a:pPr algn="l">
-              <a:defRPr sz="1400" b="0">
+            <a:pPr algn="l"/>
+            <a:r>
+              <a:rPr sz="1100" b="1">
+                <a:solidFill>
+                  <a:srgbClr val="C8102E"/>
+                </a:solidFill>
+                <a:latin typeface="Segoe UI"/>
+              </a:rPr>
+              <a:t>You don't need two strategies. </a:t>
+            </a:r>
+            <a:r>
+              <a:rPr sz="1100" b="0">
                 <a:solidFill>
                   <a:srgbClr val="58595B"/>
                 </a:solidFill>
                 <a:latin typeface="Segoe UI"/>
-              </a:defRPr>
-            </a:pPr>
-            <a:r>
-              <a:t>You don't need two strategies. Google and AI are two systems rewarding the same thing.</a:t>
+              </a:rPr>
+              <a:t>Google and AI are two systems rewarding the same thing.</a:t>
             </a:r>
           </a:p>
         </p:txBody>
@@ -10255,8 +10116,8 @@
         </p:nvSpPr>
         <p:spPr>
           <a:xfrm>
-            <a:off x="0" y="6035040"/>
-            <a:ext cx="12191695" cy="274320"/>
+            <a:off x="0" y="6263640"/>
+            <a:ext cx="12191695" cy="228600"/>
           </a:xfrm>
           <a:prstGeom prst="rect">
             <a:avLst/>
@@ -10264,20 +10125,17 @@
           <a:noFill/>
         </p:spPr>
         <p:txBody>
-          <a:bodyPr wrap="square">
-            <a:spAutoFit/>
-          </a:bodyPr>
-          <a:lstStyle/>
-          <a:p>
-            <a:pPr algn="ctr">
-              <a:defRPr sz="900" b="0">
+          <a:bodyPr wrap="square" anchor="t"/>
+          <a:lstStyle/>
+          <a:p>
+            <a:pPr algn="ctr"/>
+            <a:r>
+              <a:rPr sz="800" b="0">
                 <a:solidFill>
                   <a:srgbClr val="AAAAAA"/>
                 </a:solidFill>
                 <a:latin typeface="Segoe UI"/>
-              </a:defRPr>
-            </a:pPr>
-            <a:r>
+              </a:rPr>
               <a:t>Source: Superprompt, 12M Visit Study, 2025</a:t>
             </a:r>
           </a:p>
@@ -10299,8 +10157,8 @@
         </p:blipFill>
         <p:spPr>
           <a:xfrm>
-            <a:off x="365760" y="6126480"/>
-            <a:ext cx="345758" cy="502920"/>
+            <a:off x="365760" y="6309360"/>
+            <a:ext cx="282892" cy="411480"/>
           </a:xfrm>
           <a:prstGeom prst="rect">
             <a:avLst/>
@@ -10323,8 +10181,8 @@
         </p:blipFill>
         <p:spPr>
           <a:xfrm>
-            <a:off x="10515600" y="6263640"/>
-            <a:ext cx="526948" cy="320040"/>
+            <a:off x="11231575" y="6400800"/>
+            <a:ext cx="451669" cy="274320"/>
           </a:xfrm>
           <a:prstGeom prst="rect">
             <a:avLst/>
@@ -10357,8 +10215,8 @@
         </p:nvSpPr>
         <p:spPr>
           <a:xfrm>
-            <a:off x="731520" y="365760"/>
-            <a:ext cx="10058400" cy="548640"/>
+            <a:off x="548640" y="457200"/>
+            <a:ext cx="11094415" cy="411480"/>
           </a:xfrm>
           <a:prstGeom prst="rect">
             <a:avLst/>
@@ -10366,20 +10224,17 @@
           <a:noFill/>
         </p:spPr>
         <p:txBody>
-          <a:bodyPr wrap="square">
-            <a:spAutoFit/>
-          </a:bodyPr>
-          <a:lstStyle/>
-          <a:p>
-            <a:pPr algn="l">
-              <a:defRPr sz="2800" b="1">
+          <a:bodyPr wrap="square" anchor="t"/>
+          <a:lstStyle/>
+          <a:p>
+            <a:pPr algn="l"/>
+            <a:r>
+              <a:rPr sz="2000" b="1">
                 <a:solidFill>
                   <a:srgbClr val="1B3057"/>
                 </a:solidFill>
                 <a:latin typeface="Segoe UI"/>
-              </a:defRPr>
-            </a:pPr>
-            <a:r>
+              </a:rPr>
               <a:t>What This Means for Your Funnel</a:t>
             </a:r>
           </a:p>
@@ -10393,8 +10248,8 @@
         </p:nvSpPr>
         <p:spPr>
           <a:xfrm>
-            <a:off x="731520" y="868680"/>
-            <a:ext cx="4572000" cy="38100"/>
+            <a:off x="548640" y="841248"/>
+            <a:ext cx="11094415" cy="38100"/>
           </a:xfrm>
           <a:prstGeom prst="rect">
             <a:avLst/>
@@ -10436,8 +10291,8 @@
         </p:nvSpPr>
         <p:spPr>
           <a:xfrm>
-            <a:off x="731520" y="1188720"/>
-            <a:ext cx="10515600" cy="3200400"/>
+            <a:off x="548640" y="960120"/>
+            <a:ext cx="11094415" cy="2286000"/>
           </a:xfrm>
           <a:prstGeom prst="rect">
             <a:avLst/>
@@ -10445,113 +10300,102 @@
           <a:noFill/>
         </p:spPr>
         <p:txBody>
-          <a:bodyPr wrap="square">
-            <a:spAutoFit/>
-          </a:bodyPr>
-          <a:lstStyle/>
-          <a:p>
-            <a:pPr algn="l">
-              <a:lnSpc>
-                <a:spcPts val="2400"/>
-              </a:lnSpc>
+          <a:bodyPr wrap="square"/>
+          <a:lstStyle/>
+          <a:p>
+            <a:pPr algn="l" marL="228600" indent="-182880">
+              <a:spcBef>
+                <a:spcPts val="200"/>
+              </a:spcBef>
               <a:spcAft>
-                <a:spcPts val="1000"/>
+                <a:spcPts val="400"/>
               </a:spcAft>
+              <a:buChar char="•"/>
+              <a:buClr>
+                <a:srgbClr val="C8102E"/>
+              </a:buClr>
+              <a:buSzPct val="100000"/>
+              <a:buFont typeface="Segoe UI"/>
             </a:pPr>
             <a:r>
-              <a:rPr sz="1600">
+              <a:rPr sz="1300" b="1">
                 <a:solidFill>
                   <a:srgbClr val="C8102E"/>
                 </a:solidFill>
                 <a:latin typeface="Segoe UI"/>
               </a:rPr>
-              <a:t>•  </a:t>
-            </a:r>
-            <a:r>
-              <a:rPr sz="1600" b="1">
+              <a:t>The bottom of the funnel still matters most. </a:t>
+            </a:r>
+            <a:r>
+              <a:rPr sz="1300" b="0">
+                <a:solidFill>
+                  <a:srgbClr val="58595B"/>
+                </a:solidFill>
+                <a:latin typeface="Segoe UI"/>
+              </a:rPr>
+              <a:t>LSA and PPC are where leads come from. But costs are up 20.9% — the bottom alone isn't enough anymore.</a:t>
+            </a:r>
+          </a:p>
+          <a:p>
+            <a:pPr algn="l" marL="228600" indent="-182880">
+              <a:spcBef>
+                <a:spcPts val="200"/>
+              </a:spcBef>
+              <a:spcAft>
+                <a:spcPts val="400"/>
+              </a:spcAft>
+              <a:buChar char="•"/>
+              <a:buClr>
+                <a:srgbClr val="C8102E"/>
+              </a:buClr>
+              <a:buSzPct val="100000"/>
+              <a:buFont typeface="Segoe UI"/>
+            </a:pPr>
+            <a:r>
+              <a:rPr sz="1300" b="1">
                 <a:solidFill>
                   <a:srgbClr val="C8102E"/>
                 </a:solidFill>
                 <a:latin typeface="Segoe UI"/>
               </a:rPr>
-              <a:t>The bottom of the funnel still matters most. </a:t>
-            </a:r>
-            <a:r>
-              <a:rPr sz="1600" b="0">
+              <a:t>The top of the funnel makes the bottom work harder. </a:t>
+            </a:r>
+            <a:r>
+              <a:rPr sz="1300" b="0">
                 <a:solidFill>
                   <a:srgbClr val="58595B"/>
                 </a:solidFill>
                 <a:latin typeface="Segoe UI"/>
               </a:rPr>
-              <a:t>LSA and PPC are where leads come from. But costs are up 20.9% — the bottom alone isn't enough anymore.</a:t>
-            </a:r>
-          </a:p>
-          <a:p>
-            <a:pPr algn="l">
-              <a:lnSpc>
-                <a:spcPts val="2400"/>
-              </a:lnSpc>
+              <a:t>Branded searches convert at 6x the rate of generic terms. Awareness doesn't replace demand capture — it supercharges it.</a:t>
+            </a:r>
+          </a:p>
+          <a:p>
+            <a:pPr algn="l" marL="228600" indent="-182880">
+              <a:spcBef>
+                <a:spcPts val="200"/>
+              </a:spcBef>
               <a:spcAft>
-                <a:spcPts val="1000"/>
+                <a:spcPts val="400"/>
               </a:spcAft>
+              <a:buChar char="•"/>
+              <a:buClr>
+                <a:srgbClr val="C8102E"/>
+              </a:buClr>
+              <a:buSzPct val="100000"/>
+              <a:buFont typeface="Segoe UI"/>
             </a:pPr>
             <a:r>
-              <a:rPr sz="1600">
+              <a:rPr sz="1300" b="1">
                 <a:solidFill>
                   <a:srgbClr val="C8102E"/>
                 </a:solidFill>
                 <a:latin typeface="Segoe UI"/>
               </a:rPr>
-              <a:t>•  </a:t>
-            </a:r>
-            <a:r>
-              <a:rPr sz="1600" b="1">
-                <a:solidFill>
-                  <a:srgbClr val="C8102E"/>
-                </a:solidFill>
-                <a:latin typeface="Segoe UI"/>
-              </a:rPr>
-              <a:t>The top of the funnel makes the bottom work harder. </a:t>
-            </a:r>
-            <a:r>
-              <a:rPr sz="1600" b="0">
-                <a:solidFill>
-                  <a:srgbClr val="58595B"/>
-                </a:solidFill>
-                <a:latin typeface="Segoe UI"/>
-              </a:rPr>
-              <a:t>Branded searches convert at 6x the rate of generic terms. Awareness doesn't replace demand capture — it supercharges it.</a:t>
-            </a:r>
-          </a:p>
-          <a:p>
-            <a:pPr algn="l">
-              <a:lnSpc>
-                <a:spcPts val="2400"/>
-              </a:lnSpc>
-              <a:spcAft>
-                <a:spcPts val="1000"/>
-              </a:spcAft>
-            </a:pPr>
-            <a:r>
-              <a:rPr sz="1600">
-                <a:solidFill>
-                  <a:srgbClr val="C8102E"/>
-                </a:solidFill>
-                <a:latin typeface="Segoe UI"/>
-              </a:rPr>
-              <a:t>•  </a:t>
-            </a:r>
-            <a:r>
-              <a:rPr sz="1600" b="1">
-                <a:solidFill>
-                  <a:srgbClr val="C8102E"/>
-                </a:solidFill>
-                <a:latin typeface="Segoe UI"/>
-              </a:rPr>
               <a:t>AI is the new front door. </a:t>
             </a:r>
             <a:r>
-              <a:rPr sz="1600" b="0">
+              <a:rPr sz="1300" b="0">
                 <a:solidFill>
                   <a:srgbClr val="58595B"/>
                 </a:solidFill>
@@ -10570,14 +10414,14 @@
         </p:nvSpPr>
         <p:spPr>
           <a:xfrm>
-            <a:off x="731520" y="4572000"/>
-            <a:ext cx="10515600" cy="777240"/>
+            <a:off x="548640" y="3429000"/>
+            <a:ext cx="11094415" cy="411480"/>
           </a:xfrm>
           <a:prstGeom prst="rect">
             <a:avLst/>
           </a:prstGeom>
           <a:solidFill>
-            <a:srgbClr val="EEEFF2"/>
+            <a:srgbClr val="EDEEF0"/>
           </a:solidFill>
           <a:ln>
             <a:noFill/>
@@ -10613,8 +10457,8 @@
         </p:nvSpPr>
         <p:spPr>
           <a:xfrm>
-            <a:off x="731520" y="4572000"/>
-            <a:ext cx="63500" cy="777240"/>
+            <a:off x="548640" y="3429000"/>
+            <a:ext cx="38100" cy="411480"/>
           </a:xfrm>
           <a:prstGeom prst="rect">
             <a:avLst/>
@@ -10656,8 +10500,8 @@
         </p:nvSpPr>
         <p:spPr>
           <a:xfrm>
-            <a:off x="960120" y="4645152"/>
-            <a:ext cx="10195560" cy="630936"/>
+            <a:off x="685800" y="3474720"/>
+            <a:ext cx="10911535" cy="320040"/>
           </a:xfrm>
           <a:prstGeom prst="rect">
             <a:avLst/>
@@ -10670,15 +10514,14 @@
           </a:bodyPr>
           <a:lstStyle/>
           <a:p>
-            <a:pPr algn="l">
-              <a:defRPr sz="1400" b="0">
+            <a:pPr algn="l"/>
+            <a:r>
+              <a:rPr sz="1100" b="0">
                 <a:solidFill>
                   <a:srgbClr val="58595B"/>
                 </a:solidFill>
                 <a:latin typeface="Segoe UI"/>
-              </a:defRPr>
-            </a:pPr>
-            <a:r>
+              </a:rPr>
               <a:t>Keep investing in the bottom. But the operators pulling ahead are the ones adding layers above it.</a:t>
             </a:r>
           </a:p>
@@ -10692,8 +10535,8 @@
         </p:nvSpPr>
         <p:spPr>
           <a:xfrm>
-            <a:off x="0" y="6035040"/>
-            <a:ext cx="12191695" cy="274320"/>
+            <a:off x="0" y="6263640"/>
+            <a:ext cx="12191695" cy="228600"/>
           </a:xfrm>
           <a:prstGeom prst="rect">
             <a:avLst/>
@@ -10701,20 +10544,17 @@
           <a:noFill/>
         </p:spPr>
         <p:txBody>
-          <a:bodyPr wrap="square">
-            <a:spAutoFit/>
-          </a:bodyPr>
-          <a:lstStyle/>
-          <a:p>
-            <a:pPr algn="ctr">
-              <a:defRPr sz="900" b="0">
+          <a:bodyPr wrap="square" anchor="t"/>
+          <a:lstStyle/>
+          <a:p>
+            <a:pPr algn="ctr"/>
+            <a:r>
+              <a:rPr sz="800" b="0">
                 <a:solidFill>
                   <a:srgbClr val="AAAAAA"/>
                 </a:solidFill>
                 <a:latin typeface="Segoe UI"/>
-              </a:defRPr>
-            </a:pPr>
-            <a:r>
+              </a:rPr>
               <a:t>Sources: SOS x C&amp;R Magazine Report 2026; AdMall/SalesFuel 2025</a:t>
             </a:r>
           </a:p>
@@ -10736,8 +10576,8 @@
         </p:blipFill>
         <p:spPr>
           <a:xfrm>
-            <a:off x="365760" y="6126480"/>
-            <a:ext cx="345758" cy="502920"/>
+            <a:off x="365760" y="6309360"/>
+            <a:ext cx="282892" cy="411480"/>
           </a:xfrm>
           <a:prstGeom prst="rect">
             <a:avLst/>
@@ -10760,8 +10600,8 @@
         </p:blipFill>
         <p:spPr>
           <a:xfrm>
-            <a:off x="10515600" y="6263640"/>
-            <a:ext cx="526948" cy="320040"/>
+            <a:off x="11231575" y="6400800"/>
+            <a:ext cx="451669" cy="274320"/>
           </a:xfrm>
           <a:prstGeom prst="rect">
             <a:avLst/>
@@ -10802,8 +10642,8 @@
         </p:nvSpPr>
         <p:spPr>
           <a:xfrm>
-            <a:off x="914400" y="1371600"/>
-            <a:ext cx="10332720" cy="1371600"/>
+            <a:off x="914400" y="1828800"/>
+            <a:ext cx="10362895" cy="914400"/>
           </a:xfrm>
           <a:prstGeom prst="rect">
             <a:avLst/>
@@ -10811,20 +10651,17 @@
           <a:noFill/>
         </p:spPr>
         <p:txBody>
-          <a:bodyPr wrap="square">
-            <a:spAutoFit/>
-          </a:bodyPr>
-          <a:lstStyle/>
-          <a:p>
-            <a:pPr algn="ctr">
-              <a:defRPr sz="6000" b="1">
+          <a:bodyPr wrap="square" anchor="t"/>
+          <a:lstStyle/>
+          <a:p>
+            <a:pPr algn="ctr"/>
+            <a:r>
+              <a:rPr sz="4400" b="1">
                 <a:solidFill>
                   <a:srgbClr val="FFFFFF"/>
                 </a:solidFill>
                 <a:latin typeface="Segoe UI"/>
-              </a:defRPr>
-            </a:pPr>
-            <a:r>
+              </a:rPr>
               <a:t>WORKSHOP</a:t>
             </a:r>
           </a:p>
@@ -10839,7 +10676,7 @@
         <p:spPr>
           <a:xfrm>
             <a:off x="914400" y="2743200"/>
-            <a:ext cx="10332720" cy="731520"/>
+            <a:ext cx="10362895" cy="457200"/>
           </a:xfrm>
           <a:prstGeom prst="rect">
             <a:avLst/>
@@ -10847,20 +10684,17 @@
           <a:noFill/>
         </p:spPr>
         <p:txBody>
-          <a:bodyPr wrap="square">
-            <a:spAutoFit/>
-          </a:bodyPr>
-          <a:lstStyle/>
-          <a:p>
-            <a:pPr algn="ctr">
-              <a:defRPr sz="2600" b="0">
-                <a:solidFill>
-                  <a:srgbClr val="FFFFFF"/>
-                </a:solidFill>
-                <a:latin typeface="Segoe UI"/>
-              </a:defRPr>
-            </a:pPr>
-            <a:r>
+          <a:bodyPr wrap="square" anchor="t"/>
+          <a:lstStyle/>
+          <a:p>
+            <a:pPr algn="ctr"/>
+            <a:r>
+              <a:rPr sz="1800" b="0">
+                <a:solidFill>
+                  <a:srgbClr val="FFCCCC"/>
+                </a:solidFill>
+                <a:latin typeface="Segoe UI"/>
+              </a:rPr>
               <a:t>Build Your Marketing Funnel</a:t>
             </a:r>
           </a:p>
@@ -10874,18 +10708,20 @@
         </p:nvSpPr>
         <p:spPr>
           <a:xfrm>
-            <a:off x="4114800" y="3840480"/>
-            <a:ext cx="1097280" cy="1097280"/>
+            <a:off x="4572000" y="3657600"/>
+            <a:ext cx="914400" cy="914400"/>
           </a:xfrm>
           <a:prstGeom prst="roundRect">
-            <a:avLst/>
+            <a:avLst>
+              <a:gd name="adj" fmla="val 8000"/>
+            </a:avLst>
           </a:prstGeom>
           <a:solidFill>
-            <a:srgbClr val="D0203E"/>
+            <a:srgbClr val="FFFFFF"/>
           </a:solidFill>
-          <a:ln w="25400">
+          <a:ln>
             <a:solidFill>
-              <a:srgbClr val="E05060"/>
+              <a:srgbClr val="DDDDDD"/>
             </a:solidFill>
           </a:ln>
         </p:spPr>
@@ -10919,8 +10755,8 @@
         </p:nvSpPr>
         <p:spPr>
           <a:xfrm>
-            <a:off x="4114800" y="4206240"/>
-            <a:ext cx="1097280" cy="365760"/>
+            <a:off x="4114800" y="4663440"/>
+            <a:ext cx="1828800" cy="320040"/>
           </a:xfrm>
           <a:prstGeom prst="rect">
             <a:avLst/>
@@ -10928,20 +10764,17 @@
           <a:noFill/>
         </p:spPr>
         <p:txBody>
-          <a:bodyPr wrap="square">
-            <a:spAutoFit/>
-          </a:bodyPr>
-          <a:lstStyle/>
-          <a:p>
-            <a:pPr algn="ctr">
-              <a:defRPr sz="1000" b="0">
-                <a:solidFill>
-                  <a:srgbClr val="E07080"/>
-                </a:solidFill>
-                <a:latin typeface="Segoe UI"/>
-              </a:defRPr>
-            </a:pPr>
-            <a:r>
+          <a:bodyPr wrap="square" anchor="t"/>
+          <a:lstStyle/>
+          <a:p>
+            <a:pPr algn="ctr"/>
+            <a:r>
+              <a:rPr sz="800" b="0">
+                <a:solidFill>
+                  <a:srgbClr val="CCCCCC"/>
+                </a:solidFill>
+                <a:latin typeface="Segoe UI"/>
+              </a:rPr>
               <a:t>QR CODE</a:t>
             </a:r>
           </a:p>
@@ -10955,8 +10788,8 @@
         </p:nvSpPr>
         <p:spPr>
           <a:xfrm>
-            <a:off x="5394960" y="3840480"/>
-            <a:ext cx="3657600" cy="1097280"/>
+            <a:off x="5669280" y="3703320"/>
+            <a:ext cx="3200400" cy="822960"/>
           </a:xfrm>
           <a:prstGeom prst="rect">
             <a:avLst/>
@@ -10964,31 +10797,62 @@
           <a:noFill/>
         </p:spPr>
         <p:txBody>
-          <a:bodyPr wrap="square">
-            <a:spAutoFit/>
-          </a:bodyPr>
+          <a:bodyPr wrap="square" anchor="t"/>
           <a:lstStyle/>
           <a:p>
             <a:pPr algn="l">
-              <a:lnSpc>
-                <a:spcPts val="2200"/>
-              </a:lnSpc>
-              <a:defRPr sz="1400" b="0">
-                <a:solidFill>
-                  <a:srgbClr val="FFCCCC"/>
-                </a:solidFill>
-                <a:latin typeface="Segoe UI"/>
-              </a:defRPr>
+              <a:spcBef>
+                <a:spcPts val="0"/>
+              </a:spcBef>
+              <a:spcAft>
+                <a:spcPts val="200"/>
+              </a:spcAft>
             </a:pPr>
             <a:r>
+              <a:rPr sz="1200" b="0">
+                <a:solidFill>
+                  <a:srgbClr val="FFDDDD"/>
+                </a:solidFill>
+                <a:latin typeface="Segoe UI"/>
+              </a:rPr>
               <a:t>Scan to open the</a:t>
             </a:r>
-            <a:br/>
-            <a:r>
+          </a:p>
+          <a:p>
+            <a:pPr algn="l">
+              <a:spcBef>
+                <a:spcPts val="0"/>
+              </a:spcBef>
+              <a:spcAft>
+                <a:spcPts val="200"/>
+              </a:spcAft>
+            </a:pPr>
+            <a:r>
+              <a:rPr sz="1200" b="1">
+                <a:solidFill>
+                  <a:srgbClr val="FFFFFF"/>
+                </a:solidFill>
+                <a:latin typeface="Segoe UI"/>
+              </a:rPr>
               <a:t>Workshop Worksheet</a:t>
             </a:r>
-            <a:br/>
-            <a:r>
+          </a:p>
+          <a:p>
+            <a:pPr algn="l">
+              <a:spcBef>
+                <a:spcPts val="0"/>
+              </a:spcBef>
+              <a:spcAft>
+                <a:spcPts val="200"/>
+              </a:spcAft>
+            </a:pPr>
+            <a:r>
+              <a:rPr sz="1000" b="0">
+                <a:solidFill>
+                  <a:srgbClr val="FFAAAA"/>
+                </a:solidFill>
+                <a:latin typeface="Segoe UI"/>
+              </a:rPr>
               <a:t>or use the printed copy at your seat</a:t>
             </a:r>
           </a:p>
@@ -11010,8 +10874,8 @@
         </p:blipFill>
         <p:spPr>
           <a:xfrm>
-            <a:off x="365760" y="6126480"/>
-            <a:ext cx="345758" cy="502920"/>
+            <a:off x="365760" y="6309360"/>
+            <a:ext cx="282892" cy="411480"/>
           </a:xfrm>
           <a:prstGeom prst="rect">
             <a:avLst/>
@@ -11034,8 +10898,8 @@
         </p:blipFill>
         <p:spPr>
           <a:xfrm>
-            <a:off x="10515600" y="6263640"/>
-            <a:ext cx="539741" cy="320040"/>
+            <a:off x="11231575" y="6400800"/>
+            <a:ext cx="462635" cy="274320"/>
           </a:xfrm>
           <a:prstGeom prst="rect">
             <a:avLst/>
